--- a/docs/content/05-teaching-resources/slides/digital-infrastructure/04-network-services-remote-access-and-installation.pptx
+++ b/docs/content/05-teaching-resources/slides/digital-infrastructure/04-network-services-remote-access-and-installation.pptx
@@ -10,11 +10,17 @@
     <p:sldId id="258" r:id="rId9"/>
     <p:sldId id="259" r:id="rId10"/>
     <p:sldId id="260" r:id="rId11"/>
-    <p:sldId id="261" r:id="rId12"/>
-    <p:sldId id="262" r:id="rId13"/>
+    <p:sldId id="261" r:id="rId13"/>
+    <p:sldId id="262" r:id="rId14"/>
     <p:sldId id="263" r:id="rId15"/>
     <p:sldId id="264" r:id="rId16"/>
     <p:sldId id="265" r:id="rId17"/>
+    <p:sldId id="266" r:id="rId18"/>
+    <p:sldId id="267" r:id="rId19"/>
+    <p:sldId id="268" r:id="rId20"/>
+    <p:sldId id="269" r:id="rId21"/>
+    <p:sldId id="270" r:id="rId22"/>
+    <p:sldId id="271" r:id="rId23"/>
   </p:sldIdLst>
   <p:sldSz cx="12191695" cy="6858000" type="screen4x3"/>
   <p:notesSz cx="6858000" cy="9144000"/>
@@ -511,7 +517,22 @@
           <a:lstStyle/>
           <a:p>
             <a:r>
-              <a:t>Give students a few minutes to answer on mini whiteboards or paper, then reveal the answers on the next slide.</a:t>
+              <a:t>Answers:</a:t>
+            </a:r>
+          </a:p>
+          <a:p>
+            <a:r>
+              <a:t>1. An organisational unit grouping users and devices in Active Directory.</a:t>
+            </a:r>
+          </a:p>
+          <a:p>
+            <a:r>
+              <a:t>2. Assigns IP addresses automatically.</a:t>
+            </a:r>
+          </a:p>
+          <a:p>
+            <a:r>
+              <a:t>3. Through GPOs linked to OUs.</a:t>
             </a:r>
           </a:p>
         </p:txBody>
@@ -581,7 +602,22 @@
           <a:lstStyle/>
           <a:p>
             <a:r>
-              <a:t>Talk through any answers the class found difficult.</a:t>
+              <a:t>Answers:</a:t>
+            </a:r>
+          </a:p>
+          <a:p>
+            <a:r>
+              <a:t>1. An encrypted tunnel into the network.</a:t>
+            </a:r>
+          </a:p>
+          <a:p>
+            <a:r>
+              <a:t>2. Lights-out management (LOM).</a:t>
+            </a:r>
+          </a:p>
+          <a:p>
+            <a:r>
+              <a:t>3. Secure command-line administration.</a:t>
             </a:r>
           </a:p>
         </p:txBody>
@@ -651,7 +687,22 @@
           <a:lstStyle/>
           <a:p>
             <a:r>
-              <a:t>Could be split over two lessons. A Linux alternative is Samba with isc-dhcp-server.</a:t>
+              <a:t>Answers:</a:t>
+            </a:r>
+          </a:p>
+          <a:p>
+            <a:r>
+              <a:t>1. To automate repetitive tasks quickly and consistently.</a:t>
+            </a:r>
+          </a:p>
+          <a:p>
+            <a:r>
+              <a:t>2. Monitoring resources so they don't run out.</a:t>
+            </a:r>
+          </a:p>
+          <a:p>
+            <a:r>
+              <a:t>3. To prove it works and to drive improvements.</a:t>
             </a:r>
           </a:p>
         </p:txBody>
@@ -677,6 +728,216 @@
 </file>
 
 <file path=ppt/notesSlides/notesSlide4.xml><?xml version="1.0" encoding="utf-8"?>
+<p:notes xmlns:a="http://schemas.openxmlformats.org/drawingml/2006/main" xmlns:p="http://schemas.openxmlformats.org/presentationml/2006/main" xmlns:r="http://schemas.openxmlformats.org/officeDocument/2006/relationships">
+  <p:cSld>
+    <p:spTree>
+      <p:nvGrpSpPr>
+        <p:cNvPr id="1" name=""/>
+        <p:cNvGrpSpPr/>
+        <p:nvPr/>
+      </p:nvGrpSpPr>
+      <p:grpSpPr>
+        <a:xfrm>
+          <a:off x="0" y="0"/>
+          <a:ext cx="0" cy="0"/>
+          <a:chOff x="0" y="0"/>
+          <a:chExt cx="0" cy="0"/>
+        </a:xfrm>
+      </p:grpSpPr>
+      <p:sp>
+        <p:nvSpPr>
+          <p:cNvPr id="2" name="Slide Image Placeholder 1"/>
+          <p:cNvSpPr>
+            <a:spLocks noGrp="1"/>
+          </p:cNvSpPr>
+          <p:nvPr>
+            <p:ph type="sldImg" idx="2"/>
+          </p:nvPr>
+        </p:nvSpPr>
+        <p:spPr/>
+      </p:sp>
+      <p:sp>
+        <p:nvSpPr>
+          <p:cNvPr id="3" name="Notes Placeholder 2"/>
+          <p:cNvSpPr>
+            <a:spLocks noGrp="1"/>
+          </p:cNvSpPr>
+          <p:nvPr>
+            <p:ph type="body" idx="3" sz="quarter"/>
+          </p:nvPr>
+        </p:nvSpPr>
+        <p:spPr/>
+        <p:txBody>
+          <a:bodyPr/>
+          <a:lstStyle/>
+          <a:p>
+            <a:r>
+              <a:t>Give students a few minutes to answer on mini whiteboards or paper, then reveal the answers on the next slide.</a:t>
+            </a:r>
+          </a:p>
+        </p:txBody>
+      </p:sp>
+      <p:sp>
+        <p:nvSpPr>
+          <p:cNvPr id="4" name="Slide Number Placeholder 3"/>
+          <p:cNvSpPr>
+            <a:spLocks noGrp="1"/>
+          </p:cNvSpPr>
+          <p:nvPr>
+            <p:ph type="sldNum" idx="5" sz="quarter"/>
+          </p:nvPr>
+        </p:nvSpPr>
+        <p:spPr/>
+      </p:sp>
+    </p:spTree>
+  </p:cSld>
+  <p:clrMapOvr>
+    <a:masterClrMapping/>
+  </p:clrMapOvr>
+</p:notes>
+</file>
+
+<file path=ppt/notesSlides/notesSlide5.xml><?xml version="1.0" encoding="utf-8"?>
+<p:notes xmlns:a="http://schemas.openxmlformats.org/drawingml/2006/main" xmlns:p="http://schemas.openxmlformats.org/presentationml/2006/main" xmlns:r="http://schemas.openxmlformats.org/officeDocument/2006/relationships">
+  <p:cSld>
+    <p:spTree>
+      <p:nvGrpSpPr>
+        <p:cNvPr id="1" name=""/>
+        <p:cNvGrpSpPr/>
+        <p:nvPr/>
+      </p:nvGrpSpPr>
+      <p:grpSpPr>
+        <a:xfrm>
+          <a:off x="0" y="0"/>
+          <a:ext cx="0" cy="0"/>
+          <a:chOff x="0" y="0"/>
+          <a:chExt cx="0" cy="0"/>
+        </a:xfrm>
+      </p:grpSpPr>
+      <p:sp>
+        <p:nvSpPr>
+          <p:cNvPr id="2" name="Slide Image Placeholder 1"/>
+          <p:cNvSpPr>
+            <a:spLocks noGrp="1"/>
+          </p:cNvSpPr>
+          <p:nvPr>
+            <p:ph type="sldImg" idx="2"/>
+          </p:nvPr>
+        </p:nvSpPr>
+        <p:spPr/>
+      </p:sp>
+      <p:sp>
+        <p:nvSpPr>
+          <p:cNvPr id="3" name="Notes Placeholder 2"/>
+          <p:cNvSpPr>
+            <a:spLocks noGrp="1"/>
+          </p:cNvSpPr>
+          <p:nvPr>
+            <p:ph type="body" idx="3" sz="quarter"/>
+          </p:nvPr>
+        </p:nvSpPr>
+        <p:spPr/>
+        <p:txBody>
+          <a:bodyPr/>
+          <a:lstStyle/>
+          <a:p>
+            <a:r>
+              <a:t>Talk through any answers the class found difficult.</a:t>
+            </a:r>
+          </a:p>
+        </p:txBody>
+      </p:sp>
+      <p:sp>
+        <p:nvSpPr>
+          <p:cNvPr id="4" name="Slide Number Placeholder 3"/>
+          <p:cNvSpPr>
+            <a:spLocks noGrp="1"/>
+          </p:cNvSpPr>
+          <p:nvPr>
+            <p:ph type="sldNum" idx="5" sz="quarter"/>
+          </p:nvPr>
+        </p:nvSpPr>
+        <p:spPr/>
+      </p:sp>
+    </p:spTree>
+  </p:cSld>
+  <p:clrMapOvr>
+    <a:masterClrMapping/>
+  </p:clrMapOvr>
+</p:notes>
+</file>
+
+<file path=ppt/notesSlides/notesSlide6.xml><?xml version="1.0" encoding="utf-8"?>
+<p:notes xmlns:a="http://schemas.openxmlformats.org/drawingml/2006/main" xmlns:p="http://schemas.openxmlformats.org/presentationml/2006/main" xmlns:r="http://schemas.openxmlformats.org/officeDocument/2006/relationships">
+  <p:cSld>
+    <p:spTree>
+      <p:nvGrpSpPr>
+        <p:cNvPr id="1" name=""/>
+        <p:cNvGrpSpPr/>
+        <p:nvPr/>
+      </p:nvGrpSpPr>
+      <p:grpSpPr>
+        <a:xfrm>
+          <a:off x="0" y="0"/>
+          <a:ext cx="0" cy="0"/>
+          <a:chOff x="0" y="0"/>
+          <a:chExt cx="0" cy="0"/>
+        </a:xfrm>
+      </p:grpSpPr>
+      <p:sp>
+        <p:nvSpPr>
+          <p:cNvPr id="2" name="Slide Image Placeholder 1"/>
+          <p:cNvSpPr>
+            <a:spLocks noGrp="1"/>
+          </p:cNvSpPr>
+          <p:nvPr>
+            <p:ph type="sldImg" idx="2"/>
+          </p:nvPr>
+        </p:nvSpPr>
+        <p:spPr/>
+      </p:sp>
+      <p:sp>
+        <p:nvSpPr>
+          <p:cNvPr id="3" name="Notes Placeholder 2"/>
+          <p:cNvSpPr>
+            <a:spLocks noGrp="1"/>
+          </p:cNvSpPr>
+          <p:nvPr>
+            <p:ph type="body" idx="3" sz="quarter"/>
+          </p:nvPr>
+        </p:nvSpPr>
+        <p:spPr/>
+        <p:txBody>
+          <a:bodyPr/>
+          <a:lstStyle/>
+          <a:p>
+            <a:r>
+              <a:t>Could be split over two lessons. A Linux alternative is Samba with isc-dhcp-server.</a:t>
+            </a:r>
+          </a:p>
+        </p:txBody>
+      </p:sp>
+      <p:sp>
+        <p:nvSpPr>
+          <p:cNvPr id="4" name="Slide Number Placeholder 3"/>
+          <p:cNvSpPr>
+            <a:spLocks noGrp="1"/>
+          </p:cNvSpPr>
+          <p:nvPr>
+            <p:ph type="sldNum" idx="5" sz="quarter"/>
+          </p:nvPr>
+        </p:nvSpPr>
+        <p:spPr/>
+      </p:sp>
+    </p:spTree>
+  </p:cSld>
+  <p:clrMapOvr>
+    <a:masterClrMapping/>
+  </p:clrMapOvr>
+</p:notes>
+</file>
+
+<file path=ppt/notesSlides/notesSlide7.xml><?xml version="1.0" encoding="utf-8"?>
 <p:notes xmlns:a="http://schemas.openxmlformats.org/drawingml/2006/main" xmlns:p="http://schemas.openxmlformats.org/presentationml/2006/main" xmlns:r="http://schemas.openxmlformats.org/officeDocument/2006/relationships">
   <p:cSld>
     <p:spTree>
@@ -4052,6 +4313,3939 @@
     <p:bg>
       <p:bgPr>
         <a:solidFill>
+          <a:srgbClr val="FFFFFF"/>
+        </a:solidFill>
+        <a:effectLst/>
+      </p:bgPr>
+    </p:bg>
+    <p:spTree>
+      <p:nvGrpSpPr>
+        <p:cNvPr id="1" name=""/>
+        <p:cNvGrpSpPr/>
+        <p:nvPr/>
+      </p:nvGrpSpPr>
+      <p:grpSpPr/>
+      <p:sp>
+        <p:nvSpPr>
+          <p:cNvPr id="2" name="TextBox 1"/>
+          <p:cNvSpPr txBox="1"/>
+          <p:nvPr/>
+        </p:nvSpPr>
+        <p:spPr>
+          <a:xfrm>
+            <a:off x="548640" y="320040"/>
+            <a:ext cx="11094415" cy="274320"/>
+          </a:xfrm>
+          <a:prstGeom prst="rect">
+            <a:avLst/>
+          </a:prstGeom>
+          <a:noFill/>
+        </p:spPr>
+        <p:txBody>
+          <a:bodyPr wrap="square" anchor="t" lIns="0" rIns="0" tIns="0" bIns="0"/>
+          <a:lstStyle/>
+          <a:p>
+            <a:pPr algn="l"/>
+            <a:r>
+              <a:rPr sz="1100" b="1" i="0">
+                <a:solidFill>
+                  <a:srgbClr val="54595D"/>
+                </a:solidFill>
+                <a:latin typeface="Calibri"/>
+              </a:rPr>
+              <a:t>DIGITAL INFRASTRUCTURE  ·  Digital Infrastructure Content Area 2</a:t>
+            </a:r>
+          </a:p>
+        </p:txBody>
+      </p:sp>
+      <p:sp>
+        <p:nvSpPr>
+          <p:cNvPr id="3" name="TextBox 2"/>
+          <p:cNvSpPr txBox="1"/>
+          <p:nvPr/>
+        </p:nvSpPr>
+        <p:spPr>
+          <a:xfrm>
+            <a:off x="548640" y="566928"/>
+            <a:ext cx="11094415" cy="822960"/>
+          </a:xfrm>
+          <a:prstGeom prst="rect">
+            <a:avLst/>
+          </a:prstGeom>
+          <a:noFill/>
+        </p:spPr>
+        <p:txBody>
+          <a:bodyPr wrap="square" anchor="ctr" lIns="0" rIns="0" tIns="0" bIns="0"/>
+          <a:lstStyle/>
+          <a:p>
+            <a:pPr algn="l"/>
+            <a:r>
+              <a:rPr sz="3200" b="1" i="0">
+                <a:solidFill>
+                  <a:srgbClr val="03306E"/>
+                </a:solidFill>
+                <a:latin typeface="Cambria"/>
+              </a:rPr>
+              <a:t>Install, configure, test, maintain</a:t>
+            </a:r>
+          </a:p>
+        </p:txBody>
+      </p:sp>
+      <p:sp>
+        <p:nvSpPr>
+          <p:cNvPr id="4" name="TextBox 3"/>
+          <p:cNvSpPr txBox="1"/>
+          <p:nvPr/>
+        </p:nvSpPr>
+        <p:spPr>
+          <a:xfrm>
+            <a:off x="548640" y="6446520"/>
+            <a:ext cx="8229600" cy="274320"/>
+          </a:xfrm>
+          <a:prstGeom prst="rect">
+            <a:avLst/>
+          </a:prstGeom>
+          <a:noFill/>
+        </p:spPr>
+        <p:txBody>
+          <a:bodyPr wrap="square" anchor="t" lIns="0" rIns="0" tIns="0" bIns="0"/>
+          <a:lstStyle/>
+          <a:p>
+            <a:pPr algn="l"/>
+            <a:r>
+              <a:rPr sz="1000" b="0" i="0">
+                <a:solidFill>
+                  <a:srgbClr val="54595D"/>
+                </a:solidFill>
+                <a:latin typeface="Calibri"/>
+              </a:rPr>
+              <a:t>Digital Support and Security T Level  ·  Network Services, Remote Access and Installation</a:t>
+            </a:r>
+          </a:p>
+        </p:txBody>
+      </p:sp>
+      <p:sp>
+        <p:nvSpPr>
+          <p:cNvPr id="5" name="TextBox 4"/>
+          <p:cNvSpPr txBox="1"/>
+          <p:nvPr/>
+        </p:nvSpPr>
+        <p:spPr>
+          <a:xfrm>
+            <a:off x="10728655" y="6446520"/>
+            <a:ext cx="914400" cy="274320"/>
+          </a:xfrm>
+          <a:prstGeom prst="rect">
+            <a:avLst/>
+          </a:prstGeom>
+          <a:noFill/>
+        </p:spPr>
+        <p:txBody>
+          <a:bodyPr wrap="square" anchor="t" lIns="0" rIns="0" tIns="0" bIns="0"/>
+          <a:lstStyle/>
+          <a:p>
+            <a:pPr algn="r"/>
+            <a:r>
+              <a:rPr sz="1000" b="0" i="0">
+                <a:solidFill>
+                  <a:srgbClr val="54595D"/>
+                </a:solidFill>
+                <a:latin typeface="Calibri"/>
+              </a:rPr>
+              <a:t>10</a:t>
+            </a:r>
+          </a:p>
+        </p:txBody>
+      </p:sp>
+      <p:sp>
+        <p:nvSpPr>
+          <p:cNvPr id="6" name="TextBox 5"/>
+          <p:cNvSpPr txBox="1"/>
+          <p:nvPr/>
+        </p:nvSpPr>
+        <p:spPr>
+          <a:xfrm>
+            <a:off x="548640" y="1554480"/>
+            <a:ext cx="6720840" cy="4617720"/>
+          </a:xfrm>
+          <a:prstGeom prst="rect">
+            <a:avLst/>
+          </a:prstGeom>
+          <a:noFill/>
+        </p:spPr>
+        <p:txBody>
+          <a:bodyPr wrap="square" lIns="0" rIns="0" tIns="0" bIns="0">
+            <a:spAutoFit/>
+          </a:bodyPr>
+          <a:lstStyle/>
+          <a:p>
+            <a:pPr>
+              <a:spcAft>
+                <a:spcPts val="1200"/>
+              </a:spcAft>
+            </a:pPr>
+            <a:r>
+              <a:rPr sz="2000" b="0">
+                <a:solidFill>
+                  <a:srgbClr val="202122"/>
+                </a:solidFill>
+                <a:latin typeface="Calibri"/>
+              </a:rPr>
+              <a:t>Building a network follows the same cycle for every component.</a:t>
+            </a:r>
+          </a:p>
+          <a:p>
+            <a:pPr>
+              <a:spcAft>
+                <a:spcPts val="1200"/>
+              </a:spcAft>
+            </a:pPr>
+            <a:r>
+              <a:rPr sz="2000" b="0">
+                <a:solidFill>
+                  <a:srgbClr val="202122"/>
+                </a:solidFill>
+                <a:latin typeface="Calibri"/>
+              </a:rPr>
+              <a:t>Install servers (physical or virtual), network devices, firewalls, load balancers and end-user devices.</a:t>
+            </a:r>
+          </a:p>
+          <a:p>
+            <a:pPr>
+              <a:spcAft>
+                <a:spcPts val="1200"/>
+              </a:spcAft>
+            </a:pPr>
+            <a:r>
+              <a:rPr sz="2000" b="1">
+                <a:solidFill>
+                  <a:srgbClr val="202122"/>
+                </a:solidFill>
+                <a:latin typeface="Calibri"/>
+              </a:rPr>
+              <a:t>Configure them:</a:t>
+            </a:r>
+            <a:r>
+              <a:rPr sz="2000" b="0">
+                <a:solidFill>
+                  <a:srgbClr val="202122"/>
+                </a:solidFill>
+                <a:latin typeface="Calibri"/>
+              </a:rPr>
+              <a:t> operating systems, applications and services such as DNS and DHCP, choosing the correct ports and protocols, using scripts to automate repetitive tasks, and applying the backup policy.</a:t>
+            </a:r>
+          </a:p>
+          <a:p>
+            <a:pPr>
+              <a:spcAft>
+                <a:spcPts val="1200"/>
+              </a:spcAft>
+            </a:pPr>
+            <a:r>
+              <a:rPr sz="2000" b="0">
+                <a:solidFill>
+                  <a:srgbClr val="202122"/>
+                </a:solidFill>
+                <a:latin typeface="Calibri"/>
+              </a:rPr>
+              <a:t>Test functionality and performance, and record the results.</a:t>
+            </a:r>
+          </a:p>
+          <a:p>
+            <a:pPr>
+              <a:spcAft>
+                <a:spcPts val="1200"/>
+              </a:spcAft>
+            </a:pPr>
+            <a:r>
+              <a:rPr sz="2000" b="1">
+                <a:solidFill>
+                  <a:srgbClr val="202122"/>
+                </a:solidFill>
+                <a:latin typeface="Calibri"/>
+              </a:rPr>
+              <a:t>Maintain the network:</a:t>
+            </a:r>
+            <a:r>
+              <a:rPr sz="2000" b="0">
+                <a:solidFill>
+                  <a:srgbClr val="202122"/>
+                </a:solidFill>
+                <a:latin typeface="Calibri"/>
+              </a:rPr>
+              <a:t> monitor performance, keep logs, manage capacity so it doesn't run out, and automate routine jobs.</a:t>
+            </a:r>
+          </a:p>
+        </p:txBody>
+      </p:sp>
+      <p:sp>
+        <p:nvSpPr>
+          <p:cNvPr id="7" name="Rounded Rectangle 6"/>
+          <p:cNvSpPr/>
+          <p:nvPr/>
+        </p:nvSpPr>
+        <p:spPr>
+          <a:xfrm>
+            <a:off x="7772400" y="1554480"/>
+            <a:ext cx="3867912" cy="4526280"/>
+          </a:xfrm>
+          <a:prstGeom prst="roundRect">
+            <a:avLst>
+              <a:gd name="adj" fmla="val 8000"/>
+            </a:avLst>
+          </a:prstGeom>
+          <a:solidFill>
+            <a:srgbClr val="03306E"/>
+          </a:solidFill>
+          <a:ln>
+            <a:noFill/>
+          </a:ln>
+          <a:effectLst/>
+        </p:spPr>
+        <p:style>
+          <a:lnRef idx="1">
+            <a:schemeClr val="accent1"/>
+          </a:lnRef>
+          <a:fillRef idx="3">
+            <a:schemeClr val="accent1"/>
+          </a:fillRef>
+          <a:effectRef idx="2">
+            <a:schemeClr val="accent1"/>
+          </a:effectRef>
+          <a:fontRef idx="minor">
+            <a:schemeClr val="lt1"/>
+          </a:fontRef>
+        </p:style>
+        <p:txBody>
+          <a:bodyPr rtlCol="0" anchor="ctr"/>
+          <a:lstStyle/>
+          <a:p/>
+        </p:txBody>
+      </p:sp>
+      <p:sp>
+        <p:nvSpPr>
+          <p:cNvPr id="8" name="Oval 7"/>
+          <p:cNvSpPr/>
+          <p:nvPr/>
+        </p:nvSpPr>
+        <p:spPr>
+          <a:xfrm>
+            <a:off x="8046720" y="1828800"/>
+            <a:ext cx="548640" cy="548640"/>
+          </a:xfrm>
+          <a:prstGeom prst="ellipse">
+            <a:avLst/>
+          </a:prstGeom>
+          <a:solidFill>
+            <a:srgbClr val="33C17A"/>
+          </a:solidFill>
+          <a:ln>
+            <a:noFill/>
+          </a:ln>
+          <a:effectLst/>
+        </p:spPr>
+        <p:style>
+          <a:lnRef idx="1">
+            <a:schemeClr val="accent1"/>
+          </a:lnRef>
+          <a:fillRef idx="3">
+            <a:schemeClr val="accent1"/>
+          </a:fillRef>
+          <a:effectRef idx="2">
+            <a:schemeClr val="accent1"/>
+          </a:effectRef>
+          <a:fontRef idx="minor">
+            <a:schemeClr val="lt1"/>
+          </a:fontRef>
+        </p:style>
+        <p:txBody>
+          <a:bodyPr rtlCol="0" anchor="ctr" lIns="0" rIns="0" tIns="0" bIns="0"/>
+          <a:lstStyle/>
+          <a:p>
+            <a:pPr algn="ctr"/>
+            <a:r>
+              <a:rPr sz="1300" b="1">
+                <a:solidFill>
+                  <a:srgbClr val="202122"/>
+                </a:solidFill>
+                <a:latin typeface="Calibri"/>
+              </a:rPr>
+              <a:t>e.g.</a:t>
+            </a:r>
+          </a:p>
+        </p:txBody>
+      </p:sp>
+      <p:sp>
+        <p:nvSpPr>
+          <p:cNvPr id="9" name="TextBox 8"/>
+          <p:cNvSpPr txBox="1"/>
+          <p:nvPr/>
+        </p:nvSpPr>
+        <p:spPr>
+          <a:xfrm>
+            <a:off x="8046720" y="2560320"/>
+            <a:ext cx="3291840" cy="365760"/>
+          </a:xfrm>
+          <a:prstGeom prst="rect">
+            <a:avLst/>
+          </a:prstGeom>
+          <a:noFill/>
+        </p:spPr>
+        <p:txBody>
+          <a:bodyPr wrap="square" anchor="t" lIns="0" rIns="0" tIns="0" bIns="0"/>
+          <a:lstStyle/>
+          <a:p>
+            <a:pPr algn="l"/>
+            <a:r>
+              <a:rPr sz="1300" b="1" i="0">
+                <a:solidFill>
+                  <a:srgbClr val="A9C8F0"/>
+                </a:solidFill>
+                <a:latin typeface="Calibri"/>
+              </a:rPr>
+              <a:t>EXAMPLE</a:t>
+            </a:r>
+          </a:p>
+        </p:txBody>
+      </p:sp>
+      <p:sp>
+        <p:nvSpPr>
+          <p:cNvPr id="10" name="TextBox 9"/>
+          <p:cNvSpPr txBox="1"/>
+          <p:nvPr/>
+        </p:nvSpPr>
+        <p:spPr>
+          <a:xfrm>
+            <a:off x="8046720" y="2971800"/>
+            <a:ext cx="3291840" cy="2971800"/>
+          </a:xfrm>
+          <a:prstGeom prst="rect">
+            <a:avLst/>
+          </a:prstGeom>
+          <a:noFill/>
+        </p:spPr>
+        <p:txBody>
+          <a:bodyPr wrap="square" anchor="t" lIns="0" rIns="0" tIns="0" bIns="0"/>
+          <a:lstStyle/>
+          <a:p>
+            <a:pPr algn="l"/>
+            <a:r>
+              <a:rPr sz="1900" b="0" i="0">
+                <a:solidFill>
+                  <a:srgbClr val="FFFFFF"/>
+                </a:solidFill>
+                <a:latin typeface="Cambria"/>
+              </a:rPr>
+              <a:t>A technician scripts the creation of 50 user accounts from a CSV file instead of making them one by one, then tests a sample can log in.</a:t>
+            </a:r>
+          </a:p>
+        </p:txBody>
+      </p:sp>
+    </p:spTree>
+  </p:cSld>
+  <p:clrMapOvr>
+    <a:masterClrMapping/>
+  </p:clrMapOvr>
+</p:sld>
+</file>
+
+<file path=ppt/slides/slide11.xml><?xml version="1.0" encoding="utf-8"?>
+<p:sld xmlns:a="http://schemas.openxmlformats.org/drawingml/2006/main" xmlns:p="http://schemas.openxmlformats.org/presentationml/2006/main" xmlns:r="http://schemas.openxmlformats.org/officeDocument/2006/relationships">
+  <p:cSld>
+    <p:bg>
+      <p:bgPr>
+        <a:solidFill>
+          <a:srgbClr val="FFFFFF"/>
+        </a:solidFill>
+        <a:effectLst/>
+      </p:bgPr>
+    </p:bg>
+    <p:spTree>
+      <p:nvGrpSpPr>
+        <p:cNvPr id="1" name=""/>
+        <p:cNvGrpSpPr/>
+        <p:nvPr/>
+      </p:nvGrpSpPr>
+      <p:grpSpPr/>
+      <p:sp>
+        <p:nvSpPr>
+          <p:cNvPr id="2" name="TextBox 1"/>
+          <p:cNvSpPr txBox="1"/>
+          <p:nvPr/>
+        </p:nvSpPr>
+        <p:spPr>
+          <a:xfrm>
+            <a:off x="548640" y="320040"/>
+            <a:ext cx="11094415" cy="274320"/>
+          </a:xfrm>
+          <a:prstGeom prst="rect">
+            <a:avLst/>
+          </a:prstGeom>
+          <a:noFill/>
+        </p:spPr>
+        <p:txBody>
+          <a:bodyPr wrap="square" anchor="t" lIns="0" rIns="0" tIns="0" bIns="0"/>
+          <a:lstStyle/>
+          <a:p>
+            <a:pPr algn="l"/>
+            <a:r>
+              <a:rPr sz="1100" b="1" i="0">
+                <a:solidFill>
+                  <a:srgbClr val="54595D"/>
+                </a:solidFill>
+                <a:latin typeface="Calibri"/>
+              </a:rPr>
+              <a:t>DIGITAL INFRASTRUCTURE  ·  Digital Infrastructure Content Area 2</a:t>
+            </a:r>
+          </a:p>
+        </p:txBody>
+      </p:sp>
+      <p:sp>
+        <p:nvSpPr>
+          <p:cNvPr id="3" name="TextBox 2"/>
+          <p:cNvSpPr txBox="1"/>
+          <p:nvPr/>
+        </p:nvSpPr>
+        <p:spPr>
+          <a:xfrm>
+            <a:off x="548640" y="566928"/>
+            <a:ext cx="11094415" cy="822960"/>
+          </a:xfrm>
+          <a:prstGeom prst="rect">
+            <a:avLst/>
+          </a:prstGeom>
+          <a:noFill/>
+        </p:spPr>
+        <p:txBody>
+          <a:bodyPr wrap="square" anchor="ctr" lIns="0" rIns="0" tIns="0" bIns="0"/>
+          <a:lstStyle/>
+          <a:p>
+            <a:pPr algn="l"/>
+            <a:r>
+              <a:rPr sz="3200" b="1" i="0">
+                <a:solidFill>
+                  <a:srgbClr val="03306E"/>
+                </a:solidFill>
+                <a:latin typeface="Cambria"/>
+              </a:rPr>
+              <a:t>Install, configure, test, maintain</a:t>
+            </a:r>
+          </a:p>
+        </p:txBody>
+      </p:sp>
+      <p:sp>
+        <p:nvSpPr>
+          <p:cNvPr id="4" name="TextBox 3"/>
+          <p:cNvSpPr txBox="1"/>
+          <p:nvPr/>
+        </p:nvSpPr>
+        <p:spPr>
+          <a:xfrm>
+            <a:off x="548640" y="6446520"/>
+            <a:ext cx="8229600" cy="274320"/>
+          </a:xfrm>
+          <a:prstGeom prst="rect">
+            <a:avLst/>
+          </a:prstGeom>
+          <a:noFill/>
+        </p:spPr>
+        <p:txBody>
+          <a:bodyPr wrap="square" anchor="t" lIns="0" rIns="0" tIns="0" bIns="0"/>
+          <a:lstStyle/>
+          <a:p>
+            <a:pPr algn="l"/>
+            <a:r>
+              <a:rPr sz="1000" b="0" i="0">
+                <a:solidFill>
+                  <a:srgbClr val="54595D"/>
+                </a:solidFill>
+                <a:latin typeface="Calibri"/>
+              </a:rPr>
+              <a:t>Digital Support and Security T Level  ·  Network Services, Remote Access and Installation</a:t>
+            </a:r>
+          </a:p>
+        </p:txBody>
+      </p:sp>
+      <p:sp>
+        <p:nvSpPr>
+          <p:cNvPr id="5" name="TextBox 4"/>
+          <p:cNvSpPr txBox="1"/>
+          <p:nvPr/>
+        </p:nvSpPr>
+        <p:spPr>
+          <a:xfrm>
+            <a:off x="10728655" y="6446520"/>
+            <a:ext cx="914400" cy="274320"/>
+          </a:xfrm>
+          <a:prstGeom prst="rect">
+            <a:avLst/>
+          </a:prstGeom>
+          <a:noFill/>
+        </p:spPr>
+        <p:txBody>
+          <a:bodyPr wrap="square" anchor="t" lIns="0" rIns="0" tIns="0" bIns="0"/>
+          <a:lstStyle/>
+          <a:p>
+            <a:pPr algn="r"/>
+            <a:r>
+              <a:rPr sz="1000" b="0" i="0">
+                <a:solidFill>
+                  <a:srgbClr val="54595D"/>
+                </a:solidFill>
+                <a:latin typeface="Calibri"/>
+              </a:rPr>
+              <a:t>11</a:t>
+            </a:r>
+          </a:p>
+        </p:txBody>
+      </p:sp>
+      <p:sp>
+        <p:nvSpPr>
+          <p:cNvPr id="6" name="Rectangle 5"/>
+          <p:cNvSpPr/>
+          <p:nvPr/>
+        </p:nvSpPr>
+        <p:spPr>
+          <a:xfrm>
+            <a:off x="1603217" y="2519172"/>
+            <a:ext cx="8985260" cy="36576"/>
+          </a:xfrm>
+          <a:prstGeom prst="rect">
+            <a:avLst/>
+          </a:prstGeom>
+          <a:solidFill>
+            <a:srgbClr val="A9C8F0"/>
+          </a:solidFill>
+          <a:ln>
+            <a:noFill/>
+          </a:ln>
+          <a:effectLst/>
+        </p:spPr>
+        <p:style>
+          <a:lnRef idx="1">
+            <a:schemeClr val="accent1"/>
+          </a:lnRef>
+          <a:fillRef idx="3">
+            <a:schemeClr val="accent1"/>
+          </a:fillRef>
+          <a:effectRef idx="2">
+            <a:schemeClr val="accent1"/>
+          </a:effectRef>
+          <a:fontRef idx="minor">
+            <a:schemeClr val="lt1"/>
+          </a:fontRef>
+        </p:style>
+        <p:txBody>
+          <a:bodyPr rtlCol="0" anchor="ctr"/>
+          <a:lstStyle/>
+          <a:p/>
+        </p:txBody>
+      </p:sp>
+      <p:sp>
+        <p:nvSpPr>
+          <p:cNvPr id="7" name="Oval 6"/>
+          <p:cNvSpPr/>
+          <p:nvPr/>
+        </p:nvSpPr>
+        <p:spPr>
+          <a:xfrm>
+            <a:off x="1283177" y="2217420"/>
+            <a:ext cx="640080" cy="640080"/>
+          </a:xfrm>
+          <a:prstGeom prst="ellipse">
+            <a:avLst/>
+          </a:prstGeom>
+          <a:solidFill>
+            <a:srgbClr val="33C17A"/>
+          </a:solidFill>
+          <a:ln>
+            <a:noFill/>
+          </a:ln>
+          <a:effectLst/>
+        </p:spPr>
+        <p:style>
+          <a:lnRef idx="1">
+            <a:schemeClr val="accent1"/>
+          </a:lnRef>
+          <a:fillRef idx="3">
+            <a:schemeClr val="accent1"/>
+          </a:fillRef>
+          <a:effectRef idx="2">
+            <a:schemeClr val="accent1"/>
+          </a:effectRef>
+          <a:fontRef idx="minor">
+            <a:schemeClr val="lt1"/>
+          </a:fontRef>
+        </p:style>
+        <p:txBody>
+          <a:bodyPr rtlCol="0" anchor="ctr" lIns="0" rIns="0" tIns="0" bIns="0"/>
+          <a:lstStyle/>
+          <a:p>
+            <a:pPr algn="ctr"/>
+            <a:r>
+              <a:rPr sz="2000" b="1">
+                <a:solidFill>
+                  <a:srgbClr val="202122"/>
+                </a:solidFill>
+                <a:latin typeface="Calibri"/>
+              </a:rPr>
+              <a:t>1</a:t>
+            </a:r>
+          </a:p>
+        </p:txBody>
+      </p:sp>
+      <p:sp>
+        <p:nvSpPr>
+          <p:cNvPr id="8" name="TextBox 7"/>
+          <p:cNvSpPr txBox="1"/>
+          <p:nvPr/>
+        </p:nvSpPr>
+        <p:spPr>
+          <a:xfrm>
+            <a:off x="548640" y="2994660"/>
+            <a:ext cx="2109155" cy="731520"/>
+          </a:xfrm>
+          <a:prstGeom prst="rect">
+            <a:avLst/>
+          </a:prstGeom>
+          <a:noFill/>
+        </p:spPr>
+        <p:txBody>
+          <a:bodyPr wrap="square" anchor="t" lIns="0" rIns="0" tIns="0" bIns="0"/>
+          <a:lstStyle/>
+          <a:p>
+            <a:pPr algn="ctr"/>
+            <a:r>
+              <a:rPr sz="1700" b="1" i="0">
+                <a:solidFill>
+                  <a:srgbClr val="03306E"/>
+                </a:solidFill>
+                <a:latin typeface="Calibri"/>
+              </a:rPr>
+              <a:t>Install</a:t>
+            </a:r>
+          </a:p>
+        </p:txBody>
+      </p:sp>
+      <p:sp>
+        <p:nvSpPr>
+          <p:cNvPr id="9" name="Rounded Rectangle 8"/>
+          <p:cNvSpPr/>
+          <p:nvPr/>
+        </p:nvSpPr>
+        <p:spPr>
+          <a:xfrm>
+            <a:off x="548640" y="3771900"/>
+            <a:ext cx="2109155" cy="1783080"/>
+          </a:xfrm>
+          <a:prstGeom prst="roundRect">
+            <a:avLst>
+              <a:gd name="adj" fmla="val 6000"/>
+            </a:avLst>
+          </a:prstGeom>
+          <a:solidFill>
+            <a:srgbClr val="EAF3FF"/>
+          </a:solidFill>
+          <a:ln>
+            <a:noFill/>
+          </a:ln>
+          <a:effectLst/>
+        </p:spPr>
+        <p:style>
+          <a:lnRef idx="1">
+            <a:schemeClr val="accent1"/>
+          </a:lnRef>
+          <a:fillRef idx="3">
+            <a:schemeClr val="accent1"/>
+          </a:fillRef>
+          <a:effectRef idx="2">
+            <a:schemeClr val="accent1"/>
+          </a:effectRef>
+          <a:fontRef idx="minor">
+            <a:schemeClr val="lt1"/>
+          </a:fontRef>
+        </p:style>
+        <p:txBody>
+          <a:bodyPr rtlCol="0" anchor="ctr"/>
+          <a:lstStyle/>
+          <a:p/>
+        </p:txBody>
+      </p:sp>
+      <p:sp>
+        <p:nvSpPr>
+          <p:cNvPr id="10" name="TextBox 9"/>
+          <p:cNvSpPr txBox="1"/>
+          <p:nvPr/>
+        </p:nvSpPr>
+        <p:spPr>
+          <a:xfrm>
+            <a:off x="685800" y="3909060"/>
+            <a:ext cx="1834835" cy="1508760"/>
+          </a:xfrm>
+          <a:prstGeom prst="rect">
+            <a:avLst/>
+          </a:prstGeom>
+          <a:noFill/>
+        </p:spPr>
+        <p:txBody>
+          <a:bodyPr wrap="square" anchor="t" lIns="0" rIns="0" tIns="0" bIns="0"/>
+          <a:lstStyle/>
+          <a:p>
+            <a:pPr algn="l"/>
+            <a:r>
+              <a:rPr sz="1800" b="0" i="0">
+                <a:solidFill>
+                  <a:srgbClr val="202122"/>
+                </a:solidFill>
+                <a:latin typeface="Calibri"/>
+              </a:rPr>
+              <a:t>Servers, network devices, firewalls, load balancers, end-user devices.</a:t>
+            </a:r>
+          </a:p>
+        </p:txBody>
+      </p:sp>
+      <p:sp>
+        <p:nvSpPr>
+          <p:cNvPr id="11" name="Oval 10"/>
+          <p:cNvSpPr/>
+          <p:nvPr/>
+        </p:nvSpPr>
+        <p:spPr>
+          <a:xfrm>
+            <a:off x="3529492" y="2217420"/>
+            <a:ext cx="640080" cy="640080"/>
+          </a:xfrm>
+          <a:prstGeom prst="ellipse">
+            <a:avLst/>
+          </a:prstGeom>
+          <a:solidFill>
+            <a:srgbClr val="33C17A"/>
+          </a:solidFill>
+          <a:ln>
+            <a:noFill/>
+          </a:ln>
+          <a:effectLst/>
+        </p:spPr>
+        <p:style>
+          <a:lnRef idx="1">
+            <a:schemeClr val="accent1"/>
+          </a:lnRef>
+          <a:fillRef idx="3">
+            <a:schemeClr val="accent1"/>
+          </a:fillRef>
+          <a:effectRef idx="2">
+            <a:schemeClr val="accent1"/>
+          </a:effectRef>
+          <a:fontRef idx="minor">
+            <a:schemeClr val="lt1"/>
+          </a:fontRef>
+        </p:style>
+        <p:txBody>
+          <a:bodyPr rtlCol="0" anchor="ctr" lIns="0" rIns="0" tIns="0" bIns="0"/>
+          <a:lstStyle/>
+          <a:p>
+            <a:pPr algn="ctr"/>
+            <a:r>
+              <a:rPr sz="2000" b="1">
+                <a:solidFill>
+                  <a:srgbClr val="202122"/>
+                </a:solidFill>
+                <a:latin typeface="Calibri"/>
+              </a:rPr>
+              <a:t>2</a:t>
+            </a:r>
+          </a:p>
+        </p:txBody>
+      </p:sp>
+      <p:sp>
+        <p:nvSpPr>
+          <p:cNvPr id="12" name="TextBox 11"/>
+          <p:cNvSpPr txBox="1"/>
+          <p:nvPr/>
+        </p:nvSpPr>
+        <p:spPr>
+          <a:xfrm>
+            <a:off x="2794955" y="2994660"/>
+            <a:ext cx="2109155" cy="731520"/>
+          </a:xfrm>
+          <a:prstGeom prst="rect">
+            <a:avLst/>
+          </a:prstGeom>
+          <a:noFill/>
+        </p:spPr>
+        <p:txBody>
+          <a:bodyPr wrap="square" anchor="t" lIns="0" rIns="0" tIns="0" bIns="0"/>
+          <a:lstStyle/>
+          <a:p>
+            <a:pPr algn="ctr"/>
+            <a:r>
+              <a:rPr sz="1700" b="1" i="0">
+                <a:solidFill>
+                  <a:srgbClr val="03306E"/>
+                </a:solidFill>
+                <a:latin typeface="Calibri"/>
+              </a:rPr>
+              <a:t>Configure</a:t>
+            </a:r>
+          </a:p>
+        </p:txBody>
+      </p:sp>
+      <p:sp>
+        <p:nvSpPr>
+          <p:cNvPr id="13" name="Rounded Rectangle 12"/>
+          <p:cNvSpPr/>
+          <p:nvPr/>
+        </p:nvSpPr>
+        <p:spPr>
+          <a:xfrm>
+            <a:off x="2794955" y="3771900"/>
+            <a:ext cx="2109155" cy="1783080"/>
+          </a:xfrm>
+          <a:prstGeom prst="roundRect">
+            <a:avLst>
+              <a:gd name="adj" fmla="val 6000"/>
+            </a:avLst>
+          </a:prstGeom>
+          <a:solidFill>
+            <a:srgbClr val="EAF3FF"/>
+          </a:solidFill>
+          <a:ln>
+            <a:noFill/>
+          </a:ln>
+          <a:effectLst/>
+        </p:spPr>
+        <p:style>
+          <a:lnRef idx="1">
+            <a:schemeClr val="accent1"/>
+          </a:lnRef>
+          <a:fillRef idx="3">
+            <a:schemeClr val="accent1"/>
+          </a:fillRef>
+          <a:effectRef idx="2">
+            <a:schemeClr val="accent1"/>
+          </a:effectRef>
+          <a:fontRef idx="minor">
+            <a:schemeClr val="lt1"/>
+          </a:fontRef>
+        </p:style>
+        <p:txBody>
+          <a:bodyPr rtlCol="0" anchor="ctr"/>
+          <a:lstStyle/>
+          <a:p/>
+        </p:txBody>
+      </p:sp>
+      <p:sp>
+        <p:nvSpPr>
+          <p:cNvPr id="14" name="TextBox 13"/>
+          <p:cNvSpPr txBox="1"/>
+          <p:nvPr/>
+        </p:nvSpPr>
+        <p:spPr>
+          <a:xfrm>
+            <a:off x="2932115" y="3909060"/>
+            <a:ext cx="1834835" cy="1508760"/>
+          </a:xfrm>
+          <a:prstGeom prst="rect">
+            <a:avLst/>
+          </a:prstGeom>
+          <a:noFill/>
+        </p:spPr>
+        <p:txBody>
+          <a:bodyPr wrap="square" anchor="t" lIns="0" rIns="0" tIns="0" bIns="0"/>
+          <a:lstStyle/>
+          <a:p>
+            <a:pPr algn="l"/>
+            <a:r>
+              <a:rPr sz="1800" b="0" i="0">
+                <a:solidFill>
+                  <a:srgbClr val="202122"/>
+                </a:solidFill>
+                <a:latin typeface="Calibri"/>
+              </a:rPr>
+              <a:t>Services like DNS and DHCP; correct ports and protocols; scripts.</a:t>
+            </a:r>
+          </a:p>
+        </p:txBody>
+      </p:sp>
+      <p:sp>
+        <p:nvSpPr>
+          <p:cNvPr id="15" name="Oval 14"/>
+          <p:cNvSpPr/>
+          <p:nvPr/>
+        </p:nvSpPr>
+        <p:spPr>
+          <a:xfrm>
+            <a:off x="5775807" y="2217420"/>
+            <a:ext cx="640080" cy="640080"/>
+          </a:xfrm>
+          <a:prstGeom prst="ellipse">
+            <a:avLst/>
+          </a:prstGeom>
+          <a:solidFill>
+            <a:srgbClr val="33C17A"/>
+          </a:solidFill>
+          <a:ln>
+            <a:noFill/>
+          </a:ln>
+          <a:effectLst/>
+        </p:spPr>
+        <p:style>
+          <a:lnRef idx="1">
+            <a:schemeClr val="accent1"/>
+          </a:lnRef>
+          <a:fillRef idx="3">
+            <a:schemeClr val="accent1"/>
+          </a:fillRef>
+          <a:effectRef idx="2">
+            <a:schemeClr val="accent1"/>
+          </a:effectRef>
+          <a:fontRef idx="minor">
+            <a:schemeClr val="lt1"/>
+          </a:fontRef>
+        </p:style>
+        <p:txBody>
+          <a:bodyPr rtlCol="0" anchor="ctr" lIns="0" rIns="0" tIns="0" bIns="0"/>
+          <a:lstStyle/>
+          <a:p>
+            <a:pPr algn="ctr"/>
+            <a:r>
+              <a:rPr sz="2000" b="1">
+                <a:solidFill>
+                  <a:srgbClr val="202122"/>
+                </a:solidFill>
+                <a:latin typeface="Calibri"/>
+              </a:rPr>
+              <a:t>3</a:t>
+            </a:r>
+          </a:p>
+        </p:txBody>
+      </p:sp>
+      <p:sp>
+        <p:nvSpPr>
+          <p:cNvPr id="16" name="TextBox 15"/>
+          <p:cNvSpPr txBox="1"/>
+          <p:nvPr/>
+        </p:nvSpPr>
+        <p:spPr>
+          <a:xfrm>
+            <a:off x="5041270" y="2994660"/>
+            <a:ext cx="2109155" cy="731520"/>
+          </a:xfrm>
+          <a:prstGeom prst="rect">
+            <a:avLst/>
+          </a:prstGeom>
+          <a:noFill/>
+        </p:spPr>
+        <p:txBody>
+          <a:bodyPr wrap="square" anchor="t" lIns="0" rIns="0" tIns="0" bIns="0"/>
+          <a:lstStyle/>
+          <a:p>
+            <a:pPr algn="ctr"/>
+            <a:r>
+              <a:rPr sz="1700" b="1" i="0">
+                <a:solidFill>
+                  <a:srgbClr val="03306E"/>
+                </a:solidFill>
+                <a:latin typeface="Calibri"/>
+              </a:rPr>
+              <a:t>Back up</a:t>
+            </a:r>
+          </a:p>
+        </p:txBody>
+      </p:sp>
+      <p:sp>
+        <p:nvSpPr>
+          <p:cNvPr id="17" name="Rounded Rectangle 16"/>
+          <p:cNvSpPr/>
+          <p:nvPr/>
+        </p:nvSpPr>
+        <p:spPr>
+          <a:xfrm>
+            <a:off x="5041270" y="3771900"/>
+            <a:ext cx="2109155" cy="1783080"/>
+          </a:xfrm>
+          <a:prstGeom prst="roundRect">
+            <a:avLst>
+              <a:gd name="adj" fmla="val 6000"/>
+            </a:avLst>
+          </a:prstGeom>
+          <a:solidFill>
+            <a:srgbClr val="EAF3FF"/>
+          </a:solidFill>
+          <a:ln>
+            <a:noFill/>
+          </a:ln>
+          <a:effectLst/>
+        </p:spPr>
+        <p:style>
+          <a:lnRef idx="1">
+            <a:schemeClr val="accent1"/>
+          </a:lnRef>
+          <a:fillRef idx="3">
+            <a:schemeClr val="accent1"/>
+          </a:fillRef>
+          <a:effectRef idx="2">
+            <a:schemeClr val="accent1"/>
+          </a:effectRef>
+          <a:fontRef idx="minor">
+            <a:schemeClr val="lt1"/>
+          </a:fontRef>
+        </p:style>
+        <p:txBody>
+          <a:bodyPr rtlCol="0" anchor="ctr"/>
+          <a:lstStyle/>
+          <a:p/>
+        </p:txBody>
+      </p:sp>
+      <p:sp>
+        <p:nvSpPr>
+          <p:cNvPr id="18" name="TextBox 17"/>
+          <p:cNvSpPr txBox="1"/>
+          <p:nvPr/>
+        </p:nvSpPr>
+        <p:spPr>
+          <a:xfrm>
+            <a:off x="5178430" y="3909060"/>
+            <a:ext cx="1834835" cy="1508760"/>
+          </a:xfrm>
+          <a:prstGeom prst="rect">
+            <a:avLst/>
+          </a:prstGeom>
+          <a:noFill/>
+        </p:spPr>
+        <p:txBody>
+          <a:bodyPr wrap="square" anchor="t" lIns="0" rIns="0" tIns="0" bIns="0"/>
+          <a:lstStyle/>
+          <a:p>
+            <a:pPr algn="l"/>
+            <a:r>
+              <a:rPr sz="1800" b="0" i="0">
+                <a:solidFill>
+                  <a:srgbClr val="202122"/>
+                </a:solidFill>
+                <a:latin typeface="Calibri"/>
+              </a:rPr>
+              <a:t>Apply the backup policy.</a:t>
+            </a:r>
+          </a:p>
+        </p:txBody>
+      </p:sp>
+      <p:sp>
+        <p:nvSpPr>
+          <p:cNvPr id="19" name="Oval 18"/>
+          <p:cNvSpPr/>
+          <p:nvPr/>
+        </p:nvSpPr>
+        <p:spPr>
+          <a:xfrm>
+            <a:off x="8022122" y="2217420"/>
+            <a:ext cx="640080" cy="640080"/>
+          </a:xfrm>
+          <a:prstGeom prst="ellipse">
+            <a:avLst/>
+          </a:prstGeom>
+          <a:solidFill>
+            <a:srgbClr val="33C17A"/>
+          </a:solidFill>
+          <a:ln>
+            <a:noFill/>
+          </a:ln>
+          <a:effectLst/>
+        </p:spPr>
+        <p:style>
+          <a:lnRef idx="1">
+            <a:schemeClr val="accent1"/>
+          </a:lnRef>
+          <a:fillRef idx="3">
+            <a:schemeClr val="accent1"/>
+          </a:fillRef>
+          <a:effectRef idx="2">
+            <a:schemeClr val="accent1"/>
+          </a:effectRef>
+          <a:fontRef idx="minor">
+            <a:schemeClr val="lt1"/>
+          </a:fontRef>
+        </p:style>
+        <p:txBody>
+          <a:bodyPr rtlCol="0" anchor="ctr" lIns="0" rIns="0" tIns="0" bIns="0"/>
+          <a:lstStyle/>
+          <a:p>
+            <a:pPr algn="ctr"/>
+            <a:r>
+              <a:rPr sz="2000" b="1">
+                <a:solidFill>
+                  <a:srgbClr val="202122"/>
+                </a:solidFill>
+                <a:latin typeface="Calibri"/>
+              </a:rPr>
+              <a:t>4</a:t>
+            </a:r>
+          </a:p>
+        </p:txBody>
+      </p:sp>
+      <p:sp>
+        <p:nvSpPr>
+          <p:cNvPr id="20" name="TextBox 19"/>
+          <p:cNvSpPr txBox="1"/>
+          <p:nvPr/>
+        </p:nvSpPr>
+        <p:spPr>
+          <a:xfrm>
+            <a:off x="7287585" y="2994660"/>
+            <a:ext cx="2109155" cy="731520"/>
+          </a:xfrm>
+          <a:prstGeom prst="rect">
+            <a:avLst/>
+          </a:prstGeom>
+          <a:noFill/>
+        </p:spPr>
+        <p:txBody>
+          <a:bodyPr wrap="square" anchor="t" lIns="0" rIns="0" tIns="0" bIns="0"/>
+          <a:lstStyle/>
+          <a:p>
+            <a:pPr algn="ctr"/>
+            <a:r>
+              <a:rPr sz="1700" b="1" i="0">
+                <a:solidFill>
+                  <a:srgbClr val="03306E"/>
+                </a:solidFill>
+                <a:latin typeface="Calibri"/>
+              </a:rPr>
+              <a:t>Test</a:t>
+            </a:r>
+          </a:p>
+        </p:txBody>
+      </p:sp>
+      <p:sp>
+        <p:nvSpPr>
+          <p:cNvPr id="21" name="Rounded Rectangle 20"/>
+          <p:cNvSpPr/>
+          <p:nvPr/>
+        </p:nvSpPr>
+        <p:spPr>
+          <a:xfrm>
+            <a:off x="7287585" y="3771900"/>
+            <a:ext cx="2109155" cy="1783080"/>
+          </a:xfrm>
+          <a:prstGeom prst="roundRect">
+            <a:avLst>
+              <a:gd name="adj" fmla="val 6000"/>
+            </a:avLst>
+          </a:prstGeom>
+          <a:solidFill>
+            <a:srgbClr val="EAF3FF"/>
+          </a:solidFill>
+          <a:ln>
+            <a:noFill/>
+          </a:ln>
+          <a:effectLst/>
+        </p:spPr>
+        <p:style>
+          <a:lnRef idx="1">
+            <a:schemeClr val="accent1"/>
+          </a:lnRef>
+          <a:fillRef idx="3">
+            <a:schemeClr val="accent1"/>
+          </a:fillRef>
+          <a:effectRef idx="2">
+            <a:schemeClr val="accent1"/>
+          </a:effectRef>
+          <a:fontRef idx="minor">
+            <a:schemeClr val="lt1"/>
+          </a:fontRef>
+        </p:style>
+        <p:txBody>
+          <a:bodyPr rtlCol="0" anchor="ctr"/>
+          <a:lstStyle/>
+          <a:p/>
+        </p:txBody>
+      </p:sp>
+      <p:sp>
+        <p:nvSpPr>
+          <p:cNvPr id="22" name="TextBox 21"/>
+          <p:cNvSpPr txBox="1"/>
+          <p:nvPr/>
+        </p:nvSpPr>
+        <p:spPr>
+          <a:xfrm>
+            <a:off x="7424745" y="3909060"/>
+            <a:ext cx="1834835" cy="1508760"/>
+          </a:xfrm>
+          <a:prstGeom prst="rect">
+            <a:avLst/>
+          </a:prstGeom>
+          <a:noFill/>
+        </p:spPr>
+        <p:txBody>
+          <a:bodyPr wrap="square" anchor="t" lIns="0" rIns="0" tIns="0" bIns="0"/>
+          <a:lstStyle/>
+          <a:p>
+            <a:pPr algn="l"/>
+            <a:r>
+              <a:rPr sz="1800" b="0" i="0">
+                <a:solidFill>
+                  <a:srgbClr val="202122"/>
+                </a:solidFill>
+                <a:latin typeface="Calibri"/>
+              </a:rPr>
+              <a:t>Functionality and performance; record results.</a:t>
+            </a:r>
+          </a:p>
+        </p:txBody>
+      </p:sp>
+      <p:sp>
+        <p:nvSpPr>
+          <p:cNvPr id="23" name="Oval 22"/>
+          <p:cNvSpPr/>
+          <p:nvPr/>
+        </p:nvSpPr>
+        <p:spPr>
+          <a:xfrm>
+            <a:off x="10268437" y="2217420"/>
+            <a:ext cx="640080" cy="640080"/>
+          </a:xfrm>
+          <a:prstGeom prst="ellipse">
+            <a:avLst/>
+          </a:prstGeom>
+          <a:solidFill>
+            <a:srgbClr val="33C17A"/>
+          </a:solidFill>
+          <a:ln>
+            <a:noFill/>
+          </a:ln>
+          <a:effectLst/>
+        </p:spPr>
+        <p:style>
+          <a:lnRef idx="1">
+            <a:schemeClr val="accent1"/>
+          </a:lnRef>
+          <a:fillRef idx="3">
+            <a:schemeClr val="accent1"/>
+          </a:fillRef>
+          <a:effectRef idx="2">
+            <a:schemeClr val="accent1"/>
+          </a:effectRef>
+          <a:fontRef idx="minor">
+            <a:schemeClr val="lt1"/>
+          </a:fontRef>
+        </p:style>
+        <p:txBody>
+          <a:bodyPr rtlCol="0" anchor="ctr" lIns="0" rIns="0" tIns="0" bIns="0"/>
+          <a:lstStyle/>
+          <a:p>
+            <a:pPr algn="ctr"/>
+            <a:r>
+              <a:rPr sz="2000" b="1">
+                <a:solidFill>
+                  <a:srgbClr val="202122"/>
+                </a:solidFill>
+                <a:latin typeface="Calibri"/>
+              </a:rPr>
+              <a:t>5</a:t>
+            </a:r>
+          </a:p>
+        </p:txBody>
+      </p:sp>
+      <p:sp>
+        <p:nvSpPr>
+          <p:cNvPr id="24" name="TextBox 23"/>
+          <p:cNvSpPr txBox="1"/>
+          <p:nvPr/>
+        </p:nvSpPr>
+        <p:spPr>
+          <a:xfrm>
+            <a:off x="9533900" y="2994660"/>
+            <a:ext cx="2109155" cy="731520"/>
+          </a:xfrm>
+          <a:prstGeom prst="rect">
+            <a:avLst/>
+          </a:prstGeom>
+          <a:noFill/>
+        </p:spPr>
+        <p:txBody>
+          <a:bodyPr wrap="square" anchor="t" lIns="0" rIns="0" tIns="0" bIns="0"/>
+          <a:lstStyle/>
+          <a:p>
+            <a:pPr algn="ctr"/>
+            <a:r>
+              <a:rPr sz="1700" b="1" i="0">
+                <a:solidFill>
+                  <a:srgbClr val="03306E"/>
+                </a:solidFill>
+                <a:latin typeface="Calibri"/>
+              </a:rPr>
+              <a:t>Maintain</a:t>
+            </a:r>
+          </a:p>
+        </p:txBody>
+      </p:sp>
+      <p:sp>
+        <p:nvSpPr>
+          <p:cNvPr id="25" name="Rounded Rectangle 24"/>
+          <p:cNvSpPr/>
+          <p:nvPr/>
+        </p:nvSpPr>
+        <p:spPr>
+          <a:xfrm>
+            <a:off x="9533900" y="3771900"/>
+            <a:ext cx="2109155" cy="1783080"/>
+          </a:xfrm>
+          <a:prstGeom prst="roundRect">
+            <a:avLst>
+              <a:gd name="adj" fmla="val 6000"/>
+            </a:avLst>
+          </a:prstGeom>
+          <a:solidFill>
+            <a:srgbClr val="EAF3FF"/>
+          </a:solidFill>
+          <a:ln>
+            <a:noFill/>
+          </a:ln>
+          <a:effectLst/>
+        </p:spPr>
+        <p:style>
+          <a:lnRef idx="1">
+            <a:schemeClr val="accent1"/>
+          </a:lnRef>
+          <a:fillRef idx="3">
+            <a:schemeClr val="accent1"/>
+          </a:fillRef>
+          <a:effectRef idx="2">
+            <a:schemeClr val="accent1"/>
+          </a:effectRef>
+          <a:fontRef idx="minor">
+            <a:schemeClr val="lt1"/>
+          </a:fontRef>
+        </p:style>
+        <p:txBody>
+          <a:bodyPr rtlCol="0" anchor="ctr"/>
+          <a:lstStyle/>
+          <a:p/>
+        </p:txBody>
+      </p:sp>
+      <p:sp>
+        <p:nvSpPr>
+          <p:cNvPr id="26" name="TextBox 25"/>
+          <p:cNvSpPr txBox="1"/>
+          <p:nvPr/>
+        </p:nvSpPr>
+        <p:spPr>
+          <a:xfrm>
+            <a:off x="9671060" y="3909060"/>
+            <a:ext cx="1834835" cy="1508760"/>
+          </a:xfrm>
+          <a:prstGeom prst="rect">
+            <a:avLst/>
+          </a:prstGeom>
+          <a:noFill/>
+        </p:spPr>
+        <p:txBody>
+          <a:bodyPr wrap="square" anchor="t" lIns="0" rIns="0" tIns="0" bIns="0"/>
+          <a:lstStyle/>
+          <a:p>
+            <a:pPr algn="l"/>
+            <a:r>
+              <a:rPr sz="1800" b="0" i="0">
+                <a:solidFill>
+                  <a:srgbClr val="202122"/>
+                </a:solidFill>
+                <a:latin typeface="Calibri"/>
+              </a:rPr>
+              <a:t>Monitor, log, manage capacity, automate with scripts.</a:t>
+            </a:r>
+          </a:p>
+        </p:txBody>
+      </p:sp>
+    </p:spTree>
+  </p:cSld>
+  <p:clrMapOvr>
+    <a:masterClrMapping/>
+  </p:clrMapOvr>
+</p:sld>
+</file>
+
+<file path=ppt/slides/slide12.xml><?xml version="1.0" encoding="utf-8"?>
+<p:sld xmlns:a="http://schemas.openxmlformats.org/drawingml/2006/main" xmlns:p="http://schemas.openxmlformats.org/presentationml/2006/main" xmlns:r="http://schemas.openxmlformats.org/officeDocument/2006/relationships">
+  <p:cSld>
+    <p:bg>
+      <p:bgPr>
+        <a:solidFill>
+          <a:srgbClr val="FFFFFF"/>
+        </a:solidFill>
+        <a:effectLst/>
+      </p:bgPr>
+    </p:bg>
+    <p:spTree>
+      <p:nvGrpSpPr>
+        <p:cNvPr id="1" name=""/>
+        <p:cNvGrpSpPr/>
+        <p:nvPr/>
+      </p:nvGrpSpPr>
+      <p:grpSpPr/>
+      <p:sp>
+        <p:nvSpPr>
+          <p:cNvPr id="2" name="TextBox 1"/>
+          <p:cNvSpPr txBox="1"/>
+          <p:nvPr/>
+        </p:nvSpPr>
+        <p:spPr>
+          <a:xfrm>
+            <a:off x="548640" y="320040"/>
+            <a:ext cx="11094415" cy="274320"/>
+          </a:xfrm>
+          <a:prstGeom prst="rect">
+            <a:avLst/>
+          </a:prstGeom>
+          <a:noFill/>
+        </p:spPr>
+        <p:txBody>
+          <a:bodyPr wrap="square" anchor="t" lIns="0" rIns="0" tIns="0" bIns="0"/>
+          <a:lstStyle/>
+          <a:p>
+            <a:pPr algn="l"/>
+            <a:r>
+              <a:rPr sz="1100" b="1" i="0">
+                <a:solidFill>
+                  <a:srgbClr val="54595D"/>
+                </a:solidFill>
+                <a:latin typeface="Calibri"/>
+              </a:rPr>
+              <a:t>DIGITAL INFRASTRUCTURE  ·  Digital Infrastructure Content Area 2</a:t>
+            </a:r>
+          </a:p>
+        </p:txBody>
+      </p:sp>
+      <p:sp>
+        <p:nvSpPr>
+          <p:cNvPr id="3" name="TextBox 2"/>
+          <p:cNvSpPr txBox="1"/>
+          <p:nvPr/>
+        </p:nvSpPr>
+        <p:spPr>
+          <a:xfrm>
+            <a:off x="548640" y="566928"/>
+            <a:ext cx="11094415" cy="822960"/>
+          </a:xfrm>
+          <a:prstGeom prst="rect">
+            <a:avLst/>
+          </a:prstGeom>
+          <a:noFill/>
+        </p:spPr>
+        <p:txBody>
+          <a:bodyPr wrap="square" anchor="ctr" lIns="0" rIns="0" tIns="0" bIns="0"/>
+          <a:lstStyle/>
+          <a:p>
+            <a:pPr algn="l"/>
+            <a:r>
+              <a:rPr sz="3200" b="1" i="0">
+                <a:solidFill>
+                  <a:srgbClr val="03306E"/>
+                </a:solidFill>
+                <a:latin typeface="Cambria"/>
+              </a:rPr>
+              <a:t>Quick check: Install, configure, test, maintain</a:t>
+            </a:r>
+          </a:p>
+        </p:txBody>
+      </p:sp>
+      <p:sp>
+        <p:nvSpPr>
+          <p:cNvPr id="4" name="TextBox 3"/>
+          <p:cNvSpPr txBox="1"/>
+          <p:nvPr/>
+        </p:nvSpPr>
+        <p:spPr>
+          <a:xfrm>
+            <a:off x="548640" y="6446520"/>
+            <a:ext cx="8229600" cy="274320"/>
+          </a:xfrm>
+          <a:prstGeom prst="rect">
+            <a:avLst/>
+          </a:prstGeom>
+          <a:noFill/>
+        </p:spPr>
+        <p:txBody>
+          <a:bodyPr wrap="square" anchor="t" lIns="0" rIns="0" tIns="0" bIns="0"/>
+          <a:lstStyle/>
+          <a:p>
+            <a:pPr algn="l"/>
+            <a:r>
+              <a:rPr sz="1000" b="0" i="0">
+                <a:solidFill>
+                  <a:srgbClr val="54595D"/>
+                </a:solidFill>
+                <a:latin typeface="Calibri"/>
+              </a:rPr>
+              <a:t>Digital Support and Security T Level  ·  Network Services, Remote Access and Installation</a:t>
+            </a:r>
+          </a:p>
+        </p:txBody>
+      </p:sp>
+      <p:sp>
+        <p:nvSpPr>
+          <p:cNvPr id="5" name="TextBox 4"/>
+          <p:cNvSpPr txBox="1"/>
+          <p:nvPr/>
+        </p:nvSpPr>
+        <p:spPr>
+          <a:xfrm>
+            <a:off x="10728655" y="6446520"/>
+            <a:ext cx="914400" cy="274320"/>
+          </a:xfrm>
+          <a:prstGeom prst="rect">
+            <a:avLst/>
+          </a:prstGeom>
+          <a:noFill/>
+        </p:spPr>
+        <p:txBody>
+          <a:bodyPr wrap="square" anchor="t" lIns="0" rIns="0" tIns="0" bIns="0"/>
+          <a:lstStyle/>
+          <a:p>
+            <a:pPr algn="r"/>
+            <a:r>
+              <a:rPr sz="1000" b="0" i="0">
+                <a:solidFill>
+                  <a:srgbClr val="54595D"/>
+                </a:solidFill>
+                <a:latin typeface="Calibri"/>
+              </a:rPr>
+              <a:t>12</a:t>
+            </a:r>
+          </a:p>
+        </p:txBody>
+      </p:sp>
+      <p:sp>
+        <p:nvSpPr>
+          <p:cNvPr id="6" name="Oval 5"/>
+          <p:cNvSpPr/>
+          <p:nvPr/>
+        </p:nvSpPr>
+        <p:spPr>
+          <a:xfrm>
+            <a:off x="548640" y="1691640"/>
+            <a:ext cx="502920" cy="502920"/>
+          </a:xfrm>
+          <a:prstGeom prst="ellipse">
+            <a:avLst/>
+          </a:prstGeom>
+          <a:solidFill>
+            <a:srgbClr val="33C17A"/>
+          </a:solidFill>
+          <a:ln>
+            <a:noFill/>
+          </a:ln>
+          <a:effectLst/>
+        </p:spPr>
+        <p:style>
+          <a:lnRef idx="1">
+            <a:schemeClr val="accent1"/>
+          </a:lnRef>
+          <a:fillRef idx="3">
+            <a:schemeClr val="accent1"/>
+          </a:fillRef>
+          <a:effectRef idx="2">
+            <a:schemeClr val="accent1"/>
+          </a:effectRef>
+          <a:fontRef idx="minor">
+            <a:schemeClr val="lt1"/>
+          </a:fontRef>
+        </p:style>
+        <p:txBody>
+          <a:bodyPr rtlCol="0" anchor="ctr" lIns="0" rIns="0" tIns="0" bIns="0"/>
+          <a:lstStyle/>
+          <a:p>
+            <a:pPr algn="ctr"/>
+            <a:r>
+              <a:rPr sz="1600" b="1">
+                <a:solidFill>
+                  <a:srgbClr val="202122"/>
+                </a:solidFill>
+                <a:latin typeface="Calibri"/>
+              </a:rPr>
+              <a:t>1</a:t>
+            </a:r>
+          </a:p>
+        </p:txBody>
+      </p:sp>
+      <p:sp>
+        <p:nvSpPr>
+          <p:cNvPr id="7" name="TextBox 6"/>
+          <p:cNvSpPr txBox="1"/>
+          <p:nvPr/>
+        </p:nvSpPr>
+        <p:spPr>
+          <a:xfrm>
+            <a:off x="1371600" y="1645920"/>
+            <a:ext cx="10271455" cy="1188720"/>
+          </a:xfrm>
+          <a:prstGeom prst="rect">
+            <a:avLst/>
+          </a:prstGeom>
+          <a:noFill/>
+        </p:spPr>
+        <p:txBody>
+          <a:bodyPr wrap="square" anchor="t" lIns="0" rIns="0" tIns="0" bIns="0"/>
+          <a:lstStyle/>
+          <a:p>
+            <a:pPr algn="l"/>
+            <a:r>
+              <a:rPr sz="2400" b="0" i="0">
+                <a:solidFill>
+                  <a:srgbClr val="202122"/>
+                </a:solidFill>
+                <a:latin typeface="Calibri"/>
+              </a:rPr>
+              <a:t>Why use scripting?</a:t>
+            </a:r>
+          </a:p>
+        </p:txBody>
+      </p:sp>
+      <p:sp>
+        <p:nvSpPr>
+          <p:cNvPr id="8" name="Oval 7"/>
+          <p:cNvSpPr/>
+          <p:nvPr/>
+        </p:nvSpPr>
+        <p:spPr>
+          <a:xfrm>
+            <a:off x="548640" y="3108960"/>
+            <a:ext cx="502920" cy="502920"/>
+          </a:xfrm>
+          <a:prstGeom prst="ellipse">
+            <a:avLst/>
+          </a:prstGeom>
+          <a:solidFill>
+            <a:srgbClr val="33C17A"/>
+          </a:solidFill>
+          <a:ln>
+            <a:noFill/>
+          </a:ln>
+          <a:effectLst/>
+        </p:spPr>
+        <p:style>
+          <a:lnRef idx="1">
+            <a:schemeClr val="accent1"/>
+          </a:lnRef>
+          <a:fillRef idx="3">
+            <a:schemeClr val="accent1"/>
+          </a:fillRef>
+          <a:effectRef idx="2">
+            <a:schemeClr val="accent1"/>
+          </a:effectRef>
+          <a:fontRef idx="minor">
+            <a:schemeClr val="lt1"/>
+          </a:fontRef>
+        </p:style>
+        <p:txBody>
+          <a:bodyPr rtlCol="0" anchor="ctr" lIns="0" rIns="0" tIns="0" bIns="0"/>
+          <a:lstStyle/>
+          <a:p>
+            <a:pPr algn="ctr"/>
+            <a:r>
+              <a:rPr sz="1600" b="1">
+                <a:solidFill>
+                  <a:srgbClr val="202122"/>
+                </a:solidFill>
+                <a:latin typeface="Calibri"/>
+              </a:rPr>
+              <a:t>2</a:t>
+            </a:r>
+          </a:p>
+        </p:txBody>
+      </p:sp>
+      <p:sp>
+        <p:nvSpPr>
+          <p:cNvPr id="9" name="TextBox 8"/>
+          <p:cNvSpPr txBox="1"/>
+          <p:nvPr/>
+        </p:nvSpPr>
+        <p:spPr>
+          <a:xfrm>
+            <a:off x="1371600" y="3063240"/>
+            <a:ext cx="10271455" cy="1188720"/>
+          </a:xfrm>
+          <a:prstGeom prst="rect">
+            <a:avLst/>
+          </a:prstGeom>
+          <a:noFill/>
+        </p:spPr>
+        <p:txBody>
+          <a:bodyPr wrap="square" anchor="t" lIns="0" rIns="0" tIns="0" bIns="0"/>
+          <a:lstStyle/>
+          <a:p>
+            <a:pPr algn="l"/>
+            <a:r>
+              <a:rPr sz="2400" b="0" i="0">
+                <a:solidFill>
+                  <a:srgbClr val="202122"/>
+                </a:solidFill>
+                <a:latin typeface="Calibri"/>
+              </a:rPr>
+              <a:t>What is capacity management?</a:t>
+            </a:r>
+          </a:p>
+        </p:txBody>
+      </p:sp>
+      <p:sp>
+        <p:nvSpPr>
+          <p:cNvPr id="10" name="Oval 9"/>
+          <p:cNvSpPr/>
+          <p:nvPr/>
+        </p:nvSpPr>
+        <p:spPr>
+          <a:xfrm>
+            <a:off x="548640" y="4526280"/>
+            <a:ext cx="502920" cy="502920"/>
+          </a:xfrm>
+          <a:prstGeom prst="ellipse">
+            <a:avLst/>
+          </a:prstGeom>
+          <a:solidFill>
+            <a:srgbClr val="33C17A"/>
+          </a:solidFill>
+          <a:ln>
+            <a:noFill/>
+          </a:ln>
+          <a:effectLst/>
+        </p:spPr>
+        <p:style>
+          <a:lnRef idx="1">
+            <a:schemeClr val="accent1"/>
+          </a:lnRef>
+          <a:fillRef idx="3">
+            <a:schemeClr val="accent1"/>
+          </a:fillRef>
+          <a:effectRef idx="2">
+            <a:schemeClr val="accent1"/>
+          </a:effectRef>
+          <a:fontRef idx="minor">
+            <a:schemeClr val="lt1"/>
+          </a:fontRef>
+        </p:style>
+        <p:txBody>
+          <a:bodyPr rtlCol="0" anchor="ctr" lIns="0" rIns="0" tIns="0" bIns="0"/>
+          <a:lstStyle/>
+          <a:p>
+            <a:pPr algn="ctr"/>
+            <a:r>
+              <a:rPr sz="1600" b="1">
+                <a:solidFill>
+                  <a:srgbClr val="202122"/>
+                </a:solidFill>
+                <a:latin typeface="Calibri"/>
+              </a:rPr>
+              <a:t>3</a:t>
+            </a:r>
+          </a:p>
+        </p:txBody>
+      </p:sp>
+      <p:sp>
+        <p:nvSpPr>
+          <p:cNvPr id="11" name="TextBox 10"/>
+          <p:cNvSpPr txBox="1"/>
+          <p:nvPr/>
+        </p:nvSpPr>
+        <p:spPr>
+          <a:xfrm>
+            <a:off x="1371600" y="4480560"/>
+            <a:ext cx="10271455" cy="1188720"/>
+          </a:xfrm>
+          <a:prstGeom prst="rect">
+            <a:avLst/>
+          </a:prstGeom>
+          <a:noFill/>
+        </p:spPr>
+        <p:txBody>
+          <a:bodyPr wrap="square" anchor="t" lIns="0" rIns="0" tIns="0" bIns="0"/>
+          <a:lstStyle/>
+          <a:p>
+            <a:pPr algn="l"/>
+            <a:r>
+              <a:rPr sz="2400" b="0" i="0">
+                <a:solidFill>
+                  <a:srgbClr val="202122"/>
+                </a:solidFill>
+                <a:latin typeface="Calibri"/>
+              </a:rPr>
+              <a:t>Why record test results?</a:t>
+            </a:r>
+          </a:p>
+        </p:txBody>
+      </p:sp>
+      <p:sp>
+        <p:nvSpPr>
+          <p:cNvPr id="12" name="TextBox 11"/>
+          <p:cNvSpPr txBox="1"/>
+          <p:nvPr/>
+        </p:nvSpPr>
+        <p:spPr>
+          <a:xfrm>
+            <a:off x="548640" y="5852160"/>
+            <a:ext cx="11094415" cy="365760"/>
+          </a:xfrm>
+          <a:prstGeom prst="rect">
+            <a:avLst/>
+          </a:prstGeom>
+          <a:noFill/>
+        </p:spPr>
+        <p:txBody>
+          <a:bodyPr wrap="square" anchor="t" lIns="0" rIns="0" tIns="0" bIns="0"/>
+          <a:lstStyle/>
+          <a:p>
+            <a:pPr algn="l"/>
+            <a:r>
+              <a:rPr sz="1300" b="0" i="1">
+                <a:solidFill>
+                  <a:srgbClr val="54595D"/>
+                </a:solidFill>
+                <a:latin typeface="Calibri"/>
+              </a:rPr>
+              <a:t>Answer on mini whiteboards or in your book. Answers are in the speaker notes.</a:t>
+            </a:r>
+          </a:p>
+        </p:txBody>
+      </p:sp>
+    </p:spTree>
+  </p:cSld>
+  <p:clrMapOvr>
+    <a:masterClrMapping/>
+  </p:clrMapOvr>
+</p:sld>
+</file>
+
+<file path=ppt/slides/slide13.xml><?xml version="1.0" encoding="utf-8"?>
+<p:sld xmlns:a="http://schemas.openxmlformats.org/drawingml/2006/main" xmlns:p="http://schemas.openxmlformats.org/presentationml/2006/main" xmlns:r="http://schemas.openxmlformats.org/officeDocument/2006/relationships">
+  <p:cSld>
+    <p:bg>
+      <p:bgPr>
+        <a:solidFill>
+          <a:srgbClr val="FFFFFF"/>
+        </a:solidFill>
+        <a:effectLst/>
+      </p:bgPr>
+    </p:bg>
+    <p:spTree>
+      <p:nvGrpSpPr>
+        <p:cNvPr id="1" name=""/>
+        <p:cNvGrpSpPr/>
+        <p:nvPr/>
+      </p:nvGrpSpPr>
+      <p:grpSpPr/>
+      <p:sp>
+        <p:nvSpPr>
+          <p:cNvPr id="2" name="TextBox 1"/>
+          <p:cNvSpPr txBox="1"/>
+          <p:nvPr/>
+        </p:nvSpPr>
+        <p:spPr>
+          <a:xfrm>
+            <a:off x="548640" y="320040"/>
+            <a:ext cx="11094415" cy="274320"/>
+          </a:xfrm>
+          <a:prstGeom prst="rect">
+            <a:avLst/>
+          </a:prstGeom>
+          <a:noFill/>
+        </p:spPr>
+        <p:txBody>
+          <a:bodyPr wrap="square" anchor="t" lIns="0" rIns="0" tIns="0" bIns="0"/>
+          <a:lstStyle/>
+          <a:p>
+            <a:pPr algn="l"/>
+            <a:r>
+              <a:rPr sz="1100" b="1" i="0">
+                <a:solidFill>
+                  <a:srgbClr val="54595D"/>
+                </a:solidFill>
+                <a:latin typeface="Calibri"/>
+              </a:rPr>
+              <a:t>DIGITAL INFRASTRUCTURE  ·  Digital Infrastructure Content Area 2</a:t>
+            </a:r>
+          </a:p>
+        </p:txBody>
+      </p:sp>
+      <p:sp>
+        <p:nvSpPr>
+          <p:cNvPr id="3" name="TextBox 2"/>
+          <p:cNvSpPr txBox="1"/>
+          <p:nvPr/>
+        </p:nvSpPr>
+        <p:spPr>
+          <a:xfrm>
+            <a:off x="548640" y="566928"/>
+            <a:ext cx="11094415" cy="822960"/>
+          </a:xfrm>
+          <a:prstGeom prst="rect">
+            <a:avLst/>
+          </a:prstGeom>
+          <a:noFill/>
+        </p:spPr>
+        <p:txBody>
+          <a:bodyPr wrap="square" anchor="ctr" lIns="0" rIns="0" tIns="0" bIns="0"/>
+          <a:lstStyle/>
+          <a:p>
+            <a:pPr algn="l"/>
+            <a:r>
+              <a:rPr sz="3200" b="1" i="0">
+                <a:solidFill>
+                  <a:srgbClr val="03306E"/>
+                </a:solidFill>
+                <a:latin typeface="Cambria"/>
+              </a:rPr>
+              <a:t>Check your understanding</a:t>
+            </a:r>
+          </a:p>
+        </p:txBody>
+      </p:sp>
+      <p:sp>
+        <p:nvSpPr>
+          <p:cNvPr id="4" name="TextBox 3"/>
+          <p:cNvSpPr txBox="1"/>
+          <p:nvPr/>
+        </p:nvSpPr>
+        <p:spPr>
+          <a:xfrm>
+            <a:off x="548640" y="6446520"/>
+            <a:ext cx="8229600" cy="274320"/>
+          </a:xfrm>
+          <a:prstGeom prst="rect">
+            <a:avLst/>
+          </a:prstGeom>
+          <a:noFill/>
+        </p:spPr>
+        <p:txBody>
+          <a:bodyPr wrap="square" anchor="t" lIns="0" rIns="0" tIns="0" bIns="0"/>
+          <a:lstStyle/>
+          <a:p>
+            <a:pPr algn="l"/>
+            <a:r>
+              <a:rPr sz="1000" b="0" i="0">
+                <a:solidFill>
+                  <a:srgbClr val="54595D"/>
+                </a:solidFill>
+                <a:latin typeface="Calibri"/>
+              </a:rPr>
+              <a:t>Digital Support and Security T Level  ·  Network Services, Remote Access and Installation</a:t>
+            </a:r>
+          </a:p>
+        </p:txBody>
+      </p:sp>
+      <p:sp>
+        <p:nvSpPr>
+          <p:cNvPr id="5" name="TextBox 4"/>
+          <p:cNvSpPr txBox="1"/>
+          <p:nvPr/>
+        </p:nvSpPr>
+        <p:spPr>
+          <a:xfrm>
+            <a:off x="10728655" y="6446520"/>
+            <a:ext cx="914400" cy="274320"/>
+          </a:xfrm>
+          <a:prstGeom prst="rect">
+            <a:avLst/>
+          </a:prstGeom>
+          <a:noFill/>
+        </p:spPr>
+        <p:txBody>
+          <a:bodyPr wrap="square" anchor="t" lIns="0" rIns="0" tIns="0" bIns="0"/>
+          <a:lstStyle/>
+          <a:p>
+            <a:pPr algn="r"/>
+            <a:r>
+              <a:rPr sz="1000" b="0" i="0">
+                <a:solidFill>
+                  <a:srgbClr val="54595D"/>
+                </a:solidFill>
+                <a:latin typeface="Calibri"/>
+              </a:rPr>
+              <a:t>13</a:t>
+            </a:r>
+          </a:p>
+        </p:txBody>
+      </p:sp>
+      <p:sp>
+        <p:nvSpPr>
+          <p:cNvPr id="6" name="Oval 5"/>
+          <p:cNvSpPr/>
+          <p:nvPr/>
+        </p:nvSpPr>
+        <p:spPr>
+          <a:xfrm>
+            <a:off x="548640" y="1618488"/>
+            <a:ext cx="411480" cy="411480"/>
+          </a:xfrm>
+          <a:prstGeom prst="ellipse">
+            <a:avLst/>
+          </a:prstGeom>
+          <a:solidFill>
+            <a:srgbClr val="33C17A"/>
+          </a:solidFill>
+          <a:ln>
+            <a:noFill/>
+          </a:ln>
+          <a:effectLst/>
+        </p:spPr>
+        <p:style>
+          <a:lnRef idx="1">
+            <a:schemeClr val="accent1"/>
+          </a:lnRef>
+          <a:fillRef idx="3">
+            <a:schemeClr val="accent1"/>
+          </a:fillRef>
+          <a:effectRef idx="2">
+            <a:schemeClr val="accent1"/>
+          </a:effectRef>
+          <a:fontRef idx="minor">
+            <a:schemeClr val="lt1"/>
+          </a:fontRef>
+        </p:style>
+        <p:txBody>
+          <a:bodyPr rtlCol="0" anchor="ctr" lIns="0" rIns="0" tIns="0" bIns="0"/>
+          <a:lstStyle/>
+          <a:p>
+            <a:pPr algn="ctr"/>
+            <a:r>
+              <a:rPr sz="1400" b="1">
+                <a:solidFill>
+                  <a:srgbClr val="202122"/>
+                </a:solidFill>
+                <a:latin typeface="Calibri"/>
+              </a:rPr>
+              <a:t>1</a:t>
+            </a:r>
+          </a:p>
+        </p:txBody>
+      </p:sp>
+      <p:sp>
+        <p:nvSpPr>
+          <p:cNvPr id="7" name="TextBox 6"/>
+          <p:cNvSpPr txBox="1"/>
+          <p:nvPr/>
+        </p:nvSpPr>
+        <p:spPr>
+          <a:xfrm>
+            <a:off x="1234440" y="1600200"/>
+            <a:ext cx="10408615" cy="791870"/>
+          </a:xfrm>
+          <a:prstGeom prst="rect">
+            <a:avLst/>
+          </a:prstGeom>
+          <a:noFill/>
+        </p:spPr>
+        <p:txBody>
+          <a:bodyPr wrap="square" anchor="t" lIns="0" rIns="0" tIns="0" bIns="0"/>
+          <a:lstStyle/>
+          <a:p>
+            <a:pPr algn="l"/>
+            <a:r>
+              <a:rPr sz="2200" b="0" i="0">
+                <a:solidFill>
+                  <a:srgbClr val="202122"/>
+                </a:solidFill>
+                <a:latin typeface="Calibri"/>
+              </a:rPr>
+              <a:t>What is an OU?</a:t>
+            </a:r>
+          </a:p>
+        </p:txBody>
+      </p:sp>
+      <p:sp>
+        <p:nvSpPr>
+          <p:cNvPr id="8" name="Oval 7"/>
+          <p:cNvSpPr/>
+          <p:nvPr/>
+        </p:nvSpPr>
+        <p:spPr>
+          <a:xfrm>
+            <a:off x="548640" y="2574950"/>
+            <a:ext cx="411480" cy="411480"/>
+          </a:xfrm>
+          <a:prstGeom prst="ellipse">
+            <a:avLst/>
+          </a:prstGeom>
+          <a:solidFill>
+            <a:srgbClr val="33C17A"/>
+          </a:solidFill>
+          <a:ln>
+            <a:noFill/>
+          </a:ln>
+          <a:effectLst/>
+        </p:spPr>
+        <p:style>
+          <a:lnRef idx="1">
+            <a:schemeClr val="accent1"/>
+          </a:lnRef>
+          <a:fillRef idx="3">
+            <a:schemeClr val="accent1"/>
+          </a:fillRef>
+          <a:effectRef idx="2">
+            <a:schemeClr val="accent1"/>
+          </a:effectRef>
+          <a:fontRef idx="minor">
+            <a:schemeClr val="lt1"/>
+          </a:fontRef>
+        </p:style>
+        <p:txBody>
+          <a:bodyPr rtlCol="0" anchor="ctr" lIns="0" rIns="0" tIns="0" bIns="0"/>
+          <a:lstStyle/>
+          <a:p>
+            <a:pPr algn="ctr"/>
+            <a:r>
+              <a:rPr sz="1400" b="1">
+                <a:solidFill>
+                  <a:srgbClr val="202122"/>
+                </a:solidFill>
+                <a:latin typeface="Calibri"/>
+              </a:rPr>
+              <a:t>2</a:t>
+            </a:r>
+          </a:p>
+        </p:txBody>
+      </p:sp>
+      <p:sp>
+        <p:nvSpPr>
+          <p:cNvPr id="9" name="TextBox 8"/>
+          <p:cNvSpPr txBox="1"/>
+          <p:nvPr/>
+        </p:nvSpPr>
+        <p:spPr>
+          <a:xfrm>
+            <a:off x="1234440" y="2556662"/>
+            <a:ext cx="10408615" cy="791870"/>
+          </a:xfrm>
+          <a:prstGeom prst="rect">
+            <a:avLst/>
+          </a:prstGeom>
+          <a:noFill/>
+        </p:spPr>
+        <p:txBody>
+          <a:bodyPr wrap="square" anchor="t" lIns="0" rIns="0" tIns="0" bIns="0"/>
+          <a:lstStyle/>
+          <a:p>
+            <a:pPr algn="l"/>
+            <a:r>
+              <a:rPr sz="2200" b="0" i="0">
+                <a:solidFill>
+                  <a:srgbClr val="202122"/>
+                </a:solidFill>
+                <a:latin typeface="Calibri"/>
+              </a:rPr>
+              <a:t>Which service gives a PC its IP address?</a:t>
+            </a:r>
+          </a:p>
+        </p:txBody>
+      </p:sp>
+      <p:sp>
+        <p:nvSpPr>
+          <p:cNvPr id="10" name="Oval 9"/>
+          <p:cNvSpPr/>
+          <p:nvPr/>
+        </p:nvSpPr>
+        <p:spPr>
+          <a:xfrm>
+            <a:off x="548640" y="3531412"/>
+            <a:ext cx="411480" cy="411480"/>
+          </a:xfrm>
+          <a:prstGeom prst="ellipse">
+            <a:avLst/>
+          </a:prstGeom>
+          <a:solidFill>
+            <a:srgbClr val="33C17A"/>
+          </a:solidFill>
+          <a:ln>
+            <a:noFill/>
+          </a:ln>
+          <a:effectLst/>
+        </p:spPr>
+        <p:style>
+          <a:lnRef idx="1">
+            <a:schemeClr val="accent1"/>
+          </a:lnRef>
+          <a:fillRef idx="3">
+            <a:schemeClr val="accent1"/>
+          </a:fillRef>
+          <a:effectRef idx="2">
+            <a:schemeClr val="accent1"/>
+          </a:effectRef>
+          <a:fontRef idx="minor">
+            <a:schemeClr val="lt1"/>
+          </a:fontRef>
+        </p:style>
+        <p:txBody>
+          <a:bodyPr rtlCol="0" anchor="ctr" lIns="0" rIns="0" tIns="0" bIns="0"/>
+          <a:lstStyle/>
+          <a:p>
+            <a:pPr algn="ctr"/>
+            <a:r>
+              <a:rPr sz="1400" b="1">
+                <a:solidFill>
+                  <a:srgbClr val="202122"/>
+                </a:solidFill>
+                <a:latin typeface="Calibri"/>
+              </a:rPr>
+              <a:t>3</a:t>
+            </a:r>
+          </a:p>
+        </p:txBody>
+      </p:sp>
+      <p:sp>
+        <p:nvSpPr>
+          <p:cNvPr id="11" name="TextBox 10"/>
+          <p:cNvSpPr txBox="1"/>
+          <p:nvPr/>
+        </p:nvSpPr>
+        <p:spPr>
+          <a:xfrm>
+            <a:off x="1234440" y="3513124"/>
+            <a:ext cx="10408615" cy="791870"/>
+          </a:xfrm>
+          <a:prstGeom prst="rect">
+            <a:avLst/>
+          </a:prstGeom>
+          <a:noFill/>
+        </p:spPr>
+        <p:txBody>
+          <a:bodyPr wrap="square" anchor="t" lIns="0" rIns="0" tIns="0" bIns="0"/>
+          <a:lstStyle/>
+          <a:p>
+            <a:pPr algn="l"/>
+            <a:r>
+              <a:rPr sz="2200" b="0" i="0">
+                <a:solidFill>
+                  <a:srgbClr val="202122"/>
+                </a:solidFill>
+                <a:latin typeface="Calibri"/>
+              </a:rPr>
+              <a:t>What does DNS do?</a:t>
+            </a:r>
+          </a:p>
+        </p:txBody>
+      </p:sp>
+      <p:sp>
+        <p:nvSpPr>
+          <p:cNvPr id="12" name="Oval 11"/>
+          <p:cNvSpPr/>
+          <p:nvPr/>
+        </p:nvSpPr>
+        <p:spPr>
+          <a:xfrm>
+            <a:off x="548640" y="4487875"/>
+            <a:ext cx="411480" cy="411480"/>
+          </a:xfrm>
+          <a:prstGeom prst="ellipse">
+            <a:avLst/>
+          </a:prstGeom>
+          <a:solidFill>
+            <a:srgbClr val="33C17A"/>
+          </a:solidFill>
+          <a:ln>
+            <a:noFill/>
+          </a:ln>
+          <a:effectLst/>
+        </p:spPr>
+        <p:style>
+          <a:lnRef idx="1">
+            <a:schemeClr val="accent1"/>
+          </a:lnRef>
+          <a:fillRef idx="3">
+            <a:schemeClr val="accent1"/>
+          </a:fillRef>
+          <a:effectRef idx="2">
+            <a:schemeClr val="accent1"/>
+          </a:effectRef>
+          <a:fontRef idx="minor">
+            <a:schemeClr val="lt1"/>
+          </a:fontRef>
+        </p:style>
+        <p:txBody>
+          <a:bodyPr rtlCol="0" anchor="ctr" lIns="0" rIns="0" tIns="0" bIns="0"/>
+          <a:lstStyle/>
+          <a:p>
+            <a:pPr algn="ctr"/>
+            <a:r>
+              <a:rPr sz="1400" b="1">
+                <a:solidFill>
+                  <a:srgbClr val="202122"/>
+                </a:solidFill>
+                <a:latin typeface="Calibri"/>
+              </a:rPr>
+              <a:t>4</a:t>
+            </a:r>
+          </a:p>
+        </p:txBody>
+      </p:sp>
+      <p:sp>
+        <p:nvSpPr>
+          <p:cNvPr id="13" name="TextBox 12"/>
+          <p:cNvSpPr txBox="1"/>
+          <p:nvPr/>
+        </p:nvSpPr>
+        <p:spPr>
+          <a:xfrm>
+            <a:off x="1234440" y="4469587"/>
+            <a:ext cx="10408615" cy="791870"/>
+          </a:xfrm>
+          <a:prstGeom prst="rect">
+            <a:avLst/>
+          </a:prstGeom>
+          <a:noFill/>
+        </p:spPr>
+        <p:txBody>
+          <a:bodyPr wrap="square" anchor="t" lIns="0" rIns="0" tIns="0" bIns="0"/>
+          <a:lstStyle/>
+          <a:p>
+            <a:pPr algn="l"/>
+            <a:r>
+              <a:rPr sz="2200" b="0" i="0">
+                <a:solidFill>
+                  <a:srgbClr val="202122"/>
+                </a:solidFill>
+                <a:latin typeface="Calibri"/>
+              </a:rPr>
+              <a:t>Which remote access method works even when the server is powered off?</a:t>
+            </a:r>
+          </a:p>
+        </p:txBody>
+      </p:sp>
+      <p:sp>
+        <p:nvSpPr>
+          <p:cNvPr id="14" name="Oval 13"/>
+          <p:cNvSpPr/>
+          <p:nvPr/>
+        </p:nvSpPr>
+        <p:spPr>
+          <a:xfrm>
+            <a:off x="548640" y="5444337"/>
+            <a:ext cx="411480" cy="411480"/>
+          </a:xfrm>
+          <a:prstGeom prst="ellipse">
+            <a:avLst/>
+          </a:prstGeom>
+          <a:solidFill>
+            <a:srgbClr val="33C17A"/>
+          </a:solidFill>
+          <a:ln>
+            <a:noFill/>
+          </a:ln>
+          <a:effectLst/>
+        </p:spPr>
+        <p:style>
+          <a:lnRef idx="1">
+            <a:schemeClr val="accent1"/>
+          </a:lnRef>
+          <a:fillRef idx="3">
+            <a:schemeClr val="accent1"/>
+          </a:fillRef>
+          <a:effectRef idx="2">
+            <a:schemeClr val="accent1"/>
+          </a:effectRef>
+          <a:fontRef idx="minor">
+            <a:schemeClr val="lt1"/>
+          </a:fontRef>
+        </p:style>
+        <p:txBody>
+          <a:bodyPr rtlCol="0" anchor="ctr" lIns="0" rIns="0" tIns="0" bIns="0"/>
+          <a:lstStyle/>
+          <a:p>
+            <a:pPr algn="ctr"/>
+            <a:r>
+              <a:rPr sz="1400" b="1">
+                <a:solidFill>
+                  <a:srgbClr val="202122"/>
+                </a:solidFill>
+                <a:latin typeface="Calibri"/>
+              </a:rPr>
+              <a:t>5</a:t>
+            </a:r>
+          </a:p>
+        </p:txBody>
+      </p:sp>
+      <p:sp>
+        <p:nvSpPr>
+          <p:cNvPr id="15" name="TextBox 14"/>
+          <p:cNvSpPr txBox="1"/>
+          <p:nvPr/>
+        </p:nvSpPr>
+        <p:spPr>
+          <a:xfrm>
+            <a:off x="1234440" y="5426049"/>
+            <a:ext cx="10408615" cy="791870"/>
+          </a:xfrm>
+          <a:prstGeom prst="rect">
+            <a:avLst/>
+          </a:prstGeom>
+          <a:noFill/>
+        </p:spPr>
+        <p:txBody>
+          <a:bodyPr wrap="square" anchor="t" lIns="0" rIns="0" tIns="0" bIns="0"/>
+          <a:lstStyle/>
+          <a:p>
+            <a:pPr algn="l"/>
+            <a:r>
+              <a:rPr sz="2200" b="0" i="0">
+                <a:solidFill>
+                  <a:srgbClr val="202122"/>
+                </a:solidFill>
+                <a:latin typeface="Calibri"/>
+              </a:rPr>
+              <a:t>What must be set on the client side of a VPN?</a:t>
+            </a:r>
+          </a:p>
+        </p:txBody>
+      </p:sp>
+    </p:spTree>
+  </p:cSld>
+  <p:clrMapOvr>
+    <a:masterClrMapping/>
+  </p:clrMapOvr>
+</p:sld>
+</file>
+
+<file path=ppt/slides/slide14.xml><?xml version="1.0" encoding="utf-8"?>
+<p:sld xmlns:a="http://schemas.openxmlformats.org/drawingml/2006/main" xmlns:p="http://schemas.openxmlformats.org/presentationml/2006/main" xmlns:r="http://schemas.openxmlformats.org/officeDocument/2006/relationships">
+  <p:cSld>
+    <p:bg>
+      <p:bgPr>
+        <a:solidFill>
+          <a:srgbClr val="FFFFFF"/>
+        </a:solidFill>
+        <a:effectLst/>
+      </p:bgPr>
+    </p:bg>
+    <p:spTree>
+      <p:nvGrpSpPr>
+        <p:cNvPr id="1" name=""/>
+        <p:cNvGrpSpPr/>
+        <p:nvPr/>
+      </p:nvGrpSpPr>
+      <p:grpSpPr/>
+      <p:sp>
+        <p:nvSpPr>
+          <p:cNvPr id="2" name="TextBox 1"/>
+          <p:cNvSpPr txBox="1"/>
+          <p:nvPr/>
+        </p:nvSpPr>
+        <p:spPr>
+          <a:xfrm>
+            <a:off x="548640" y="320040"/>
+            <a:ext cx="11094415" cy="274320"/>
+          </a:xfrm>
+          <a:prstGeom prst="rect">
+            <a:avLst/>
+          </a:prstGeom>
+          <a:noFill/>
+        </p:spPr>
+        <p:txBody>
+          <a:bodyPr wrap="square" anchor="t" lIns="0" rIns="0" tIns="0" bIns="0"/>
+          <a:lstStyle/>
+          <a:p>
+            <a:pPr algn="l"/>
+            <a:r>
+              <a:rPr sz="1100" b="1" i="0">
+                <a:solidFill>
+                  <a:srgbClr val="54595D"/>
+                </a:solidFill>
+                <a:latin typeface="Calibri"/>
+              </a:rPr>
+              <a:t>DIGITAL INFRASTRUCTURE  ·  Digital Infrastructure Content Area 2</a:t>
+            </a:r>
+          </a:p>
+        </p:txBody>
+      </p:sp>
+      <p:sp>
+        <p:nvSpPr>
+          <p:cNvPr id="3" name="TextBox 2"/>
+          <p:cNvSpPr txBox="1"/>
+          <p:nvPr/>
+        </p:nvSpPr>
+        <p:spPr>
+          <a:xfrm>
+            <a:off x="548640" y="566928"/>
+            <a:ext cx="11094415" cy="822960"/>
+          </a:xfrm>
+          <a:prstGeom prst="rect">
+            <a:avLst/>
+          </a:prstGeom>
+          <a:noFill/>
+        </p:spPr>
+        <p:txBody>
+          <a:bodyPr wrap="square" anchor="ctr" lIns="0" rIns="0" tIns="0" bIns="0"/>
+          <a:lstStyle/>
+          <a:p>
+            <a:pPr algn="l"/>
+            <a:r>
+              <a:rPr sz="3200" b="1" i="0">
+                <a:solidFill>
+                  <a:srgbClr val="03306E"/>
+                </a:solidFill>
+                <a:latin typeface="Cambria"/>
+              </a:rPr>
+              <a:t>Answers</a:t>
+            </a:r>
+          </a:p>
+        </p:txBody>
+      </p:sp>
+      <p:sp>
+        <p:nvSpPr>
+          <p:cNvPr id="4" name="TextBox 3"/>
+          <p:cNvSpPr txBox="1"/>
+          <p:nvPr/>
+        </p:nvSpPr>
+        <p:spPr>
+          <a:xfrm>
+            <a:off x="548640" y="6446520"/>
+            <a:ext cx="8229600" cy="274320"/>
+          </a:xfrm>
+          <a:prstGeom prst="rect">
+            <a:avLst/>
+          </a:prstGeom>
+          <a:noFill/>
+        </p:spPr>
+        <p:txBody>
+          <a:bodyPr wrap="square" anchor="t" lIns="0" rIns="0" tIns="0" bIns="0"/>
+          <a:lstStyle/>
+          <a:p>
+            <a:pPr algn="l"/>
+            <a:r>
+              <a:rPr sz="1000" b="0" i="0">
+                <a:solidFill>
+                  <a:srgbClr val="54595D"/>
+                </a:solidFill>
+                <a:latin typeface="Calibri"/>
+              </a:rPr>
+              <a:t>Digital Support and Security T Level  ·  Network Services, Remote Access and Installation</a:t>
+            </a:r>
+          </a:p>
+        </p:txBody>
+      </p:sp>
+      <p:sp>
+        <p:nvSpPr>
+          <p:cNvPr id="5" name="TextBox 4"/>
+          <p:cNvSpPr txBox="1"/>
+          <p:nvPr/>
+        </p:nvSpPr>
+        <p:spPr>
+          <a:xfrm>
+            <a:off x="10728655" y="6446520"/>
+            <a:ext cx="914400" cy="274320"/>
+          </a:xfrm>
+          <a:prstGeom prst="rect">
+            <a:avLst/>
+          </a:prstGeom>
+          <a:noFill/>
+        </p:spPr>
+        <p:txBody>
+          <a:bodyPr wrap="square" anchor="t" lIns="0" rIns="0" tIns="0" bIns="0"/>
+          <a:lstStyle/>
+          <a:p>
+            <a:pPr algn="r"/>
+            <a:r>
+              <a:rPr sz="1000" b="0" i="0">
+                <a:solidFill>
+                  <a:srgbClr val="54595D"/>
+                </a:solidFill>
+                <a:latin typeface="Calibri"/>
+              </a:rPr>
+              <a:t>14</a:t>
+            </a:r>
+          </a:p>
+        </p:txBody>
+      </p:sp>
+      <p:sp>
+        <p:nvSpPr>
+          <p:cNvPr id="6" name="Oval 5"/>
+          <p:cNvSpPr/>
+          <p:nvPr/>
+        </p:nvSpPr>
+        <p:spPr>
+          <a:xfrm>
+            <a:off x="548640" y="1618488"/>
+            <a:ext cx="411480" cy="411480"/>
+          </a:xfrm>
+          <a:prstGeom prst="ellipse">
+            <a:avLst/>
+          </a:prstGeom>
+          <a:solidFill>
+            <a:srgbClr val="33C17A"/>
+          </a:solidFill>
+          <a:ln>
+            <a:noFill/>
+          </a:ln>
+          <a:effectLst/>
+        </p:spPr>
+        <p:style>
+          <a:lnRef idx="1">
+            <a:schemeClr val="accent1"/>
+          </a:lnRef>
+          <a:fillRef idx="3">
+            <a:schemeClr val="accent1"/>
+          </a:fillRef>
+          <a:effectRef idx="2">
+            <a:schemeClr val="accent1"/>
+          </a:effectRef>
+          <a:fontRef idx="minor">
+            <a:schemeClr val="lt1"/>
+          </a:fontRef>
+        </p:style>
+        <p:txBody>
+          <a:bodyPr rtlCol="0" anchor="ctr" lIns="0" rIns="0" tIns="0" bIns="0"/>
+          <a:lstStyle/>
+          <a:p>
+            <a:pPr algn="ctr"/>
+            <a:r>
+              <a:rPr sz="1400" b="1">
+                <a:solidFill>
+                  <a:srgbClr val="202122"/>
+                </a:solidFill>
+                <a:latin typeface="Calibri"/>
+              </a:rPr>
+              <a:t>1</a:t>
+            </a:r>
+          </a:p>
+        </p:txBody>
+      </p:sp>
+      <p:sp>
+        <p:nvSpPr>
+          <p:cNvPr id="7" name="TextBox 6"/>
+          <p:cNvSpPr txBox="1"/>
+          <p:nvPr/>
+        </p:nvSpPr>
+        <p:spPr>
+          <a:xfrm>
+            <a:off x="1234440" y="1600200"/>
+            <a:ext cx="10408615" cy="791870"/>
+          </a:xfrm>
+          <a:prstGeom prst="rect">
+            <a:avLst/>
+          </a:prstGeom>
+          <a:noFill/>
+        </p:spPr>
+        <p:txBody>
+          <a:bodyPr wrap="square" anchor="t" lIns="0" rIns="0" tIns="0" bIns="0"/>
+          <a:lstStyle/>
+          <a:p>
+            <a:pPr algn="l"/>
+            <a:r>
+              <a:rPr sz="1800" b="0" i="0">
+                <a:solidFill>
+                  <a:srgbClr val="54595D"/>
+                </a:solidFill>
+                <a:latin typeface="Calibri"/>
+              </a:rPr>
+              <a:t>What is an OU?</a:t>
+            </a:r>
+          </a:p>
+          <a:p>
+            <a:r>
+              <a:rPr sz="1800" b="1">
+                <a:solidFill>
+                  <a:srgbClr val="03306E"/>
+                </a:solidFill>
+                <a:latin typeface="Calibri"/>
+              </a:rPr>
+              <a:t>An organisational unit: a container in Active Directory for users, groups and devices.</a:t>
+            </a:r>
+          </a:p>
+        </p:txBody>
+      </p:sp>
+      <p:sp>
+        <p:nvSpPr>
+          <p:cNvPr id="8" name="Oval 7"/>
+          <p:cNvSpPr/>
+          <p:nvPr/>
+        </p:nvSpPr>
+        <p:spPr>
+          <a:xfrm>
+            <a:off x="548640" y="2574950"/>
+            <a:ext cx="411480" cy="411480"/>
+          </a:xfrm>
+          <a:prstGeom prst="ellipse">
+            <a:avLst/>
+          </a:prstGeom>
+          <a:solidFill>
+            <a:srgbClr val="33C17A"/>
+          </a:solidFill>
+          <a:ln>
+            <a:noFill/>
+          </a:ln>
+          <a:effectLst/>
+        </p:spPr>
+        <p:style>
+          <a:lnRef idx="1">
+            <a:schemeClr val="accent1"/>
+          </a:lnRef>
+          <a:fillRef idx="3">
+            <a:schemeClr val="accent1"/>
+          </a:fillRef>
+          <a:effectRef idx="2">
+            <a:schemeClr val="accent1"/>
+          </a:effectRef>
+          <a:fontRef idx="minor">
+            <a:schemeClr val="lt1"/>
+          </a:fontRef>
+        </p:style>
+        <p:txBody>
+          <a:bodyPr rtlCol="0" anchor="ctr" lIns="0" rIns="0" tIns="0" bIns="0"/>
+          <a:lstStyle/>
+          <a:p>
+            <a:pPr algn="ctr"/>
+            <a:r>
+              <a:rPr sz="1400" b="1">
+                <a:solidFill>
+                  <a:srgbClr val="202122"/>
+                </a:solidFill>
+                <a:latin typeface="Calibri"/>
+              </a:rPr>
+              <a:t>2</a:t>
+            </a:r>
+          </a:p>
+        </p:txBody>
+      </p:sp>
+      <p:sp>
+        <p:nvSpPr>
+          <p:cNvPr id="9" name="TextBox 8"/>
+          <p:cNvSpPr txBox="1"/>
+          <p:nvPr/>
+        </p:nvSpPr>
+        <p:spPr>
+          <a:xfrm>
+            <a:off x="1234440" y="2556662"/>
+            <a:ext cx="10408615" cy="791870"/>
+          </a:xfrm>
+          <a:prstGeom prst="rect">
+            <a:avLst/>
+          </a:prstGeom>
+          <a:noFill/>
+        </p:spPr>
+        <p:txBody>
+          <a:bodyPr wrap="square" anchor="t" lIns="0" rIns="0" tIns="0" bIns="0"/>
+          <a:lstStyle/>
+          <a:p>
+            <a:pPr algn="l"/>
+            <a:r>
+              <a:rPr sz="1800" b="0" i="0">
+                <a:solidFill>
+                  <a:srgbClr val="54595D"/>
+                </a:solidFill>
+                <a:latin typeface="Calibri"/>
+              </a:rPr>
+              <a:t>Which service gives a PC its IP address?</a:t>
+            </a:r>
+          </a:p>
+          <a:p>
+            <a:r>
+              <a:rPr sz="1800" b="1">
+                <a:solidFill>
+                  <a:srgbClr val="03306E"/>
+                </a:solidFill>
+                <a:latin typeface="Calibri"/>
+              </a:rPr>
+              <a:t>DHCP.</a:t>
+            </a:r>
+          </a:p>
+        </p:txBody>
+      </p:sp>
+      <p:sp>
+        <p:nvSpPr>
+          <p:cNvPr id="10" name="Oval 9"/>
+          <p:cNvSpPr/>
+          <p:nvPr/>
+        </p:nvSpPr>
+        <p:spPr>
+          <a:xfrm>
+            <a:off x="548640" y="3531412"/>
+            <a:ext cx="411480" cy="411480"/>
+          </a:xfrm>
+          <a:prstGeom prst="ellipse">
+            <a:avLst/>
+          </a:prstGeom>
+          <a:solidFill>
+            <a:srgbClr val="33C17A"/>
+          </a:solidFill>
+          <a:ln>
+            <a:noFill/>
+          </a:ln>
+          <a:effectLst/>
+        </p:spPr>
+        <p:style>
+          <a:lnRef idx="1">
+            <a:schemeClr val="accent1"/>
+          </a:lnRef>
+          <a:fillRef idx="3">
+            <a:schemeClr val="accent1"/>
+          </a:fillRef>
+          <a:effectRef idx="2">
+            <a:schemeClr val="accent1"/>
+          </a:effectRef>
+          <a:fontRef idx="minor">
+            <a:schemeClr val="lt1"/>
+          </a:fontRef>
+        </p:style>
+        <p:txBody>
+          <a:bodyPr rtlCol="0" anchor="ctr" lIns="0" rIns="0" tIns="0" bIns="0"/>
+          <a:lstStyle/>
+          <a:p>
+            <a:pPr algn="ctr"/>
+            <a:r>
+              <a:rPr sz="1400" b="1">
+                <a:solidFill>
+                  <a:srgbClr val="202122"/>
+                </a:solidFill>
+                <a:latin typeface="Calibri"/>
+              </a:rPr>
+              <a:t>3</a:t>
+            </a:r>
+          </a:p>
+        </p:txBody>
+      </p:sp>
+      <p:sp>
+        <p:nvSpPr>
+          <p:cNvPr id="11" name="TextBox 10"/>
+          <p:cNvSpPr txBox="1"/>
+          <p:nvPr/>
+        </p:nvSpPr>
+        <p:spPr>
+          <a:xfrm>
+            <a:off x="1234440" y="3513124"/>
+            <a:ext cx="10408615" cy="791870"/>
+          </a:xfrm>
+          <a:prstGeom prst="rect">
+            <a:avLst/>
+          </a:prstGeom>
+          <a:noFill/>
+        </p:spPr>
+        <p:txBody>
+          <a:bodyPr wrap="square" anchor="t" lIns="0" rIns="0" tIns="0" bIns="0"/>
+          <a:lstStyle/>
+          <a:p>
+            <a:pPr algn="l"/>
+            <a:r>
+              <a:rPr sz="1800" b="0" i="0">
+                <a:solidFill>
+                  <a:srgbClr val="54595D"/>
+                </a:solidFill>
+                <a:latin typeface="Calibri"/>
+              </a:rPr>
+              <a:t>What does DNS do?</a:t>
+            </a:r>
+          </a:p>
+          <a:p>
+            <a:r>
+              <a:rPr sz="1800" b="1">
+                <a:solidFill>
+                  <a:srgbClr val="03306E"/>
+                </a:solidFill>
+                <a:latin typeface="Calibri"/>
+              </a:rPr>
+              <a:t>Translates hostnames into IP addresses.</a:t>
+            </a:r>
+          </a:p>
+        </p:txBody>
+      </p:sp>
+      <p:sp>
+        <p:nvSpPr>
+          <p:cNvPr id="12" name="Oval 11"/>
+          <p:cNvSpPr/>
+          <p:nvPr/>
+        </p:nvSpPr>
+        <p:spPr>
+          <a:xfrm>
+            <a:off x="548640" y="4487875"/>
+            <a:ext cx="411480" cy="411480"/>
+          </a:xfrm>
+          <a:prstGeom prst="ellipse">
+            <a:avLst/>
+          </a:prstGeom>
+          <a:solidFill>
+            <a:srgbClr val="33C17A"/>
+          </a:solidFill>
+          <a:ln>
+            <a:noFill/>
+          </a:ln>
+          <a:effectLst/>
+        </p:spPr>
+        <p:style>
+          <a:lnRef idx="1">
+            <a:schemeClr val="accent1"/>
+          </a:lnRef>
+          <a:fillRef idx="3">
+            <a:schemeClr val="accent1"/>
+          </a:fillRef>
+          <a:effectRef idx="2">
+            <a:schemeClr val="accent1"/>
+          </a:effectRef>
+          <a:fontRef idx="minor">
+            <a:schemeClr val="lt1"/>
+          </a:fontRef>
+        </p:style>
+        <p:txBody>
+          <a:bodyPr rtlCol="0" anchor="ctr" lIns="0" rIns="0" tIns="0" bIns="0"/>
+          <a:lstStyle/>
+          <a:p>
+            <a:pPr algn="ctr"/>
+            <a:r>
+              <a:rPr sz="1400" b="1">
+                <a:solidFill>
+                  <a:srgbClr val="202122"/>
+                </a:solidFill>
+                <a:latin typeface="Calibri"/>
+              </a:rPr>
+              <a:t>4</a:t>
+            </a:r>
+          </a:p>
+        </p:txBody>
+      </p:sp>
+      <p:sp>
+        <p:nvSpPr>
+          <p:cNvPr id="13" name="TextBox 12"/>
+          <p:cNvSpPr txBox="1"/>
+          <p:nvPr/>
+        </p:nvSpPr>
+        <p:spPr>
+          <a:xfrm>
+            <a:off x="1234440" y="4469587"/>
+            <a:ext cx="10408615" cy="791870"/>
+          </a:xfrm>
+          <a:prstGeom prst="rect">
+            <a:avLst/>
+          </a:prstGeom>
+          <a:noFill/>
+        </p:spPr>
+        <p:txBody>
+          <a:bodyPr wrap="square" anchor="t" lIns="0" rIns="0" tIns="0" bIns="0"/>
+          <a:lstStyle/>
+          <a:p>
+            <a:pPr algn="l"/>
+            <a:r>
+              <a:rPr sz="1800" b="0" i="0">
+                <a:solidFill>
+                  <a:srgbClr val="54595D"/>
+                </a:solidFill>
+                <a:latin typeface="Calibri"/>
+              </a:rPr>
+              <a:t>Which remote access method works even when the server is powered off?</a:t>
+            </a:r>
+          </a:p>
+          <a:p>
+            <a:r>
+              <a:rPr sz="1800" b="1">
+                <a:solidFill>
+                  <a:srgbClr val="03306E"/>
+                </a:solidFill>
+                <a:latin typeface="Calibri"/>
+              </a:rPr>
+              <a:t>Lights-out management (LOM).</a:t>
+            </a:r>
+          </a:p>
+        </p:txBody>
+      </p:sp>
+      <p:sp>
+        <p:nvSpPr>
+          <p:cNvPr id="14" name="Oval 13"/>
+          <p:cNvSpPr/>
+          <p:nvPr/>
+        </p:nvSpPr>
+        <p:spPr>
+          <a:xfrm>
+            <a:off x="548640" y="5444337"/>
+            <a:ext cx="411480" cy="411480"/>
+          </a:xfrm>
+          <a:prstGeom prst="ellipse">
+            <a:avLst/>
+          </a:prstGeom>
+          <a:solidFill>
+            <a:srgbClr val="33C17A"/>
+          </a:solidFill>
+          <a:ln>
+            <a:noFill/>
+          </a:ln>
+          <a:effectLst/>
+        </p:spPr>
+        <p:style>
+          <a:lnRef idx="1">
+            <a:schemeClr val="accent1"/>
+          </a:lnRef>
+          <a:fillRef idx="3">
+            <a:schemeClr val="accent1"/>
+          </a:fillRef>
+          <a:effectRef idx="2">
+            <a:schemeClr val="accent1"/>
+          </a:effectRef>
+          <a:fontRef idx="minor">
+            <a:schemeClr val="lt1"/>
+          </a:fontRef>
+        </p:style>
+        <p:txBody>
+          <a:bodyPr rtlCol="0" anchor="ctr" lIns="0" rIns="0" tIns="0" bIns="0"/>
+          <a:lstStyle/>
+          <a:p>
+            <a:pPr algn="ctr"/>
+            <a:r>
+              <a:rPr sz="1400" b="1">
+                <a:solidFill>
+                  <a:srgbClr val="202122"/>
+                </a:solidFill>
+                <a:latin typeface="Calibri"/>
+              </a:rPr>
+              <a:t>5</a:t>
+            </a:r>
+          </a:p>
+        </p:txBody>
+      </p:sp>
+      <p:sp>
+        <p:nvSpPr>
+          <p:cNvPr id="15" name="TextBox 14"/>
+          <p:cNvSpPr txBox="1"/>
+          <p:nvPr/>
+        </p:nvSpPr>
+        <p:spPr>
+          <a:xfrm>
+            <a:off x="1234440" y="5426049"/>
+            <a:ext cx="10408615" cy="791870"/>
+          </a:xfrm>
+          <a:prstGeom prst="rect">
+            <a:avLst/>
+          </a:prstGeom>
+          <a:noFill/>
+        </p:spPr>
+        <p:txBody>
+          <a:bodyPr wrap="square" anchor="t" lIns="0" rIns="0" tIns="0" bIns="0"/>
+          <a:lstStyle/>
+          <a:p>
+            <a:pPr algn="l"/>
+            <a:r>
+              <a:rPr sz="1800" b="0" i="0">
+                <a:solidFill>
+                  <a:srgbClr val="54595D"/>
+                </a:solidFill>
+                <a:latin typeface="Calibri"/>
+              </a:rPr>
+              <a:t>What must be set on the client side of a VPN?</a:t>
+            </a:r>
+          </a:p>
+          <a:p>
+            <a:r>
+              <a:rPr sz="1800" b="1">
+                <a:solidFill>
+                  <a:srgbClr val="03306E"/>
+                </a:solidFill>
+                <a:latin typeface="Calibri"/>
+              </a:rPr>
+              <a:t>The connection, destination IP or FQDN, and permissions.</a:t>
+            </a:r>
+          </a:p>
+        </p:txBody>
+      </p:sp>
+    </p:spTree>
+  </p:cSld>
+  <p:clrMapOvr>
+    <a:masterClrMapping/>
+  </p:clrMapOvr>
+</p:sld>
+</file>
+
+<file path=ppt/slides/slide15.xml><?xml version="1.0" encoding="utf-8"?>
+<p:sld xmlns:a="http://schemas.openxmlformats.org/drawingml/2006/main" xmlns:p="http://schemas.openxmlformats.org/presentationml/2006/main" xmlns:r="http://schemas.openxmlformats.org/officeDocument/2006/relationships">
+  <p:cSld>
+    <p:bg>
+      <p:bgPr>
+        <a:solidFill>
+          <a:srgbClr val="FFFFFF"/>
+        </a:solidFill>
+        <a:effectLst/>
+      </p:bgPr>
+    </p:bg>
+    <p:spTree>
+      <p:nvGrpSpPr>
+        <p:cNvPr id="1" name=""/>
+        <p:cNvGrpSpPr/>
+        <p:nvPr/>
+      </p:nvGrpSpPr>
+      <p:grpSpPr/>
+      <p:sp>
+        <p:nvSpPr>
+          <p:cNvPr id="2" name="TextBox 1"/>
+          <p:cNvSpPr txBox="1"/>
+          <p:nvPr/>
+        </p:nvSpPr>
+        <p:spPr>
+          <a:xfrm>
+            <a:off x="548640" y="320040"/>
+            <a:ext cx="11094415" cy="274320"/>
+          </a:xfrm>
+          <a:prstGeom prst="rect">
+            <a:avLst/>
+          </a:prstGeom>
+          <a:noFill/>
+        </p:spPr>
+        <p:txBody>
+          <a:bodyPr wrap="square" anchor="t" lIns="0" rIns="0" tIns="0" bIns="0"/>
+          <a:lstStyle/>
+          <a:p>
+            <a:pPr algn="l"/>
+            <a:r>
+              <a:rPr sz="1100" b="1" i="0">
+                <a:solidFill>
+                  <a:srgbClr val="54595D"/>
+                </a:solidFill>
+                <a:latin typeface="Calibri"/>
+              </a:rPr>
+              <a:t>DIGITAL INFRASTRUCTURE  ·  Digital Infrastructure Content Area 2</a:t>
+            </a:r>
+          </a:p>
+        </p:txBody>
+      </p:sp>
+      <p:sp>
+        <p:nvSpPr>
+          <p:cNvPr id="3" name="TextBox 2"/>
+          <p:cNvSpPr txBox="1"/>
+          <p:nvPr/>
+        </p:nvSpPr>
+        <p:spPr>
+          <a:xfrm>
+            <a:off x="548640" y="566928"/>
+            <a:ext cx="11094415" cy="822960"/>
+          </a:xfrm>
+          <a:prstGeom prst="rect">
+            <a:avLst/>
+          </a:prstGeom>
+          <a:noFill/>
+        </p:spPr>
+        <p:txBody>
+          <a:bodyPr wrap="square" anchor="ctr" lIns="0" rIns="0" tIns="0" bIns="0"/>
+          <a:lstStyle/>
+          <a:p>
+            <a:pPr algn="l"/>
+            <a:r>
+              <a:rPr sz="3200" b="1" i="0">
+                <a:solidFill>
+                  <a:srgbClr val="03306E"/>
+                </a:solidFill>
+                <a:latin typeface="Cambria"/>
+              </a:rPr>
+              <a:t>Activity: Build a mini domain</a:t>
+            </a:r>
+          </a:p>
+        </p:txBody>
+      </p:sp>
+      <p:sp>
+        <p:nvSpPr>
+          <p:cNvPr id="4" name="TextBox 3"/>
+          <p:cNvSpPr txBox="1"/>
+          <p:nvPr/>
+        </p:nvSpPr>
+        <p:spPr>
+          <a:xfrm>
+            <a:off x="548640" y="6446520"/>
+            <a:ext cx="8229600" cy="274320"/>
+          </a:xfrm>
+          <a:prstGeom prst="rect">
+            <a:avLst/>
+          </a:prstGeom>
+          <a:noFill/>
+        </p:spPr>
+        <p:txBody>
+          <a:bodyPr wrap="square" anchor="t" lIns="0" rIns="0" tIns="0" bIns="0"/>
+          <a:lstStyle/>
+          <a:p>
+            <a:pPr algn="l"/>
+            <a:r>
+              <a:rPr sz="1000" b="0" i="0">
+                <a:solidFill>
+                  <a:srgbClr val="54595D"/>
+                </a:solidFill>
+                <a:latin typeface="Calibri"/>
+              </a:rPr>
+              <a:t>Digital Support and Security T Level  ·  Network Services, Remote Access and Installation</a:t>
+            </a:r>
+          </a:p>
+        </p:txBody>
+      </p:sp>
+      <p:sp>
+        <p:nvSpPr>
+          <p:cNvPr id="5" name="TextBox 4"/>
+          <p:cNvSpPr txBox="1"/>
+          <p:nvPr/>
+        </p:nvSpPr>
+        <p:spPr>
+          <a:xfrm>
+            <a:off x="10728655" y="6446520"/>
+            <a:ext cx="914400" cy="274320"/>
+          </a:xfrm>
+          <a:prstGeom prst="rect">
+            <a:avLst/>
+          </a:prstGeom>
+          <a:noFill/>
+        </p:spPr>
+        <p:txBody>
+          <a:bodyPr wrap="square" anchor="t" lIns="0" rIns="0" tIns="0" bIns="0"/>
+          <a:lstStyle/>
+          <a:p>
+            <a:pPr algn="r"/>
+            <a:r>
+              <a:rPr sz="1000" b="0" i="0">
+                <a:solidFill>
+                  <a:srgbClr val="54595D"/>
+                </a:solidFill>
+                <a:latin typeface="Calibri"/>
+              </a:rPr>
+              <a:t>15</a:t>
+            </a:r>
+          </a:p>
+        </p:txBody>
+      </p:sp>
+      <p:sp>
+        <p:nvSpPr>
+          <p:cNvPr id="6" name="Rounded Rectangle 5"/>
+          <p:cNvSpPr/>
+          <p:nvPr/>
+        </p:nvSpPr>
+        <p:spPr>
+          <a:xfrm>
+            <a:off x="548640" y="1508760"/>
+            <a:ext cx="2011680" cy="457200"/>
+          </a:xfrm>
+          <a:prstGeom prst="roundRect">
+            <a:avLst>
+              <a:gd name="adj" fmla="val 50000"/>
+            </a:avLst>
+          </a:prstGeom>
+          <a:solidFill>
+            <a:srgbClr val="33C17A"/>
+          </a:solidFill>
+          <a:ln>
+            <a:noFill/>
+          </a:ln>
+          <a:effectLst/>
+        </p:spPr>
+        <p:style>
+          <a:lnRef idx="1">
+            <a:schemeClr val="accent1"/>
+          </a:lnRef>
+          <a:fillRef idx="3">
+            <a:schemeClr val="accent1"/>
+          </a:fillRef>
+          <a:effectRef idx="2">
+            <a:schemeClr val="accent1"/>
+          </a:effectRef>
+          <a:fontRef idx="minor">
+            <a:schemeClr val="lt1"/>
+          </a:fontRef>
+        </p:style>
+        <p:txBody>
+          <a:bodyPr rtlCol="0" anchor="ctr"/>
+          <a:lstStyle/>
+          <a:p/>
+        </p:txBody>
+      </p:sp>
+      <p:sp>
+        <p:nvSpPr>
+          <p:cNvPr id="7" name="TextBox 6"/>
+          <p:cNvSpPr txBox="1"/>
+          <p:nvPr/>
+        </p:nvSpPr>
+        <p:spPr>
+          <a:xfrm>
+            <a:off x="548640" y="1508760"/>
+            <a:ext cx="2011680" cy="457200"/>
+          </a:xfrm>
+          <a:prstGeom prst="rect">
+            <a:avLst/>
+          </a:prstGeom>
+          <a:noFill/>
+        </p:spPr>
+        <p:txBody>
+          <a:bodyPr wrap="square" anchor="ctr" lIns="0" rIns="0" tIns="0" bIns="0"/>
+          <a:lstStyle/>
+          <a:p>
+            <a:pPr algn="ctr"/>
+            <a:r>
+              <a:rPr sz="1400" b="1" i="0">
+                <a:solidFill>
+                  <a:srgbClr val="202122"/>
+                </a:solidFill>
+                <a:latin typeface="Calibri"/>
+              </a:rPr>
+              <a:t>50 minutes</a:t>
+            </a:r>
+          </a:p>
+        </p:txBody>
+      </p:sp>
+      <p:sp>
+        <p:nvSpPr>
+          <p:cNvPr id="8" name="TextBox 7"/>
+          <p:cNvSpPr txBox="1"/>
+          <p:nvPr/>
+        </p:nvSpPr>
+        <p:spPr>
+          <a:xfrm>
+            <a:off x="2743200" y="1508760"/>
+            <a:ext cx="4754880" cy="457200"/>
+          </a:xfrm>
+          <a:prstGeom prst="rect">
+            <a:avLst/>
+          </a:prstGeom>
+          <a:noFill/>
+        </p:spPr>
+        <p:txBody>
+          <a:bodyPr wrap="square" anchor="ctr" lIns="0" rIns="0" tIns="0" bIns="0"/>
+          <a:lstStyle/>
+          <a:p>
+            <a:pPr algn="l"/>
+            <a:r>
+              <a:rPr sz="1400" b="0" i="1">
+                <a:solidFill>
+                  <a:srgbClr val="54595D"/>
+                </a:solidFill>
+                <a:latin typeface="Calibri"/>
+              </a:rPr>
+              <a:t>Pairs, on VMs</a:t>
+            </a:r>
+          </a:p>
+        </p:txBody>
+      </p:sp>
+      <p:sp>
+        <p:nvSpPr>
+          <p:cNvPr id="9" name="Oval 8"/>
+          <p:cNvSpPr/>
+          <p:nvPr/>
+        </p:nvSpPr>
+        <p:spPr>
+          <a:xfrm>
+            <a:off x="548640" y="2482596"/>
+            <a:ext cx="384048" cy="384048"/>
+          </a:xfrm>
+          <a:prstGeom prst="ellipse">
+            <a:avLst/>
+          </a:prstGeom>
+          <a:solidFill>
+            <a:srgbClr val="0645AD"/>
+          </a:solidFill>
+          <a:ln>
+            <a:noFill/>
+          </a:ln>
+          <a:effectLst/>
+        </p:spPr>
+        <p:style>
+          <a:lnRef idx="1">
+            <a:schemeClr val="accent1"/>
+          </a:lnRef>
+          <a:fillRef idx="3">
+            <a:schemeClr val="accent1"/>
+          </a:fillRef>
+          <a:effectRef idx="2">
+            <a:schemeClr val="accent1"/>
+          </a:effectRef>
+          <a:fontRef idx="minor">
+            <a:schemeClr val="lt1"/>
+          </a:fontRef>
+        </p:style>
+        <p:txBody>
+          <a:bodyPr rtlCol="0" anchor="ctr" lIns="0" rIns="0" tIns="0" bIns="0"/>
+          <a:lstStyle/>
+          <a:p>
+            <a:pPr algn="ctr"/>
+            <a:r>
+              <a:rPr sz="1300" b="1">
+                <a:solidFill>
+                  <a:srgbClr val="FFFFFF"/>
+                </a:solidFill>
+                <a:latin typeface="Calibri"/>
+              </a:rPr>
+              <a:t>1</a:t>
+            </a:r>
+          </a:p>
+        </p:txBody>
+      </p:sp>
+      <p:sp>
+        <p:nvSpPr>
+          <p:cNvPr id="10" name="TextBox 9"/>
+          <p:cNvSpPr txBox="1"/>
+          <p:nvPr/>
+        </p:nvSpPr>
+        <p:spPr>
+          <a:xfrm>
+            <a:off x="1143000" y="2240280"/>
+            <a:ext cx="5943600" cy="868680"/>
+          </a:xfrm>
+          <a:prstGeom prst="rect">
+            <a:avLst/>
+          </a:prstGeom>
+          <a:noFill/>
+        </p:spPr>
+        <p:txBody>
+          <a:bodyPr wrap="square" anchor="ctr" lIns="0" rIns="0" tIns="0" bIns="0"/>
+          <a:lstStyle/>
+          <a:p>
+            <a:pPr algn="l"/>
+            <a:r>
+              <a:rPr sz="1700" b="0" i="0">
+                <a:solidFill>
+                  <a:srgbClr val="202122"/>
+                </a:solidFill>
+                <a:latin typeface="Calibri"/>
+              </a:rPr>
+              <a:t>Promote a Windows Server VM to a domain controller with DNS.</a:t>
+            </a:r>
+          </a:p>
+        </p:txBody>
+      </p:sp>
+      <p:sp>
+        <p:nvSpPr>
+          <p:cNvPr id="11" name="Oval 10"/>
+          <p:cNvSpPr/>
+          <p:nvPr/>
+        </p:nvSpPr>
+        <p:spPr>
+          <a:xfrm>
+            <a:off x="548640" y="3461004"/>
+            <a:ext cx="384048" cy="384048"/>
+          </a:xfrm>
+          <a:prstGeom prst="ellipse">
+            <a:avLst/>
+          </a:prstGeom>
+          <a:solidFill>
+            <a:srgbClr val="0645AD"/>
+          </a:solidFill>
+          <a:ln>
+            <a:noFill/>
+          </a:ln>
+          <a:effectLst/>
+        </p:spPr>
+        <p:style>
+          <a:lnRef idx="1">
+            <a:schemeClr val="accent1"/>
+          </a:lnRef>
+          <a:fillRef idx="3">
+            <a:schemeClr val="accent1"/>
+          </a:fillRef>
+          <a:effectRef idx="2">
+            <a:schemeClr val="accent1"/>
+          </a:effectRef>
+          <a:fontRef idx="minor">
+            <a:schemeClr val="lt1"/>
+          </a:fontRef>
+        </p:style>
+        <p:txBody>
+          <a:bodyPr rtlCol="0" anchor="ctr" lIns="0" rIns="0" tIns="0" bIns="0"/>
+          <a:lstStyle/>
+          <a:p>
+            <a:pPr algn="ctr"/>
+            <a:r>
+              <a:rPr sz="1300" b="1">
+                <a:solidFill>
+                  <a:srgbClr val="FFFFFF"/>
+                </a:solidFill>
+                <a:latin typeface="Calibri"/>
+              </a:rPr>
+              <a:t>2</a:t>
+            </a:r>
+          </a:p>
+        </p:txBody>
+      </p:sp>
+      <p:sp>
+        <p:nvSpPr>
+          <p:cNvPr id="12" name="TextBox 11"/>
+          <p:cNvSpPr txBox="1"/>
+          <p:nvPr/>
+        </p:nvSpPr>
+        <p:spPr>
+          <a:xfrm>
+            <a:off x="1143000" y="3218688"/>
+            <a:ext cx="5943600" cy="868680"/>
+          </a:xfrm>
+          <a:prstGeom prst="rect">
+            <a:avLst/>
+          </a:prstGeom>
+          <a:noFill/>
+        </p:spPr>
+        <p:txBody>
+          <a:bodyPr wrap="square" anchor="ctr" lIns="0" rIns="0" tIns="0" bIns="0"/>
+          <a:lstStyle/>
+          <a:p>
+            <a:pPr algn="l"/>
+            <a:r>
+              <a:rPr sz="1700" b="0" i="0">
+                <a:solidFill>
+                  <a:srgbClr val="202122"/>
+                </a:solidFill>
+                <a:latin typeface="Calibri"/>
+              </a:rPr>
+              <a:t>Add DHCP with a small scope.</a:t>
+            </a:r>
+          </a:p>
+        </p:txBody>
+      </p:sp>
+      <p:sp>
+        <p:nvSpPr>
+          <p:cNvPr id="13" name="Oval 12"/>
+          <p:cNvSpPr/>
+          <p:nvPr/>
+        </p:nvSpPr>
+        <p:spPr>
+          <a:xfrm>
+            <a:off x="548640" y="4439412"/>
+            <a:ext cx="384048" cy="384048"/>
+          </a:xfrm>
+          <a:prstGeom prst="ellipse">
+            <a:avLst/>
+          </a:prstGeom>
+          <a:solidFill>
+            <a:srgbClr val="0645AD"/>
+          </a:solidFill>
+          <a:ln>
+            <a:noFill/>
+          </a:ln>
+          <a:effectLst/>
+        </p:spPr>
+        <p:style>
+          <a:lnRef idx="1">
+            <a:schemeClr val="accent1"/>
+          </a:lnRef>
+          <a:fillRef idx="3">
+            <a:schemeClr val="accent1"/>
+          </a:fillRef>
+          <a:effectRef idx="2">
+            <a:schemeClr val="accent1"/>
+          </a:effectRef>
+          <a:fontRef idx="minor">
+            <a:schemeClr val="lt1"/>
+          </a:fontRef>
+        </p:style>
+        <p:txBody>
+          <a:bodyPr rtlCol="0" anchor="ctr" lIns="0" rIns="0" tIns="0" bIns="0"/>
+          <a:lstStyle/>
+          <a:p>
+            <a:pPr algn="ctr"/>
+            <a:r>
+              <a:rPr sz="1300" b="1">
+                <a:solidFill>
+                  <a:srgbClr val="FFFFFF"/>
+                </a:solidFill>
+                <a:latin typeface="Calibri"/>
+              </a:rPr>
+              <a:t>3</a:t>
+            </a:r>
+          </a:p>
+        </p:txBody>
+      </p:sp>
+      <p:sp>
+        <p:nvSpPr>
+          <p:cNvPr id="14" name="TextBox 13"/>
+          <p:cNvSpPr txBox="1"/>
+          <p:nvPr/>
+        </p:nvSpPr>
+        <p:spPr>
+          <a:xfrm>
+            <a:off x="1143000" y="4197096"/>
+            <a:ext cx="5943600" cy="868680"/>
+          </a:xfrm>
+          <a:prstGeom prst="rect">
+            <a:avLst/>
+          </a:prstGeom>
+          <a:noFill/>
+        </p:spPr>
+        <p:txBody>
+          <a:bodyPr wrap="square" anchor="ctr" lIns="0" rIns="0" tIns="0" bIns="0"/>
+          <a:lstStyle/>
+          <a:p>
+            <a:pPr algn="l"/>
+            <a:r>
+              <a:rPr sz="1700" b="0" i="0">
+                <a:solidFill>
+                  <a:srgbClr val="202122"/>
+                </a:solidFill>
+                <a:latin typeface="Calibri"/>
+              </a:rPr>
+              <a:t>Create two OUs with a user in each, and a GPO that sets a desktop wallpaper for one OU.</a:t>
+            </a:r>
+          </a:p>
+        </p:txBody>
+      </p:sp>
+      <p:sp>
+        <p:nvSpPr>
+          <p:cNvPr id="15" name="Oval 14"/>
+          <p:cNvSpPr/>
+          <p:nvPr/>
+        </p:nvSpPr>
+        <p:spPr>
+          <a:xfrm>
+            <a:off x="548640" y="5417820"/>
+            <a:ext cx="384048" cy="384048"/>
+          </a:xfrm>
+          <a:prstGeom prst="ellipse">
+            <a:avLst/>
+          </a:prstGeom>
+          <a:solidFill>
+            <a:srgbClr val="0645AD"/>
+          </a:solidFill>
+          <a:ln>
+            <a:noFill/>
+          </a:ln>
+          <a:effectLst/>
+        </p:spPr>
+        <p:style>
+          <a:lnRef idx="1">
+            <a:schemeClr val="accent1"/>
+          </a:lnRef>
+          <a:fillRef idx="3">
+            <a:schemeClr val="accent1"/>
+          </a:fillRef>
+          <a:effectRef idx="2">
+            <a:schemeClr val="accent1"/>
+          </a:effectRef>
+          <a:fontRef idx="minor">
+            <a:schemeClr val="lt1"/>
+          </a:fontRef>
+        </p:style>
+        <p:txBody>
+          <a:bodyPr rtlCol="0" anchor="ctr" lIns="0" rIns="0" tIns="0" bIns="0"/>
+          <a:lstStyle/>
+          <a:p>
+            <a:pPr algn="ctr"/>
+            <a:r>
+              <a:rPr sz="1300" b="1">
+                <a:solidFill>
+                  <a:srgbClr val="FFFFFF"/>
+                </a:solidFill>
+                <a:latin typeface="Calibri"/>
+              </a:rPr>
+              <a:t>4</a:t>
+            </a:r>
+          </a:p>
+        </p:txBody>
+      </p:sp>
+      <p:sp>
+        <p:nvSpPr>
+          <p:cNvPr id="16" name="TextBox 15"/>
+          <p:cNvSpPr txBox="1"/>
+          <p:nvPr/>
+        </p:nvSpPr>
+        <p:spPr>
+          <a:xfrm>
+            <a:off x="1143000" y="5175504"/>
+            <a:ext cx="5943600" cy="868680"/>
+          </a:xfrm>
+          <a:prstGeom prst="rect">
+            <a:avLst/>
+          </a:prstGeom>
+          <a:noFill/>
+        </p:spPr>
+        <p:txBody>
+          <a:bodyPr wrap="square" anchor="ctr" lIns="0" rIns="0" tIns="0" bIns="0"/>
+          <a:lstStyle/>
+          <a:p>
+            <a:pPr algn="l"/>
+            <a:r>
+              <a:rPr sz="1700" b="0" i="0">
+                <a:solidFill>
+                  <a:srgbClr val="202122"/>
+                </a:solidFill>
+                <a:latin typeface="Calibri"/>
+              </a:rPr>
+              <a:t>Join a client VM to the domain and test both users.</a:t>
+            </a:r>
+          </a:p>
+        </p:txBody>
+      </p:sp>
+      <p:sp>
+        <p:nvSpPr>
+          <p:cNvPr id="17" name="Rounded Rectangle 16"/>
+          <p:cNvSpPr/>
+          <p:nvPr/>
+        </p:nvSpPr>
+        <p:spPr>
+          <a:xfrm>
+            <a:off x="7772400" y="1508760"/>
+            <a:ext cx="3867912" cy="4572000"/>
+          </a:xfrm>
+          <a:prstGeom prst="roundRect">
+            <a:avLst>
+              <a:gd name="adj" fmla="val 8000"/>
+            </a:avLst>
+          </a:prstGeom>
+          <a:solidFill>
+            <a:srgbClr val="EAF3FF"/>
+          </a:solidFill>
+          <a:ln>
+            <a:noFill/>
+          </a:ln>
+          <a:effectLst/>
+        </p:spPr>
+        <p:style>
+          <a:lnRef idx="1">
+            <a:schemeClr val="accent1"/>
+          </a:lnRef>
+          <a:fillRef idx="3">
+            <a:schemeClr val="accent1"/>
+          </a:fillRef>
+          <a:effectRef idx="2">
+            <a:schemeClr val="accent1"/>
+          </a:effectRef>
+          <a:fontRef idx="minor">
+            <a:schemeClr val="lt1"/>
+          </a:fontRef>
+        </p:style>
+        <p:txBody>
+          <a:bodyPr rtlCol="0" anchor="ctr"/>
+          <a:lstStyle/>
+          <a:p/>
+        </p:txBody>
+      </p:sp>
+      <p:sp>
+        <p:nvSpPr>
+          <p:cNvPr id="18" name="TextBox 17"/>
+          <p:cNvSpPr txBox="1"/>
+          <p:nvPr/>
+        </p:nvSpPr>
+        <p:spPr>
+          <a:xfrm>
+            <a:off x="8046720" y="1737360"/>
+            <a:ext cx="3291840" cy="365760"/>
+          </a:xfrm>
+          <a:prstGeom prst="rect">
+            <a:avLst/>
+          </a:prstGeom>
+          <a:noFill/>
+        </p:spPr>
+        <p:txBody>
+          <a:bodyPr wrap="square" anchor="t" lIns="0" rIns="0" tIns="0" bIns="0"/>
+          <a:lstStyle/>
+          <a:p>
+            <a:pPr algn="l"/>
+            <a:r>
+              <a:rPr sz="1300" b="1" i="0">
+                <a:solidFill>
+                  <a:srgbClr val="0645AD"/>
+                </a:solidFill>
+                <a:latin typeface="Calibri"/>
+              </a:rPr>
+              <a:t>SUCCESS CRITERIA</a:t>
+            </a:r>
+          </a:p>
+        </p:txBody>
+      </p:sp>
+      <p:sp>
+        <p:nvSpPr>
+          <p:cNvPr id="19" name="TextBox 18"/>
+          <p:cNvSpPr txBox="1"/>
+          <p:nvPr/>
+        </p:nvSpPr>
+        <p:spPr>
+          <a:xfrm>
+            <a:off x="8046720" y="2240280"/>
+            <a:ext cx="3337560" cy="3657600"/>
+          </a:xfrm>
+          <a:prstGeom prst="rect">
+            <a:avLst/>
+          </a:prstGeom>
+          <a:noFill/>
+        </p:spPr>
+        <p:txBody>
+          <a:bodyPr wrap="square" lIns="0" rIns="0" tIns="0" bIns="0">
+            <a:spAutoFit/>
+          </a:bodyPr>
+          <a:lstStyle/>
+          <a:p>
+            <a:pPr marL="274320" indent="-274320">
+              <a:spcAft>
+                <a:spcPts val="810"/>
+              </a:spcAft>
+              <a:buClr>
+                <a:srgbClr val="0645AD"/>
+              </a:buClr>
+              <a:buFont typeface="Arial"/>
+              <a:buChar char="•"/>
+            </a:pPr>
+            <a:r>
+              <a:rPr sz="1800" b="0">
+                <a:solidFill>
+                  <a:srgbClr val="202122"/>
+                </a:solidFill>
+                <a:latin typeface="Calibri"/>
+              </a:rPr>
+              <a:t>Client receives an address from DHCP</a:t>
+            </a:r>
+          </a:p>
+          <a:p>
+            <a:pPr marL="274320" indent="-274320">
+              <a:spcAft>
+                <a:spcPts val="810"/>
+              </a:spcAft>
+              <a:buClr>
+                <a:srgbClr val="0645AD"/>
+              </a:buClr>
+              <a:buFont typeface="Arial"/>
+              <a:buChar char="•"/>
+            </a:pPr>
+            <a:r>
+              <a:rPr sz="1800" b="0">
+                <a:solidFill>
+                  <a:srgbClr val="202122"/>
+                </a:solidFill>
+                <a:latin typeface="Calibri"/>
+              </a:rPr>
+              <a:t>Both users log on</a:t>
+            </a:r>
+          </a:p>
+          <a:p>
+            <a:pPr marL="274320" indent="-274320">
+              <a:spcAft>
+                <a:spcPts val="810"/>
+              </a:spcAft>
+              <a:buClr>
+                <a:srgbClr val="0645AD"/>
+              </a:buClr>
+              <a:buFont typeface="Arial"/>
+              <a:buChar char="•"/>
+            </a:pPr>
+            <a:r>
+              <a:rPr sz="1800" b="0">
+                <a:solidFill>
+                  <a:srgbClr val="202122"/>
+                </a:solidFill>
+                <a:latin typeface="Calibri"/>
+              </a:rPr>
+              <a:t>GPO applies to the right OU only</a:t>
+            </a:r>
+          </a:p>
+          <a:p>
+            <a:pPr marL="274320" indent="-274320">
+              <a:spcAft>
+                <a:spcPts val="810"/>
+              </a:spcAft>
+              <a:buClr>
+                <a:srgbClr val="0645AD"/>
+              </a:buClr>
+              <a:buFont typeface="Arial"/>
+              <a:buChar char="•"/>
+            </a:pPr>
+            <a:r>
+              <a:rPr sz="1800" b="0">
+                <a:solidFill>
+                  <a:srgbClr val="202122"/>
+                </a:solidFill>
+                <a:latin typeface="Calibri"/>
+              </a:rPr>
+              <a:t>Each step tested and recorded</a:t>
+            </a:r>
+          </a:p>
+        </p:txBody>
+      </p:sp>
+    </p:spTree>
+  </p:cSld>
+  <p:clrMapOvr>
+    <a:masterClrMapping/>
+  </p:clrMapOvr>
+</p:sld>
+</file>
+
+<file path=ppt/slides/slide16.xml><?xml version="1.0" encoding="utf-8"?>
+<p:sld xmlns:a="http://schemas.openxmlformats.org/drawingml/2006/main" xmlns:p="http://schemas.openxmlformats.org/presentationml/2006/main" xmlns:r="http://schemas.openxmlformats.org/officeDocument/2006/relationships">
+  <p:cSld>
+    <p:bg>
+      <p:bgPr>
+        <a:solidFill>
           <a:srgbClr val="03306E"/>
         </a:solidFill>
         <a:effectLst/>
@@ -5277,6 +9471,414 @@
                 <a:latin typeface="Calibri"/>
               </a:rPr>
               <a:t>3</a:t>
+            </a:r>
+          </a:p>
+        </p:txBody>
+      </p:sp>
+      <p:sp>
+        <p:nvSpPr>
+          <p:cNvPr id="6" name="TextBox 5"/>
+          <p:cNvSpPr txBox="1"/>
+          <p:nvPr/>
+        </p:nvSpPr>
+        <p:spPr>
+          <a:xfrm>
+            <a:off x="548640" y="1554480"/>
+            <a:ext cx="6720840" cy="4617720"/>
+          </a:xfrm>
+          <a:prstGeom prst="rect">
+            <a:avLst/>
+          </a:prstGeom>
+          <a:noFill/>
+        </p:spPr>
+        <p:txBody>
+          <a:bodyPr wrap="square" lIns="0" rIns="0" tIns="0" bIns="0">
+            <a:spAutoFit/>
+          </a:bodyPr>
+          <a:lstStyle/>
+          <a:p>
+            <a:pPr>
+              <a:spcAft>
+                <a:spcPts val="1200"/>
+              </a:spcAft>
+            </a:pPr>
+            <a:r>
+              <a:rPr sz="2000" b="0">
+                <a:solidFill>
+                  <a:srgbClr val="202122"/>
+                </a:solidFill>
+                <a:latin typeface="Calibri"/>
+              </a:rPr>
+              <a:t>Servers provide the services that make a network work.</a:t>
+            </a:r>
+          </a:p>
+          <a:p>
+            <a:pPr>
+              <a:spcAft>
+                <a:spcPts val="1200"/>
+              </a:spcAft>
+            </a:pPr>
+            <a:r>
+              <a:rPr sz="2000" b="0">
+                <a:solidFill>
+                  <a:srgbClr val="202122"/>
+                </a:solidFill>
+                <a:latin typeface="Calibri"/>
+              </a:rPr>
+              <a:t>Active Directory Domain Services (AD DS) stores every user, device and group centrally, organised into organisational units (OUs). Group Policy applies settings to OUs through Group Policy Objects (GPOs).</a:t>
+            </a:r>
+          </a:p>
+          <a:p>
+            <a:pPr>
+              <a:spcAft>
+                <a:spcPts val="1200"/>
+              </a:spcAft>
+            </a:pPr>
+            <a:r>
+              <a:rPr sz="2000" b="0">
+                <a:solidFill>
+                  <a:srgbClr val="202122"/>
+                </a:solidFill>
+                <a:latin typeface="Calibri"/>
+              </a:rPr>
+              <a:t>DHCP hands out IP addresses automatically. DNS turns names into IP addresses. LDAP is the protocol used to query the directory for authentication.</a:t>
+            </a:r>
+          </a:p>
+          <a:p>
+            <a:pPr>
+              <a:spcAft>
+                <a:spcPts val="1200"/>
+              </a:spcAft>
+            </a:pPr>
+            <a:r>
+              <a:rPr sz="2000" b="0">
+                <a:solidFill>
+                  <a:srgbClr val="202122"/>
+                </a:solidFill>
+                <a:latin typeface="Calibri"/>
+              </a:rPr>
+              <a:t>File servers and DFS provide shared storage; print servers share printers; web, proxy and cache servers provide filtered internet access; mail, application and database servers run business systems.</a:t>
+            </a:r>
+          </a:p>
+        </p:txBody>
+      </p:sp>
+      <p:sp>
+        <p:nvSpPr>
+          <p:cNvPr id="7" name="Rounded Rectangle 6"/>
+          <p:cNvSpPr/>
+          <p:nvPr/>
+        </p:nvSpPr>
+        <p:spPr>
+          <a:xfrm>
+            <a:off x="7772400" y="1554480"/>
+            <a:ext cx="3867912" cy="4526280"/>
+          </a:xfrm>
+          <a:prstGeom prst="roundRect">
+            <a:avLst>
+              <a:gd name="adj" fmla="val 8000"/>
+            </a:avLst>
+          </a:prstGeom>
+          <a:solidFill>
+            <a:srgbClr val="03306E"/>
+          </a:solidFill>
+          <a:ln>
+            <a:noFill/>
+          </a:ln>
+          <a:effectLst/>
+        </p:spPr>
+        <p:style>
+          <a:lnRef idx="1">
+            <a:schemeClr val="accent1"/>
+          </a:lnRef>
+          <a:fillRef idx="3">
+            <a:schemeClr val="accent1"/>
+          </a:fillRef>
+          <a:effectRef idx="2">
+            <a:schemeClr val="accent1"/>
+          </a:effectRef>
+          <a:fontRef idx="minor">
+            <a:schemeClr val="lt1"/>
+          </a:fontRef>
+        </p:style>
+        <p:txBody>
+          <a:bodyPr rtlCol="0" anchor="ctr"/>
+          <a:lstStyle/>
+          <a:p/>
+        </p:txBody>
+      </p:sp>
+      <p:sp>
+        <p:nvSpPr>
+          <p:cNvPr id="8" name="Oval 7"/>
+          <p:cNvSpPr/>
+          <p:nvPr/>
+        </p:nvSpPr>
+        <p:spPr>
+          <a:xfrm>
+            <a:off x="8046720" y="1828800"/>
+            <a:ext cx="548640" cy="548640"/>
+          </a:xfrm>
+          <a:prstGeom prst="ellipse">
+            <a:avLst/>
+          </a:prstGeom>
+          <a:solidFill>
+            <a:srgbClr val="33C17A"/>
+          </a:solidFill>
+          <a:ln>
+            <a:noFill/>
+          </a:ln>
+          <a:effectLst/>
+        </p:spPr>
+        <p:style>
+          <a:lnRef idx="1">
+            <a:schemeClr val="accent1"/>
+          </a:lnRef>
+          <a:fillRef idx="3">
+            <a:schemeClr val="accent1"/>
+          </a:fillRef>
+          <a:effectRef idx="2">
+            <a:schemeClr val="accent1"/>
+          </a:effectRef>
+          <a:fontRef idx="minor">
+            <a:schemeClr val="lt1"/>
+          </a:fontRef>
+        </p:style>
+        <p:txBody>
+          <a:bodyPr rtlCol="0" anchor="ctr" lIns="0" rIns="0" tIns="0" bIns="0"/>
+          <a:lstStyle/>
+          <a:p>
+            <a:pPr algn="ctr"/>
+            <a:r>
+              <a:rPr sz="1300" b="1">
+                <a:solidFill>
+                  <a:srgbClr val="202122"/>
+                </a:solidFill>
+                <a:latin typeface="Calibri"/>
+              </a:rPr>
+              <a:t>e.g.</a:t>
+            </a:r>
+          </a:p>
+        </p:txBody>
+      </p:sp>
+      <p:sp>
+        <p:nvSpPr>
+          <p:cNvPr id="9" name="TextBox 8"/>
+          <p:cNvSpPr txBox="1"/>
+          <p:nvPr/>
+        </p:nvSpPr>
+        <p:spPr>
+          <a:xfrm>
+            <a:off x="8046720" y="2560320"/>
+            <a:ext cx="3291840" cy="365760"/>
+          </a:xfrm>
+          <a:prstGeom prst="rect">
+            <a:avLst/>
+          </a:prstGeom>
+          <a:noFill/>
+        </p:spPr>
+        <p:txBody>
+          <a:bodyPr wrap="square" anchor="t" lIns="0" rIns="0" tIns="0" bIns="0"/>
+          <a:lstStyle/>
+          <a:p>
+            <a:pPr algn="l"/>
+            <a:r>
+              <a:rPr sz="1300" b="1" i="0">
+                <a:solidFill>
+                  <a:srgbClr val="A9C8F0"/>
+                </a:solidFill>
+                <a:latin typeface="Calibri"/>
+              </a:rPr>
+              <a:t>EXAMPLE</a:t>
+            </a:r>
+          </a:p>
+        </p:txBody>
+      </p:sp>
+      <p:sp>
+        <p:nvSpPr>
+          <p:cNvPr id="10" name="TextBox 9"/>
+          <p:cNvSpPr txBox="1"/>
+          <p:nvPr/>
+        </p:nvSpPr>
+        <p:spPr>
+          <a:xfrm>
+            <a:off x="8046720" y="2971800"/>
+            <a:ext cx="3291840" cy="2971800"/>
+          </a:xfrm>
+          <a:prstGeom prst="rect">
+            <a:avLst/>
+          </a:prstGeom>
+          <a:noFill/>
+        </p:spPr>
+        <p:txBody>
+          <a:bodyPr wrap="square" anchor="t" lIns="0" rIns="0" tIns="0" bIns="0"/>
+          <a:lstStyle/>
+          <a:p>
+            <a:pPr algn="l"/>
+            <a:r>
+              <a:rPr sz="1900" b="0" i="0">
+                <a:solidFill>
+                  <a:srgbClr val="FFFFFF"/>
+                </a:solidFill>
+                <a:latin typeface="Cambria"/>
+              </a:rPr>
+              <a:t>A new starter logs in: AD DS authenticates them, DHCP gives the PC an address, DNS finds the file server, and a GPO maps their drives.</a:t>
+            </a:r>
+          </a:p>
+        </p:txBody>
+      </p:sp>
+    </p:spTree>
+  </p:cSld>
+  <p:clrMapOvr>
+    <a:masterClrMapping/>
+  </p:clrMapOvr>
+</p:sld>
+</file>
+
+<file path=ppt/slides/slide4.xml><?xml version="1.0" encoding="utf-8"?>
+<p:sld xmlns:a="http://schemas.openxmlformats.org/drawingml/2006/main" xmlns:p="http://schemas.openxmlformats.org/presentationml/2006/main" xmlns:r="http://schemas.openxmlformats.org/officeDocument/2006/relationships">
+  <p:cSld>
+    <p:bg>
+      <p:bgPr>
+        <a:solidFill>
+          <a:srgbClr val="FFFFFF"/>
+        </a:solidFill>
+        <a:effectLst/>
+      </p:bgPr>
+    </p:bg>
+    <p:spTree>
+      <p:nvGrpSpPr>
+        <p:cNvPr id="1" name=""/>
+        <p:cNvGrpSpPr/>
+        <p:nvPr/>
+      </p:nvGrpSpPr>
+      <p:grpSpPr/>
+      <p:sp>
+        <p:nvSpPr>
+          <p:cNvPr id="2" name="TextBox 1"/>
+          <p:cNvSpPr txBox="1"/>
+          <p:nvPr/>
+        </p:nvSpPr>
+        <p:spPr>
+          <a:xfrm>
+            <a:off x="548640" y="320040"/>
+            <a:ext cx="11094415" cy="274320"/>
+          </a:xfrm>
+          <a:prstGeom prst="rect">
+            <a:avLst/>
+          </a:prstGeom>
+          <a:noFill/>
+        </p:spPr>
+        <p:txBody>
+          <a:bodyPr wrap="square" anchor="t" lIns="0" rIns="0" tIns="0" bIns="0"/>
+          <a:lstStyle/>
+          <a:p>
+            <a:pPr algn="l"/>
+            <a:r>
+              <a:rPr sz="1100" b="1" i="0">
+                <a:solidFill>
+                  <a:srgbClr val="54595D"/>
+                </a:solidFill>
+                <a:latin typeface="Calibri"/>
+              </a:rPr>
+              <a:t>DIGITAL INFRASTRUCTURE  ·  Digital Infrastructure Content Area 2</a:t>
+            </a:r>
+          </a:p>
+        </p:txBody>
+      </p:sp>
+      <p:sp>
+        <p:nvSpPr>
+          <p:cNvPr id="3" name="TextBox 2"/>
+          <p:cNvSpPr txBox="1"/>
+          <p:nvPr/>
+        </p:nvSpPr>
+        <p:spPr>
+          <a:xfrm>
+            <a:off x="548640" y="566928"/>
+            <a:ext cx="11094415" cy="822960"/>
+          </a:xfrm>
+          <a:prstGeom prst="rect">
+            <a:avLst/>
+          </a:prstGeom>
+          <a:noFill/>
+        </p:spPr>
+        <p:txBody>
+          <a:bodyPr wrap="square" anchor="ctr" lIns="0" rIns="0" tIns="0" bIns="0"/>
+          <a:lstStyle/>
+          <a:p>
+            <a:pPr algn="l"/>
+            <a:r>
+              <a:rPr sz="3200" b="1" i="0">
+                <a:solidFill>
+                  <a:srgbClr val="03306E"/>
+                </a:solidFill>
+                <a:latin typeface="Cambria"/>
+              </a:rPr>
+              <a:t>Client-server network services</a:t>
+            </a:r>
+          </a:p>
+        </p:txBody>
+      </p:sp>
+      <p:sp>
+        <p:nvSpPr>
+          <p:cNvPr id="4" name="TextBox 3"/>
+          <p:cNvSpPr txBox="1"/>
+          <p:nvPr/>
+        </p:nvSpPr>
+        <p:spPr>
+          <a:xfrm>
+            <a:off x="548640" y="6446520"/>
+            <a:ext cx="8229600" cy="274320"/>
+          </a:xfrm>
+          <a:prstGeom prst="rect">
+            <a:avLst/>
+          </a:prstGeom>
+          <a:noFill/>
+        </p:spPr>
+        <p:txBody>
+          <a:bodyPr wrap="square" anchor="t" lIns="0" rIns="0" tIns="0" bIns="0"/>
+          <a:lstStyle/>
+          <a:p>
+            <a:pPr algn="l"/>
+            <a:r>
+              <a:rPr sz="1000" b="0" i="0">
+                <a:solidFill>
+                  <a:srgbClr val="54595D"/>
+                </a:solidFill>
+                <a:latin typeface="Calibri"/>
+              </a:rPr>
+              <a:t>Digital Support and Security T Level  ·  Network Services, Remote Access and Installation</a:t>
+            </a:r>
+          </a:p>
+        </p:txBody>
+      </p:sp>
+      <p:sp>
+        <p:nvSpPr>
+          <p:cNvPr id="5" name="TextBox 4"/>
+          <p:cNvSpPr txBox="1"/>
+          <p:nvPr/>
+        </p:nvSpPr>
+        <p:spPr>
+          <a:xfrm>
+            <a:off x="10728655" y="6446520"/>
+            <a:ext cx="914400" cy="274320"/>
+          </a:xfrm>
+          <a:prstGeom prst="rect">
+            <a:avLst/>
+          </a:prstGeom>
+          <a:noFill/>
+        </p:spPr>
+        <p:txBody>
+          <a:bodyPr wrap="square" anchor="t" lIns="0" rIns="0" tIns="0" bIns="0"/>
+          <a:lstStyle/>
+          <a:p>
+            <a:pPr algn="r"/>
+            <a:r>
+              <a:rPr sz="1000" b="0" i="0">
+                <a:solidFill>
+                  <a:srgbClr val="54595D"/>
+                </a:solidFill>
+                <a:latin typeface="Calibri"/>
+              </a:rPr>
+              <a:t>4</a:t>
             </a:r>
           </a:p>
         </p:txBody>
@@ -5637,816 +10239,6 @@
 </p:sld>
 </file>
 
-<file path=ppt/slides/slide4.xml><?xml version="1.0" encoding="utf-8"?>
-<p:sld xmlns:a="http://schemas.openxmlformats.org/drawingml/2006/main" xmlns:p="http://schemas.openxmlformats.org/presentationml/2006/main" xmlns:r="http://schemas.openxmlformats.org/officeDocument/2006/relationships">
-  <p:cSld>
-    <p:bg>
-      <p:bgPr>
-        <a:solidFill>
-          <a:srgbClr val="FFFFFF"/>
-        </a:solidFill>
-        <a:effectLst/>
-      </p:bgPr>
-    </p:bg>
-    <p:spTree>
-      <p:nvGrpSpPr>
-        <p:cNvPr id="1" name=""/>
-        <p:cNvGrpSpPr/>
-        <p:nvPr/>
-      </p:nvGrpSpPr>
-      <p:grpSpPr/>
-      <p:sp>
-        <p:nvSpPr>
-          <p:cNvPr id="2" name="TextBox 1"/>
-          <p:cNvSpPr txBox="1"/>
-          <p:nvPr/>
-        </p:nvSpPr>
-        <p:spPr>
-          <a:xfrm>
-            <a:off x="548640" y="320040"/>
-            <a:ext cx="11094415" cy="274320"/>
-          </a:xfrm>
-          <a:prstGeom prst="rect">
-            <a:avLst/>
-          </a:prstGeom>
-          <a:noFill/>
-        </p:spPr>
-        <p:txBody>
-          <a:bodyPr wrap="square" anchor="t" lIns="0" rIns="0" tIns="0" bIns="0"/>
-          <a:lstStyle/>
-          <a:p>
-            <a:pPr algn="l"/>
-            <a:r>
-              <a:rPr sz="1100" b="1" i="0">
-                <a:solidFill>
-                  <a:srgbClr val="54595D"/>
-                </a:solidFill>
-                <a:latin typeface="Calibri"/>
-              </a:rPr>
-              <a:t>DIGITAL INFRASTRUCTURE  ·  Digital Infrastructure Content Area 2</a:t>
-            </a:r>
-          </a:p>
-        </p:txBody>
-      </p:sp>
-      <p:sp>
-        <p:nvSpPr>
-          <p:cNvPr id="3" name="TextBox 2"/>
-          <p:cNvSpPr txBox="1"/>
-          <p:nvPr/>
-        </p:nvSpPr>
-        <p:spPr>
-          <a:xfrm>
-            <a:off x="548640" y="566928"/>
-            <a:ext cx="11094415" cy="822960"/>
-          </a:xfrm>
-          <a:prstGeom prst="rect">
-            <a:avLst/>
-          </a:prstGeom>
-          <a:noFill/>
-        </p:spPr>
-        <p:txBody>
-          <a:bodyPr wrap="square" anchor="ctr" lIns="0" rIns="0" tIns="0" bIns="0"/>
-          <a:lstStyle/>
-          <a:p>
-            <a:pPr algn="l"/>
-            <a:r>
-              <a:rPr sz="3200" b="1" i="0">
-                <a:solidFill>
-                  <a:srgbClr val="03306E"/>
-                </a:solidFill>
-                <a:latin typeface="Cambria"/>
-              </a:rPr>
-              <a:t>Remote access methods</a:t>
-            </a:r>
-          </a:p>
-        </p:txBody>
-      </p:sp>
-      <p:sp>
-        <p:nvSpPr>
-          <p:cNvPr id="4" name="TextBox 3"/>
-          <p:cNvSpPr txBox="1"/>
-          <p:nvPr/>
-        </p:nvSpPr>
-        <p:spPr>
-          <a:xfrm>
-            <a:off x="548640" y="6446520"/>
-            <a:ext cx="8229600" cy="274320"/>
-          </a:xfrm>
-          <a:prstGeom prst="rect">
-            <a:avLst/>
-          </a:prstGeom>
-          <a:noFill/>
-        </p:spPr>
-        <p:txBody>
-          <a:bodyPr wrap="square" anchor="t" lIns="0" rIns="0" tIns="0" bIns="0"/>
-          <a:lstStyle/>
-          <a:p>
-            <a:pPr algn="l"/>
-            <a:r>
-              <a:rPr sz="1000" b="0" i="0">
-                <a:solidFill>
-                  <a:srgbClr val="54595D"/>
-                </a:solidFill>
-                <a:latin typeface="Calibri"/>
-              </a:rPr>
-              <a:t>Digital Support and Security T Level  ·  Network Services, Remote Access and Installation</a:t>
-            </a:r>
-          </a:p>
-        </p:txBody>
-      </p:sp>
-      <p:sp>
-        <p:nvSpPr>
-          <p:cNvPr id="5" name="TextBox 4"/>
-          <p:cNvSpPr txBox="1"/>
-          <p:nvPr/>
-        </p:nvSpPr>
-        <p:spPr>
-          <a:xfrm>
-            <a:off x="10728655" y="6446520"/>
-            <a:ext cx="914400" cy="274320"/>
-          </a:xfrm>
-          <a:prstGeom prst="rect">
-            <a:avLst/>
-          </a:prstGeom>
-          <a:noFill/>
-        </p:spPr>
-        <p:txBody>
-          <a:bodyPr wrap="square" anchor="t" lIns="0" rIns="0" tIns="0" bIns="0"/>
-          <a:lstStyle/>
-          <a:p>
-            <a:pPr algn="r"/>
-            <a:r>
-              <a:rPr sz="1000" b="0" i="0">
-                <a:solidFill>
-                  <a:srgbClr val="54595D"/>
-                </a:solidFill>
-                <a:latin typeface="Calibri"/>
-              </a:rPr>
-              <a:t>4</a:t>
-            </a:r>
-          </a:p>
-        </p:txBody>
-      </p:sp>
-      <p:sp>
-        <p:nvSpPr>
-          <p:cNvPr id="6" name="Rounded Rectangle 5"/>
-          <p:cNvSpPr/>
-          <p:nvPr/>
-        </p:nvSpPr>
-        <p:spPr>
-          <a:xfrm>
-            <a:off x="548640" y="1600200"/>
-            <a:ext cx="5410047" cy="2148840"/>
-          </a:xfrm>
-          <a:prstGeom prst="roundRect">
-            <a:avLst>
-              <a:gd name="adj" fmla="val 6000"/>
-            </a:avLst>
-          </a:prstGeom>
-          <a:solidFill>
-            <a:srgbClr val="EAF3FF"/>
-          </a:solidFill>
-          <a:ln>
-            <a:noFill/>
-          </a:ln>
-          <a:effectLst/>
-        </p:spPr>
-        <p:style>
-          <a:lnRef idx="1">
-            <a:schemeClr val="accent1"/>
-          </a:lnRef>
-          <a:fillRef idx="3">
-            <a:schemeClr val="accent1"/>
-          </a:fillRef>
-          <a:effectRef idx="2">
-            <a:schemeClr val="accent1"/>
-          </a:effectRef>
-          <a:fontRef idx="minor">
-            <a:schemeClr val="lt1"/>
-          </a:fontRef>
-        </p:style>
-        <p:txBody>
-          <a:bodyPr rtlCol="0" anchor="ctr"/>
-          <a:lstStyle/>
-          <a:p/>
-        </p:txBody>
-      </p:sp>
-      <p:sp>
-        <p:nvSpPr>
-          <p:cNvPr id="7" name="Oval 6"/>
-          <p:cNvSpPr/>
-          <p:nvPr/>
-        </p:nvSpPr>
-        <p:spPr>
-          <a:xfrm>
-            <a:off x="777240" y="1828800"/>
-            <a:ext cx="457200" cy="457200"/>
-          </a:xfrm>
-          <a:prstGeom prst="ellipse">
-            <a:avLst/>
-          </a:prstGeom>
-          <a:solidFill>
-            <a:srgbClr val="33C17A"/>
-          </a:solidFill>
-          <a:ln>
-            <a:noFill/>
-          </a:ln>
-          <a:effectLst/>
-        </p:spPr>
-        <p:style>
-          <a:lnRef idx="1">
-            <a:schemeClr val="accent1"/>
-          </a:lnRef>
-          <a:fillRef idx="3">
-            <a:schemeClr val="accent1"/>
-          </a:fillRef>
-          <a:effectRef idx="2">
-            <a:schemeClr val="accent1"/>
-          </a:effectRef>
-          <a:fontRef idx="minor">
-            <a:schemeClr val="lt1"/>
-          </a:fontRef>
-        </p:style>
-        <p:txBody>
-          <a:bodyPr rtlCol="0" anchor="ctr" lIns="0" rIns="0" tIns="0" bIns="0"/>
-          <a:lstStyle/>
-          <a:p>
-            <a:pPr algn="ctr"/>
-            <a:r>
-              <a:rPr sz="1500" b="1">
-                <a:solidFill>
-                  <a:srgbClr val="202122"/>
-                </a:solidFill>
-                <a:latin typeface="Calibri"/>
-              </a:rPr>
-              <a:t>1</a:t>
-            </a:r>
-          </a:p>
-        </p:txBody>
-      </p:sp>
-      <p:sp>
-        <p:nvSpPr>
-          <p:cNvPr id="8" name="TextBox 7"/>
-          <p:cNvSpPr txBox="1"/>
-          <p:nvPr/>
-        </p:nvSpPr>
-        <p:spPr>
-          <a:xfrm>
-            <a:off x="1371600" y="1801368"/>
-            <a:ext cx="4404207" cy="512064"/>
-          </a:xfrm>
-          <a:prstGeom prst="rect">
-            <a:avLst/>
-          </a:prstGeom>
-          <a:noFill/>
-        </p:spPr>
-        <p:txBody>
-          <a:bodyPr wrap="square" anchor="ctr" lIns="0" rIns="0" tIns="0" bIns="0"/>
-          <a:lstStyle/>
-          <a:p>
-            <a:pPr algn="l"/>
-            <a:r>
-              <a:rPr sz="1900" b="1" i="0">
-                <a:solidFill>
-                  <a:srgbClr val="03306E"/>
-                </a:solidFill>
-                <a:latin typeface="Calibri"/>
-              </a:rPr>
-              <a:t>VPN</a:t>
-            </a:r>
-          </a:p>
-        </p:txBody>
-      </p:sp>
-      <p:sp>
-        <p:nvSpPr>
-          <p:cNvPr id="9" name="TextBox 8"/>
-          <p:cNvSpPr txBox="1"/>
-          <p:nvPr/>
-        </p:nvSpPr>
-        <p:spPr>
-          <a:xfrm>
-            <a:off x="777240" y="2468880"/>
-            <a:ext cx="4952847" cy="1143000"/>
-          </a:xfrm>
-          <a:prstGeom prst="rect">
-            <a:avLst/>
-          </a:prstGeom>
-          <a:noFill/>
-        </p:spPr>
-        <p:txBody>
-          <a:bodyPr wrap="square" anchor="t" lIns="0" rIns="0" tIns="0" bIns="0"/>
-          <a:lstStyle/>
-          <a:p>
-            <a:pPr algn="l"/>
-            <a:r>
-              <a:rPr sz="2000" b="0" i="0">
-                <a:solidFill>
-                  <a:srgbClr val="202122"/>
-                </a:solidFill>
-                <a:latin typeface="Calibri"/>
-              </a:rPr>
-              <a:t>A private, encrypted tunnel to the network.</a:t>
-            </a:r>
-          </a:p>
-        </p:txBody>
-      </p:sp>
-      <p:sp>
-        <p:nvSpPr>
-          <p:cNvPr id="10" name="Rounded Rectangle 9"/>
-          <p:cNvSpPr/>
-          <p:nvPr/>
-        </p:nvSpPr>
-        <p:spPr>
-          <a:xfrm>
-            <a:off x="6233007" y="1600200"/>
-            <a:ext cx="5410047" cy="2148840"/>
-          </a:xfrm>
-          <a:prstGeom prst="roundRect">
-            <a:avLst>
-              <a:gd name="adj" fmla="val 6000"/>
-            </a:avLst>
-          </a:prstGeom>
-          <a:solidFill>
-            <a:srgbClr val="EAF3FF"/>
-          </a:solidFill>
-          <a:ln>
-            <a:noFill/>
-          </a:ln>
-          <a:effectLst/>
-        </p:spPr>
-        <p:style>
-          <a:lnRef idx="1">
-            <a:schemeClr val="accent1"/>
-          </a:lnRef>
-          <a:fillRef idx="3">
-            <a:schemeClr val="accent1"/>
-          </a:fillRef>
-          <a:effectRef idx="2">
-            <a:schemeClr val="accent1"/>
-          </a:effectRef>
-          <a:fontRef idx="minor">
-            <a:schemeClr val="lt1"/>
-          </a:fontRef>
-        </p:style>
-        <p:txBody>
-          <a:bodyPr rtlCol="0" anchor="ctr"/>
-          <a:lstStyle/>
-          <a:p/>
-        </p:txBody>
-      </p:sp>
-      <p:sp>
-        <p:nvSpPr>
-          <p:cNvPr id="11" name="Oval 10"/>
-          <p:cNvSpPr/>
-          <p:nvPr/>
-        </p:nvSpPr>
-        <p:spPr>
-          <a:xfrm>
-            <a:off x="6461607" y="1828800"/>
-            <a:ext cx="457200" cy="457200"/>
-          </a:xfrm>
-          <a:prstGeom prst="ellipse">
-            <a:avLst/>
-          </a:prstGeom>
-          <a:solidFill>
-            <a:srgbClr val="33C17A"/>
-          </a:solidFill>
-          <a:ln>
-            <a:noFill/>
-          </a:ln>
-          <a:effectLst/>
-        </p:spPr>
-        <p:style>
-          <a:lnRef idx="1">
-            <a:schemeClr val="accent1"/>
-          </a:lnRef>
-          <a:fillRef idx="3">
-            <a:schemeClr val="accent1"/>
-          </a:fillRef>
-          <a:effectRef idx="2">
-            <a:schemeClr val="accent1"/>
-          </a:effectRef>
-          <a:fontRef idx="minor">
-            <a:schemeClr val="lt1"/>
-          </a:fontRef>
-        </p:style>
-        <p:txBody>
-          <a:bodyPr rtlCol="0" anchor="ctr" lIns="0" rIns="0" tIns="0" bIns="0"/>
-          <a:lstStyle/>
-          <a:p>
-            <a:pPr algn="ctr"/>
-            <a:r>
-              <a:rPr sz="1500" b="1">
-                <a:solidFill>
-                  <a:srgbClr val="202122"/>
-                </a:solidFill>
-                <a:latin typeface="Calibri"/>
-              </a:rPr>
-              <a:t>2</a:t>
-            </a:r>
-          </a:p>
-        </p:txBody>
-      </p:sp>
-      <p:sp>
-        <p:nvSpPr>
-          <p:cNvPr id="12" name="TextBox 11"/>
-          <p:cNvSpPr txBox="1"/>
-          <p:nvPr/>
-        </p:nvSpPr>
-        <p:spPr>
-          <a:xfrm>
-            <a:off x="7055967" y="1801368"/>
-            <a:ext cx="4404207" cy="512064"/>
-          </a:xfrm>
-          <a:prstGeom prst="rect">
-            <a:avLst/>
-          </a:prstGeom>
-          <a:noFill/>
-        </p:spPr>
-        <p:txBody>
-          <a:bodyPr wrap="square" anchor="ctr" lIns="0" rIns="0" tIns="0" bIns="0"/>
-          <a:lstStyle/>
-          <a:p>
-            <a:pPr algn="l"/>
-            <a:r>
-              <a:rPr sz="1900" b="1" i="0">
-                <a:solidFill>
-                  <a:srgbClr val="03306E"/>
-                </a:solidFill>
-                <a:latin typeface="Calibri"/>
-              </a:rPr>
-              <a:t>RDP</a:t>
-            </a:r>
-          </a:p>
-        </p:txBody>
-      </p:sp>
-      <p:sp>
-        <p:nvSpPr>
-          <p:cNvPr id="13" name="TextBox 12"/>
-          <p:cNvSpPr txBox="1"/>
-          <p:nvPr/>
-        </p:nvSpPr>
-        <p:spPr>
-          <a:xfrm>
-            <a:off x="6461607" y="2468880"/>
-            <a:ext cx="4952847" cy="1143000"/>
-          </a:xfrm>
-          <a:prstGeom prst="rect">
-            <a:avLst/>
-          </a:prstGeom>
-          <a:noFill/>
-        </p:spPr>
-        <p:txBody>
-          <a:bodyPr wrap="square" anchor="t" lIns="0" rIns="0" tIns="0" bIns="0"/>
-          <a:lstStyle/>
-          <a:p>
-            <a:pPr algn="l"/>
-            <a:r>
-              <a:rPr sz="2000" b="0" i="0">
-                <a:solidFill>
-                  <a:srgbClr val="202122"/>
-                </a:solidFill>
-                <a:latin typeface="Calibri"/>
-              </a:rPr>
-              <a:t>Remote desktop: processing stays on the host machine.</a:t>
-            </a:r>
-          </a:p>
-        </p:txBody>
-      </p:sp>
-      <p:sp>
-        <p:nvSpPr>
-          <p:cNvPr id="14" name="Rounded Rectangle 13"/>
-          <p:cNvSpPr/>
-          <p:nvPr/>
-        </p:nvSpPr>
-        <p:spPr>
-          <a:xfrm>
-            <a:off x="548640" y="4023360"/>
-            <a:ext cx="5410047" cy="2148840"/>
-          </a:xfrm>
-          <a:prstGeom prst="roundRect">
-            <a:avLst>
-              <a:gd name="adj" fmla="val 6000"/>
-            </a:avLst>
-          </a:prstGeom>
-          <a:solidFill>
-            <a:srgbClr val="EAF3FF"/>
-          </a:solidFill>
-          <a:ln>
-            <a:noFill/>
-          </a:ln>
-          <a:effectLst/>
-        </p:spPr>
-        <p:style>
-          <a:lnRef idx="1">
-            <a:schemeClr val="accent1"/>
-          </a:lnRef>
-          <a:fillRef idx="3">
-            <a:schemeClr val="accent1"/>
-          </a:fillRef>
-          <a:effectRef idx="2">
-            <a:schemeClr val="accent1"/>
-          </a:effectRef>
-          <a:fontRef idx="minor">
-            <a:schemeClr val="lt1"/>
-          </a:fontRef>
-        </p:style>
-        <p:txBody>
-          <a:bodyPr rtlCol="0" anchor="ctr"/>
-          <a:lstStyle/>
-          <a:p/>
-        </p:txBody>
-      </p:sp>
-      <p:sp>
-        <p:nvSpPr>
-          <p:cNvPr id="15" name="Oval 14"/>
-          <p:cNvSpPr/>
-          <p:nvPr/>
-        </p:nvSpPr>
-        <p:spPr>
-          <a:xfrm>
-            <a:off x="777240" y="4251960"/>
-            <a:ext cx="457200" cy="457200"/>
-          </a:xfrm>
-          <a:prstGeom prst="ellipse">
-            <a:avLst/>
-          </a:prstGeom>
-          <a:solidFill>
-            <a:srgbClr val="33C17A"/>
-          </a:solidFill>
-          <a:ln>
-            <a:noFill/>
-          </a:ln>
-          <a:effectLst/>
-        </p:spPr>
-        <p:style>
-          <a:lnRef idx="1">
-            <a:schemeClr val="accent1"/>
-          </a:lnRef>
-          <a:fillRef idx="3">
-            <a:schemeClr val="accent1"/>
-          </a:fillRef>
-          <a:effectRef idx="2">
-            <a:schemeClr val="accent1"/>
-          </a:effectRef>
-          <a:fontRef idx="minor">
-            <a:schemeClr val="lt1"/>
-          </a:fontRef>
-        </p:style>
-        <p:txBody>
-          <a:bodyPr rtlCol="0" anchor="ctr" lIns="0" rIns="0" tIns="0" bIns="0"/>
-          <a:lstStyle/>
-          <a:p>
-            <a:pPr algn="ctr"/>
-            <a:r>
-              <a:rPr sz="1500" b="1">
-                <a:solidFill>
-                  <a:srgbClr val="202122"/>
-                </a:solidFill>
-                <a:latin typeface="Calibri"/>
-              </a:rPr>
-              <a:t>3</a:t>
-            </a:r>
-          </a:p>
-        </p:txBody>
-      </p:sp>
-      <p:sp>
-        <p:nvSpPr>
-          <p:cNvPr id="16" name="TextBox 15"/>
-          <p:cNvSpPr txBox="1"/>
-          <p:nvPr/>
-        </p:nvSpPr>
-        <p:spPr>
-          <a:xfrm>
-            <a:off x="1371600" y="4224528"/>
-            <a:ext cx="4404207" cy="512064"/>
-          </a:xfrm>
-          <a:prstGeom prst="rect">
-            <a:avLst/>
-          </a:prstGeom>
-          <a:noFill/>
-        </p:spPr>
-        <p:txBody>
-          <a:bodyPr wrap="square" anchor="ctr" lIns="0" rIns="0" tIns="0" bIns="0"/>
-          <a:lstStyle/>
-          <a:p>
-            <a:pPr algn="l"/>
-            <a:r>
-              <a:rPr sz="1900" b="1" i="0">
-                <a:solidFill>
-                  <a:srgbClr val="03306E"/>
-                </a:solidFill>
-                <a:latin typeface="Calibri"/>
-              </a:rPr>
-              <a:t>LOM</a:t>
-            </a:r>
-          </a:p>
-        </p:txBody>
-      </p:sp>
-      <p:sp>
-        <p:nvSpPr>
-          <p:cNvPr id="17" name="TextBox 16"/>
-          <p:cNvSpPr txBox="1"/>
-          <p:nvPr/>
-        </p:nvSpPr>
-        <p:spPr>
-          <a:xfrm>
-            <a:off x="777240" y="4892040"/>
-            <a:ext cx="4952847" cy="1143000"/>
-          </a:xfrm>
-          <a:prstGeom prst="rect">
-            <a:avLst/>
-          </a:prstGeom>
-          <a:noFill/>
-        </p:spPr>
-        <p:txBody>
-          <a:bodyPr wrap="square" anchor="t" lIns="0" rIns="0" tIns="0" bIns="0"/>
-          <a:lstStyle/>
-          <a:p>
-            <a:pPr algn="l"/>
-            <a:r>
-              <a:rPr sz="2000" b="0" i="0">
-                <a:solidFill>
-                  <a:srgbClr val="202122"/>
-                </a:solidFill>
-                <a:latin typeface="Calibri"/>
-              </a:rPr>
-              <a:t>Lights-out management: administer a server even when it is off.</a:t>
-            </a:r>
-          </a:p>
-        </p:txBody>
-      </p:sp>
-      <p:sp>
-        <p:nvSpPr>
-          <p:cNvPr id="18" name="Rounded Rectangle 17"/>
-          <p:cNvSpPr/>
-          <p:nvPr/>
-        </p:nvSpPr>
-        <p:spPr>
-          <a:xfrm>
-            <a:off x="6233007" y="4023360"/>
-            <a:ext cx="5410047" cy="2148840"/>
-          </a:xfrm>
-          <a:prstGeom prst="roundRect">
-            <a:avLst>
-              <a:gd name="adj" fmla="val 6000"/>
-            </a:avLst>
-          </a:prstGeom>
-          <a:solidFill>
-            <a:srgbClr val="EAF3FF"/>
-          </a:solidFill>
-          <a:ln>
-            <a:noFill/>
-          </a:ln>
-          <a:effectLst/>
-        </p:spPr>
-        <p:style>
-          <a:lnRef idx="1">
-            <a:schemeClr val="accent1"/>
-          </a:lnRef>
-          <a:fillRef idx="3">
-            <a:schemeClr val="accent1"/>
-          </a:fillRef>
-          <a:effectRef idx="2">
-            <a:schemeClr val="accent1"/>
-          </a:effectRef>
-          <a:fontRef idx="minor">
-            <a:schemeClr val="lt1"/>
-          </a:fontRef>
-        </p:style>
-        <p:txBody>
-          <a:bodyPr rtlCol="0" anchor="ctr"/>
-          <a:lstStyle/>
-          <a:p/>
-        </p:txBody>
-      </p:sp>
-      <p:sp>
-        <p:nvSpPr>
-          <p:cNvPr id="19" name="Oval 18"/>
-          <p:cNvSpPr/>
-          <p:nvPr/>
-        </p:nvSpPr>
-        <p:spPr>
-          <a:xfrm>
-            <a:off x="6461607" y="4251960"/>
-            <a:ext cx="457200" cy="457200"/>
-          </a:xfrm>
-          <a:prstGeom prst="ellipse">
-            <a:avLst/>
-          </a:prstGeom>
-          <a:solidFill>
-            <a:srgbClr val="33C17A"/>
-          </a:solidFill>
-          <a:ln>
-            <a:noFill/>
-          </a:ln>
-          <a:effectLst/>
-        </p:spPr>
-        <p:style>
-          <a:lnRef idx="1">
-            <a:schemeClr val="accent1"/>
-          </a:lnRef>
-          <a:fillRef idx="3">
-            <a:schemeClr val="accent1"/>
-          </a:fillRef>
-          <a:effectRef idx="2">
-            <a:schemeClr val="accent1"/>
-          </a:effectRef>
-          <a:fontRef idx="minor">
-            <a:schemeClr val="lt1"/>
-          </a:fontRef>
-        </p:style>
-        <p:txBody>
-          <a:bodyPr rtlCol="0" anchor="ctr" lIns="0" rIns="0" tIns="0" bIns="0"/>
-          <a:lstStyle/>
-          <a:p>
-            <a:pPr algn="ctr"/>
-            <a:r>
-              <a:rPr sz="1500" b="1">
-                <a:solidFill>
-                  <a:srgbClr val="202122"/>
-                </a:solidFill>
-                <a:latin typeface="Calibri"/>
-              </a:rPr>
-              <a:t>4</a:t>
-            </a:r>
-          </a:p>
-        </p:txBody>
-      </p:sp>
-      <p:sp>
-        <p:nvSpPr>
-          <p:cNvPr id="20" name="TextBox 19"/>
-          <p:cNvSpPr txBox="1"/>
-          <p:nvPr/>
-        </p:nvSpPr>
-        <p:spPr>
-          <a:xfrm>
-            <a:off x="7055967" y="4224528"/>
-            <a:ext cx="4404207" cy="512064"/>
-          </a:xfrm>
-          <a:prstGeom prst="rect">
-            <a:avLst/>
-          </a:prstGeom>
-          <a:noFill/>
-        </p:spPr>
-        <p:txBody>
-          <a:bodyPr wrap="square" anchor="ctr" lIns="0" rIns="0" tIns="0" bIns="0"/>
-          <a:lstStyle/>
-          <a:p>
-            <a:pPr algn="l"/>
-            <a:r>
-              <a:rPr sz="1900" b="1" i="0">
-                <a:solidFill>
-                  <a:srgbClr val="03306E"/>
-                </a:solidFill>
-                <a:latin typeface="Calibri"/>
-              </a:rPr>
-              <a:t>SSH</a:t>
-            </a:r>
-          </a:p>
-        </p:txBody>
-      </p:sp>
-      <p:sp>
-        <p:nvSpPr>
-          <p:cNvPr id="21" name="TextBox 20"/>
-          <p:cNvSpPr txBox="1"/>
-          <p:nvPr/>
-        </p:nvSpPr>
-        <p:spPr>
-          <a:xfrm>
-            <a:off x="6461607" y="4892040"/>
-            <a:ext cx="4952847" cy="1143000"/>
-          </a:xfrm>
-          <a:prstGeom prst="rect">
-            <a:avLst/>
-          </a:prstGeom>
-          <a:noFill/>
-        </p:spPr>
-        <p:txBody>
-          <a:bodyPr wrap="square" anchor="t" lIns="0" rIns="0" tIns="0" bIns="0"/>
-          <a:lstStyle/>
-          <a:p>
-            <a:pPr algn="l"/>
-            <a:r>
-              <a:rPr sz="2000" b="0" i="0">
-                <a:solidFill>
-                  <a:srgbClr val="202122"/>
-                </a:solidFill>
-                <a:latin typeface="Calibri"/>
-              </a:rPr>
-              <a:t>A secure encrypted connection between two hosts, usually command line.</a:t>
-            </a:r>
-          </a:p>
-        </p:txBody>
-      </p:sp>
-    </p:spTree>
-  </p:cSld>
-  <p:clrMapOvr>
-    <a:masterClrMapping/>
-  </p:clrMapOvr>
-</p:sld>
-</file>
-
 <file path=ppt/slides/slide5.xml><?xml version="1.0" encoding="utf-8"?>
 <p:sld xmlns:a="http://schemas.openxmlformats.org/drawingml/2006/main" xmlns:p="http://schemas.openxmlformats.org/presentationml/2006/main" xmlns:r="http://schemas.openxmlformats.org/officeDocument/2006/relationships">
   <p:cSld>
@@ -6526,7 +10318,7 @@
                 </a:solidFill>
                 <a:latin typeface="Cambria"/>
               </a:rPr>
-              <a:t>Setting up a simple VPN</a:t>
+              <a:t>Quick check: Client-server network services</a:t>
             </a:r>
           </a:p>
         </p:txBody>
@@ -6599,22 +10391,20 @@
       </p:sp>
       <p:sp>
         <p:nvSpPr>
-          <p:cNvPr id="6" name="Rounded Rectangle 5"/>
+          <p:cNvPr id="6" name="Oval 5"/>
           <p:cNvSpPr/>
           <p:nvPr/>
         </p:nvSpPr>
         <p:spPr>
           <a:xfrm>
-            <a:off x="548640" y="1600200"/>
-            <a:ext cx="5364327" cy="640080"/>
-          </a:xfrm>
-          <a:prstGeom prst="roundRect">
-            <a:avLst>
-              <a:gd name="adj" fmla="val 15000"/>
-            </a:avLst>
+            <a:off x="548640" y="1691640"/>
+            <a:ext cx="502920" cy="502920"/>
+          </a:xfrm>
+          <a:prstGeom prst="ellipse">
+            <a:avLst/>
           </a:prstGeom>
           <a:solidFill>
-            <a:srgbClr val="03306E"/>
+            <a:srgbClr val="33C17A"/>
           </a:solidFill>
           <a:ln>
             <a:noFill/>
@@ -6636,9 +10426,20 @@
           </a:fontRef>
         </p:style>
         <p:txBody>
-          <a:bodyPr rtlCol="0" anchor="ctr"/>
-          <a:lstStyle/>
-          <a:p/>
+          <a:bodyPr rtlCol="0" anchor="ctr" lIns="0" rIns="0" tIns="0" bIns="0"/>
+          <a:lstStyle/>
+          <a:p>
+            <a:pPr algn="ctr"/>
+            <a:r>
+              <a:rPr sz="1600" b="1">
+                <a:solidFill>
+                  <a:srgbClr val="202122"/>
+                </a:solidFill>
+                <a:latin typeface="Calibri"/>
+              </a:rPr>
+              <a:t>1</a:t>
+            </a:r>
+          </a:p>
         </p:txBody>
       </p:sp>
       <p:sp>
@@ -6649,49 +10450,47 @@
         </p:nvSpPr>
         <p:spPr>
           <a:xfrm>
-            <a:off x="777240" y="1600200"/>
-            <a:ext cx="4907127" cy="640080"/>
-          </a:xfrm>
-          <a:prstGeom prst="rect">
-            <a:avLst/>
-          </a:prstGeom>
-          <a:noFill/>
-        </p:spPr>
-        <p:txBody>
-          <a:bodyPr wrap="square" anchor="ctr" lIns="0" rIns="0" tIns="0" bIns="0"/>
+            <a:off x="1371600" y="1645920"/>
+            <a:ext cx="10271455" cy="1188720"/>
+          </a:xfrm>
+          <a:prstGeom prst="rect">
+            <a:avLst/>
+          </a:prstGeom>
+          <a:noFill/>
+        </p:spPr>
+        <p:txBody>
+          <a:bodyPr wrap="square" anchor="t" lIns="0" rIns="0" tIns="0" bIns="0"/>
           <a:lstStyle/>
           <a:p>
             <a:pPr algn="l"/>
             <a:r>
-              <a:rPr sz="2000" b="1" i="0">
-                <a:solidFill>
-                  <a:srgbClr val="FFFFFF"/>
-                </a:solidFill>
-                <a:latin typeface="Calibri"/>
-              </a:rPr>
-              <a:t>Server side</a:t>
-            </a:r>
-          </a:p>
-        </p:txBody>
-      </p:sp>
-      <p:sp>
-        <p:nvSpPr>
-          <p:cNvPr id="8" name="Rounded Rectangle 7"/>
+              <a:rPr sz="2400" b="0" i="0">
+                <a:solidFill>
+                  <a:srgbClr val="202122"/>
+                </a:solidFill>
+                <a:latin typeface="Calibri"/>
+              </a:rPr>
+              <a:t>What is an OU?</a:t>
+            </a:r>
+          </a:p>
+        </p:txBody>
+      </p:sp>
+      <p:sp>
+        <p:nvSpPr>
+          <p:cNvPr id="8" name="Oval 7"/>
           <p:cNvSpPr/>
           <p:nvPr/>
         </p:nvSpPr>
         <p:spPr>
           <a:xfrm>
-            <a:off x="548640" y="2377440"/>
-            <a:ext cx="5364327" cy="3794760"/>
-          </a:xfrm>
-          <a:prstGeom prst="roundRect">
-            <a:avLst>
-              <a:gd name="adj" fmla="val 4000"/>
-            </a:avLst>
+            <a:off x="548640" y="3108960"/>
+            <a:ext cx="502920" cy="502920"/>
+          </a:xfrm>
+          <a:prstGeom prst="ellipse">
+            <a:avLst/>
           </a:prstGeom>
           <a:solidFill>
-            <a:srgbClr val="EAF3FF"/>
+            <a:srgbClr val="33C17A"/>
           </a:solidFill>
           <a:ln>
             <a:noFill/>
@@ -6713,9 +10512,20 @@
           </a:fontRef>
         </p:style>
         <p:txBody>
-          <a:bodyPr rtlCol="0" anchor="ctr"/>
-          <a:lstStyle/>
-          <a:p/>
+          <a:bodyPr rtlCol="0" anchor="ctr" lIns="0" rIns="0" tIns="0" bIns="0"/>
+          <a:lstStyle/>
+          <a:p>
+            <a:pPr algn="ctr"/>
+            <a:r>
+              <a:rPr sz="1600" b="1">
+                <a:solidFill>
+                  <a:srgbClr val="202122"/>
+                </a:solidFill>
+                <a:latin typeface="Calibri"/>
+              </a:rPr>
+              <a:t>2</a:t>
+            </a:r>
+          </a:p>
         </p:txBody>
       </p:sp>
       <p:sp>
@@ -6726,123 +10536,47 @@
         </p:nvSpPr>
         <p:spPr>
           <a:xfrm>
-            <a:off x="822959" y="2606040"/>
-            <a:ext cx="4815687" cy="3337560"/>
-          </a:xfrm>
-          <a:prstGeom prst="rect">
-            <a:avLst/>
-          </a:prstGeom>
-          <a:noFill/>
-        </p:spPr>
-        <p:txBody>
-          <a:bodyPr wrap="square" lIns="0" rIns="0" tIns="0" bIns="0">
-            <a:spAutoFit/>
-          </a:bodyPr>
-          <a:lstStyle/>
-          <a:p>
-            <a:pPr marL="274320" indent="-274320">
-              <a:spcAft>
-                <a:spcPts val="990"/>
-              </a:spcAft>
-              <a:buClr>
-                <a:srgbClr val="0645AD"/>
-              </a:buClr>
-              <a:buFont typeface="Arial"/>
-              <a:buChar char="•"/>
-            </a:pPr>
-            <a:r>
-              <a:rPr sz="2200" b="0">
+            <a:off x="1371600" y="3063240"/>
+            <a:ext cx="10271455" cy="1188720"/>
+          </a:xfrm>
+          <a:prstGeom prst="rect">
+            <a:avLst/>
+          </a:prstGeom>
+          <a:noFill/>
+        </p:spPr>
+        <p:txBody>
+          <a:bodyPr wrap="square" anchor="t" lIns="0" rIns="0" tIns="0" bIns="0"/>
+          <a:lstStyle/>
+          <a:p>
+            <a:pPr algn="l"/>
+            <a:r>
+              <a:rPr sz="2400" b="0" i="0">
                 <a:solidFill>
                   <a:srgbClr val="202122"/>
                 </a:solidFill>
                 <a:latin typeface="Calibri"/>
               </a:rPr>
-              <a:t>Enable the VPN service</a:t>
-            </a:r>
-          </a:p>
-          <a:p>
-            <a:pPr marL="274320" indent="-274320">
-              <a:spcAft>
-                <a:spcPts val="990"/>
-              </a:spcAft>
-              <a:buClr>
-                <a:srgbClr val="0645AD"/>
-              </a:buClr>
-              <a:buFont typeface="Arial"/>
-              <a:buChar char="•"/>
-            </a:pPr>
-            <a:r>
-              <a:rPr sz="2200" b="0">
-                <a:solidFill>
-                  <a:srgbClr val="202122"/>
-                </a:solidFill>
-                <a:latin typeface="Calibri"/>
-              </a:rPr>
-              <a:t>Set IP addressing and DNS</a:t>
-            </a:r>
-          </a:p>
-          <a:p>
-            <a:pPr marL="274320" indent="-274320">
-              <a:spcAft>
-                <a:spcPts val="990"/>
-              </a:spcAft>
-              <a:buClr>
-                <a:srgbClr val="0645AD"/>
-              </a:buClr>
-              <a:buFont typeface="Arial"/>
-              <a:buChar char="•"/>
-            </a:pPr>
-            <a:r>
-              <a:rPr sz="2200" b="0">
-                <a:solidFill>
-                  <a:srgbClr val="202122"/>
-                </a:solidFill>
-                <a:latin typeface="Calibri"/>
-              </a:rPr>
-              <a:t>Manage authentication</a:t>
-            </a:r>
-          </a:p>
-          <a:p>
-            <a:pPr marL="274320" indent="-274320">
-              <a:spcAft>
-                <a:spcPts val="990"/>
-              </a:spcAft>
-              <a:buClr>
-                <a:srgbClr val="0645AD"/>
-              </a:buClr>
-              <a:buFont typeface="Arial"/>
-              <a:buChar char="•"/>
-            </a:pPr>
-            <a:r>
-              <a:rPr sz="2200" b="0">
-                <a:solidFill>
-                  <a:srgbClr val="202122"/>
-                </a:solidFill>
-                <a:latin typeface="Calibri"/>
-              </a:rPr>
-              <a:t>Set user permissions</a:t>
-            </a:r>
-          </a:p>
-        </p:txBody>
-      </p:sp>
-      <p:sp>
-        <p:nvSpPr>
-          <p:cNvPr id="10" name="Rounded Rectangle 9"/>
+              <a:t>What does DHCP do?</a:t>
+            </a:r>
+          </a:p>
+        </p:txBody>
+      </p:sp>
+      <p:sp>
+        <p:nvSpPr>
+          <p:cNvPr id="10" name="Oval 9"/>
           <p:cNvSpPr/>
           <p:nvPr/>
         </p:nvSpPr>
         <p:spPr>
           <a:xfrm>
-            <a:off x="6278727" y="1600200"/>
-            <a:ext cx="5364327" cy="640080"/>
-          </a:xfrm>
-          <a:prstGeom prst="roundRect">
-            <a:avLst>
-              <a:gd name="adj" fmla="val 15000"/>
-            </a:avLst>
+            <a:off x="548640" y="4526280"/>
+            <a:ext cx="502920" cy="502920"/>
+          </a:xfrm>
+          <a:prstGeom prst="ellipse">
+            <a:avLst/>
           </a:prstGeom>
           <a:solidFill>
-            <a:srgbClr val="0645AD"/>
+            <a:srgbClr val="33C17A"/>
           </a:solidFill>
           <a:ln>
             <a:noFill/>
@@ -6864,9 +10598,20 @@
           </a:fontRef>
         </p:style>
         <p:txBody>
-          <a:bodyPr rtlCol="0" anchor="ctr"/>
-          <a:lstStyle/>
-          <a:p/>
+          <a:bodyPr rtlCol="0" anchor="ctr" lIns="0" rIns="0" tIns="0" bIns="0"/>
+          <a:lstStyle/>
+          <a:p>
+            <a:pPr algn="ctr"/>
+            <a:r>
+              <a:rPr sz="1600" b="1">
+                <a:solidFill>
+                  <a:srgbClr val="202122"/>
+                </a:solidFill>
+                <a:latin typeface="Calibri"/>
+              </a:rPr>
+              <a:t>3</a:t>
+            </a:r>
+          </a:p>
         </p:txBody>
       </p:sp>
       <p:sp>
@@ -6877,178 +10622,60 @@
         </p:nvSpPr>
         <p:spPr>
           <a:xfrm>
-            <a:off x="6507327" y="1600200"/>
-            <a:ext cx="4907127" cy="640080"/>
-          </a:xfrm>
-          <a:prstGeom prst="rect">
-            <a:avLst/>
-          </a:prstGeom>
-          <a:noFill/>
-        </p:spPr>
-        <p:txBody>
-          <a:bodyPr wrap="square" anchor="ctr" lIns="0" rIns="0" tIns="0" bIns="0"/>
+            <a:off x="1371600" y="4480560"/>
+            <a:ext cx="10271455" cy="1188720"/>
+          </a:xfrm>
+          <a:prstGeom prst="rect">
+            <a:avLst/>
+          </a:prstGeom>
+          <a:noFill/>
+        </p:spPr>
+        <p:txBody>
+          <a:bodyPr wrap="square" anchor="t" lIns="0" rIns="0" tIns="0" bIns="0"/>
           <a:lstStyle/>
           <a:p>
             <a:pPr algn="l"/>
             <a:r>
-              <a:rPr sz="2000" b="1" i="0">
-                <a:solidFill>
-                  <a:srgbClr val="FFFFFF"/>
-                </a:solidFill>
-                <a:latin typeface="Calibri"/>
-              </a:rPr>
-              <a:t>Client side</a:t>
-            </a:r>
-          </a:p>
-        </p:txBody>
-      </p:sp>
-      <p:sp>
-        <p:nvSpPr>
-          <p:cNvPr id="12" name="Rounded Rectangle 11"/>
-          <p:cNvSpPr/>
-          <p:nvPr/>
-        </p:nvSpPr>
-        <p:spPr>
-          <a:xfrm>
-            <a:off x="6278727" y="2377440"/>
-            <a:ext cx="5364327" cy="3794760"/>
-          </a:xfrm>
-          <a:prstGeom prst="roundRect">
-            <a:avLst>
-              <a:gd name="adj" fmla="val 4000"/>
-            </a:avLst>
-          </a:prstGeom>
-          <a:solidFill>
-            <a:srgbClr val="EAF3FF"/>
-          </a:solidFill>
-          <a:ln>
-            <a:noFill/>
-          </a:ln>
-          <a:effectLst/>
-        </p:spPr>
-        <p:style>
-          <a:lnRef idx="1">
-            <a:schemeClr val="accent1"/>
-          </a:lnRef>
-          <a:fillRef idx="3">
-            <a:schemeClr val="accent1"/>
-          </a:fillRef>
-          <a:effectRef idx="2">
-            <a:schemeClr val="accent1"/>
-          </a:effectRef>
-          <a:fontRef idx="minor">
-            <a:schemeClr val="lt1"/>
-          </a:fontRef>
-        </p:style>
-        <p:txBody>
-          <a:bodyPr rtlCol="0" anchor="ctr"/>
-          <a:lstStyle/>
-          <a:p/>
-        </p:txBody>
-      </p:sp>
-      <p:sp>
-        <p:nvSpPr>
-          <p:cNvPr id="13" name="TextBox 12"/>
+              <a:rPr sz="2400" b="0" i="0">
+                <a:solidFill>
+                  <a:srgbClr val="202122"/>
+                </a:solidFill>
+                <a:latin typeface="Calibri"/>
+              </a:rPr>
+              <a:t>How is Group Policy applied?</a:t>
+            </a:r>
+          </a:p>
+        </p:txBody>
+      </p:sp>
+      <p:sp>
+        <p:nvSpPr>
+          <p:cNvPr id="12" name="TextBox 11"/>
           <p:cNvSpPr txBox="1"/>
           <p:nvPr/>
         </p:nvSpPr>
         <p:spPr>
           <a:xfrm>
-            <a:off x="6553047" y="2606040"/>
-            <a:ext cx="4815687" cy="3337560"/>
-          </a:xfrm>
-          <a:prstGeom prst="rect">
-            <a:avLst/>
-          </a:prstGeom>
-          <a:noFill/>
-        </p:spPr>
-        <p:txBody>
-          <a:bodyPr wrap="square" lIns="0" rIns="0" tIns="0" bIns="0">
-            <a:spAutoFit/>
-          </a:bodyPr>
-          <a:lstStyle/>
-          <a:p>
-            <a:pPr marL="274320" indent="-274320">
-              <a:spcAft>
-                <a:spcPts val="990"/>
-              </a:spcAft>
-              <a:buClr>
-                <a:srgbClr val="0645AD"/>
-              </a:buClr>
-              <a:buFont typeface="Arial"/>
-              <a:buChar char="•"/>
-            </a:pPr>
-            <a:r>
-              <a:rPr sz="2200" b="0">
-                <a:solidFill>
-                  <a:srgbClr val="202122"/>
-                </a:solidFill>
-                <a:latin typeface="Calibri"/>
-              </a:rPr>
-              <a:t>Create the connection</a:t>
-            </a:r>
-          </a:p>
-          <a:p>
-            <a:pPr marL="274320" indent="-274320">
-              <a:spcAft>
-                <a:spcPts val="990"/>
-              </a:spcAft>
-              <a:buClr>
-                <a:srgbClr val="0645AD"/>
-              </a:buClr>
-              <a:buFont typeface="Arial"/>
-              <a:buChar char="•"/>
-            </a:pPr>
-            <a:r>
-              <a:rPr sz="2200" b="0">
-                <a:solidFill>
-                  <a:srgbClr val="202122"/>
-                </a:solidFill>
-                <a:latin typeface="Calibri"/>
-              </a:rPr>
-              <a:t>Set the destination IP or FQDN</a:t>
-            </a:r>
-          </a:p>
-          <a:p>
-            <a:pPr marL="274320" indent="-274320">
-              <a:spcAft>
-                <a:spcPts val="990"/>
-              </a:spcAft>
-              <a:buClr>
-                <a:srgbClr val="0645AD"/>
-              </a:buClr>
-              <a:buFont typeface="Arial"/>
-              <a:buChar char="•"/>
-            </a:pPr>
-            <a:r>
-              <a:rPr sz="2200" b="0">
-                <a:solidFill>
-                  <a:srgbClr val="202122"/>
-                </a:solidFill>
-                <a:latin typeface="Calibri"/>
-              </a:rPr>
-              <a:t>Set permissions and conditions</a:t>
-            </a:r>
-          </a:p>
-          <a:p>
-            <a:pPr marL="274320" indent="-274320">
-              <a:spcAft>
-                <a:spcPts val="990"/>
-              </a:spcAft>
-              <a:buClr>
-                <a:srgbClr val="0645AD"/>
-              </a:buClr>
-              <a:buFont typeface="Arial"/>
-              <a:buChar char="•"/>
-            </a:pPr>
-            <a:r>
-              <a:rPr sz="2200" b="0">
-                <a:solidFill>
-                  <a:srgbClr val="202122"/>
-                </a:solidFill>
-                <a:latin typeface="Calibri"/>
-              </a:rPr>
-              <a:t>Test the connection</a:t>
+            <a:off x="548640" y="5852160"/>
+            <a:ext cx="11094415" cy="365760"/>
+          </a:xfrm>
+          <a:prstGeom prst="rect">
+            <a:avLst/>
+          </a:prstGeom>
+          <a:noFill/>
+        </p:spPr>
+        <p:txBody>
+          <a:bodyPr wrap="square" anchor="t" lIns="0" rIns="0" tIns="0" bIns="0"/>
+          <a:lstStyle/>
+          <a:p>
+            <a:pPr algn="l"/>
+            <a:r>
+              <a:rPr sz="1300" b="0" i="1">
+                <a:solidFill>
+                  <a:srgbClr val="54595D"/>
+                </a:solidFill>
+                <a:latin typeface="Calibri"/>
+              </a:rPr>
+              <a:t>Answer on mini whiteboards or in your book. Answers are in the speaker notes.</a:t>
             </a:r>
           </a:p>
         </p:txBody>
@@ -7140,7 +10767,7 @@
                 </a:solidFill>
                 <a:latin typeface="Cambria"/>
               </a:rPr>
-              <a:t>Install, configure, test, maintain</a:t>
+              <a:t>Remote access methods</a:t>
             </a:r>
           </a:p>
         </p:txBody>
@@ -7213,20 +10840,125 @@
       </p:sp>
       <p:sp>
         <p:nvSpPr>
-          <p:cNvPr id="6" name="Rectangle 5"/>
+          <p:cNvPr id="6" name="TextBox 5"/>
+          <p:cNvSpPr txBox="1"/>
+          <p:nvPr/>
+        </p:nvSpPr>
+        <p:spPr>
+          <a:xfrm>
+            <a:off x="548640" y="1554480"/>
+            <a:ext cx="6720840" cy="4617720"/>
+          </a:xfrm>
+          <a:prstGeom prst="rect">
+            <a:avLst/>
+          </a:prstGeom>
+          <a:noFill/>
+        </p:spPr>
+        <p:txBody>
+          <a:bodyPr wrap="square" lIns="0" rIns="0" tIns="0" bIns="0">
+            <a:spAutoFit/>
+          </a:bodyPr>
+          <a:lstStyle/>
+          <a:p>
+            <a:pPr>
+              <a:spcAft>
+                <a:spcPts val="1200"/>
+              </a:spcAft>
+            </a:pPr>
+            <a:r>
+              <a:rPr sz="2000" b="0">
+                <a:solidFill>
+                  <a:srgbClr val="202122"/>
+                </a:solidFill>
+                <a:latin typeface="Calibri"/>
+              </a:rPr>
+              <a:t>Remote access lets staff and technicians use systems from elsewhere.</a:t>
+            </a:r>
+          </a:p>
+          <a:p>
+            <a:pPr>
+              <a:spcAft>
+                <a:spcPts val="1200"/>
+              </a:spcAft>
+            </a:pPr>
+            <a:r>
+              <a:rPr sz="2000" b="0">
+                <a:solidFill>
+                  <a:srgbClr val="202122"/>
+                </a:solidFill>
+                <a:latin typeface="Calibri"/>
+              </a:rPr>
+              <a:t>A VPN creates an encrypted tunnel into the network, so remote users work as if they were in the office.</a:t>
+            </a:r>
+          </a:p>
+          <a:p>
+            <a:pPr>
+              <a:spcAft>
+                <a:spcPts val="1200"/>
+              </a:spcAft>
+            </a:pPr>
+            <a:r>
+              <a:rPr sz="2000" b="0">
+                <a:solidFill>
+                  <a:srgbClr val="202122"/>
+                </a:solidFill>
+                <a:latin typeface="Calibri"/>
+              </a:rPr>
+              <a:t>RDP (Remote Desktop Protocol) shows a remote computer's desktop; the processing stays on that computer.</a:t>
+            </a:r>
+          </a:p>
+          <a:p>
+            <a:pPr>
+              <a:spcAft>
+                <a:spcPts val="1200"/>
+              </a:spcAft>
+            </a:pPr>
+            <a:r>
+              <a:rPr sz="2000" b="0">
+                <a:solidFill>
+                  <a:srgbClr val="202122"/>
+                </a:solidFill>
+                <a:latin typeface="Calibri"/>
+              </a:rPr>
+              <a:t>Lights-out management (LOM) lets administrators control a server even when it's switched off or has crashed, through a separate management interface.</a:t>
+            </a:r>
+          </a:p>
+          <a:p>
+            <a:pPr>
+              <a:spcAft>
+                <a:spcPts val="1200"/>
+              </a:spcAft>
+            </a:pPr>
+            <a:r>
+              <a:rPr sz="2000" b="0">
+                <a:solidFill>
+                  <a:srgbClr val="202122"/>
+                </a:solidFill>
+                <a:latin typeface="Calibri"/>
+              </a:rPr>
+              <a:t>SSH gives a secure encrypted connection between two hosts, usually for command-line administration.</a:t>
+            </a:r>
+          </a:p>
+        </p:txBody>
+      </p:sp>
+      <p:sp>
+        <p:nvSpPr>
+          <p:cNvPr id="7" name="Rounded Rectangle 6"/>
           <p:cNvSpPr/>
           <p:nvPr/>
         </p:nvSpPr>
         <p:spPr>
           <a:xfrm>
-            <a:off x="1603217" y="2519172"/>
-            <a:ext cx="8985260" cy="36576"/>
-          </a:xfrm>
-          <a:prstGeom prst="rect">
-            <a:avLst/>
+            <a:off x="7772400" y="1554480"/>
+            <a:ext cx="3867912" cy="4526280"/>
+          </a:xfrm>
+          <a:prstGeom prst="roundRect">
+            <a:avLst>
+              <a:gd name="adj" fmla="val 8000"/>
+            </a:avLst>
           </a:prstGeom>
           <a:solidFill>
-            <a:srgbClr val="A9C8F0"/>
+            <a:srgbClr val="03306E"/>
           </a:solidFill>
           <a:ln>
             <a:noFill/>
@@ -7255,14 +10987,14 @@
       </p:sp>
       <p:sp>
         <p:nvSpPr>
-          <p:cNvPr id="7" name="Oval 6"/>
+          <p:cNvPr id="8" name="Oval 7"/>
           <p:cNvSpPr/>
           <p:nvPr/>
         </p:nvSpPr>
         <p:spPr>
           <a:xfrm>
-            <a:off x="1283177" y="2217420"/>
-            <a:ext cx="640080" cy="640080"/>
+            <a:off x="8046720" y="1828800"/>
+            <a:ext cx="548640" cy="548640"/>
           </a:xfrm>
           <a:prstGeom prst="ellipse">
             <a:avLst/>
@@ -7295,27 +11027,27 @@
           <a:p>
             <a:pPr algn="ctr"/>
             <a:r>
-              <a:rPr sz="2000" b="1">
+              <a:rPr sz="1300" b="1">
                 <a:solidFill>
                   <a:srgbClr val="202122"/>
                 </a:solidFill>
                 <a:latin typeface="Calibri"/>
               </a:rPr>
-              <a:t>1</a:t>
-            </a:r>
-          </a:p>
-        </p:txBody>
-      </p:sp>
-      <p:sp>
-        <p:nvSpPr>
-          <p:cNvPr id="8" name="TextBox 7"/>
+              <a:t>e.g.</a:t>
+            </a:r>
+          </a:p>
+        </p:txBody>
+      </p:sp>
+      <p:sp>
+        <p:nvSpPr>
+          <p:cNvPr id="9" name="TextBox 8"/>
           <p:cNvSpPr txBox="1"/>
           <p:nvPr/>
         </p:nvSpPr>
         <p:spPr>
           <a:xfrm>
-            <a:off x="548640" y="2994660"/>
-            <a:ext cx="2109155" cy="731520"/>
+            <a:off x="8046720" y="2560320"/>
+            <a:ext cx="3291840" cy="365760"/>
           </a:xfrm>
           <a:prstGeom prst="rect">
             <a:avLst/>
@@ -7326,61 +11058,17 @@
           <a:bodyPr wrap="square" anchor="t" lIns="0" rIns="0" tIns="0" bIns="0"/>
           <a:lstStyle/>
           <a:p>
-            <a:pPr algn="ctr"/>
-            <a:r>
-              <a:rPr sz="1700" b="1" i="0">
-                <a:solidFill>
-                  <a:srgbClr val="03306E"/>
-                </a:solidFill>
-                <a:latin typeface="Calibri"/>
-              </a:rPr>
-              <a:t>Install</a:t>
-            </a:r>
-          </a:p>
-        </p:txBody>
-      </p:sp>
-      <p:sp>
-        <p:nvSpPr>
-          <p:cNvPr id="9" name="Rounded Rectangle 8"/>
-          <p:cNvSpPr/>
-          <p:nvPr/>
-        </p:nvSpPr>
-        <p:spPr>
-          <a:xfrm>
-            <a:off x="548640" y="3771900"/>
-            <a:ext cx="2109155" cy="1783080"/>
-          </a:xfrm>
-          <a:prstGeom prst="roundRect">
-            <a:avLst>
-              <a:gd name="adj" fmla="val 6000"/>
-            </a:avLst>
-          </a:prstGeom>
-          <a:solidFill>
-            <a:srgbClr val="EAF3FF"/>
-          </a:solidFill>
-          <a:ln>
-            <a:noFill/>
-          </a:ln>
-          <a:effectLst/>
-        </p:spPr>
-        <p:style>
-          <a:lnRef idx="1">
-            <a:schemeClr val="accent1"/>
-          </a:lnRef>
-          <a:fillRef idx="3">
-            <a:schemeClr val="accent1"/>
-          </a:fillRef>
-          <a:effectRef idx="2">
-            <a:schemeClr val="accent1"/>
-          </a:effectRef>
-          <a:fontRef idx="minor">
-            <a:schemeClr val="lt1"/>
-          </a:fontRef>
-        </p:style>
-        <p:txBody>
-          <a:bodyPr rtlCol="0" anchor="ctr"/>
-          <a:lstStyle/>
-          <a:p/>
+            <a:pPr algn="l"/>
+            <a:r>
+              <a:rPr sz="1300" b="1" i="0">
+                <a:solidFill>
+                  <a:srgbClr val="A9C8F0"/>
+                </a:solidFill>
+                <a:latin typeface="Calibri"/>
+              </a:rPr>
+              <a:t>EXAMPLE</a:t>
+            </a:r>
+          </a:p>
         </p:txBody>
       </p:sp>
       <p:sp>
@@ -7391,8 +11079,8 @@
         </p:nvSpPr>
         <p:spPr>
           <a:xfrm>
-            <a:off x="685800" y="3909060"/>
-            <a:ext cx="1834835" cy="1508760"/>
+            <a:off x="8046720" y="2971800"/>
+            <a:ext cx="3291840" cy="2971800"/>
           </a:xfrm>
           <a:prstGeom prst="rect">
             <a:avLst/>
@@ -7405,665 +11093,13 @@
           <a:p>
             <a:pPr algn="l"/>
             <a:r>
-              <a:rPr sz="1800" b="0" i="0">
-                <a:solidFill>
-                  <a:srgbClr val="202122"/>
-                </a:solidFill>
-                <a:latin typeface="Calibri"/>
-              </a:rPr>
-              <a:t>Servers, network devices, firewalls, load balancers, end-user devices.</a:t>
-            </a:r>
-          </a:p>
-        </p:txBody>
-      </p:sp>
-      <p:sp>
-        <p:nvSpPr>
-          <p:cNvPr id="11" name="Oval 10"/>
-          <p:cNvSpPr/>
-          <p:nvPr/>
-        </p:nvSpPr>
-        <p:spPr>
-          <a:xfrm>
-            <a:off x="3529492" y="2217420"/>
-            <a:ext cx="640080" cy="640080"/>
-          </a:xfrm>
-          <a:prstGeom prst="ellipse">
-            <a:avLst/>
-          </a:prstGeom>
-          <a:solidFill>
-            <a:srgbClr val="33C17A"/>
-          </a:solidFill>
-          <a:ln>
-            <a:noFill/>
-          </a:ln>
-          <a:effectLst/>
-        </p:spPr>
-        <p:style>
-          <a:lnRef idx="1">
-            <a:schemeClr val="accent1"/>
-          </a:lnRef>
-          <a:fillRef idx="3">
-            <a:schemeClr val="accent1"/>
-          </a:fillRef>
-          <a:effectRef idx="2">
-            <a:schemeClr val="accent1"/>
-          </a:effectRef>
-          <a:fontRef idx="minor">
-            <a:schemeClr val="lt1"/>
-          </a:fontRef>
-        </p:style>
-        <p:txBody>
-          <a:bodyPr rtlCol="0" anchor="ctr" lIns="0" rIns="0" tIns="0" bIns="0"/>
-          <a:lstStyle/>
-          <a:p>
-            <a:pPr algn="ctr"/>
-            <a:r>
-              <a:rPr sz="2000" b="1">
-                <a:solidFill>
-                  <a:srgbClr val="202122"/>
-                </a:solidFill>
-                <a:latin typeface="Calibri"/>
-              </a:rPr>
-              <a:t>2</a:t>
-            </a:r>
-          </a:p>
-        </p:txBody>
-      </p:sp>
-      <p:sp>
-        <p:nvSpPr>
-          <p:cNvPr id="12" name="TextBox 11"/>
-          <p:cNvSpPr txBox="1"/>
-          <p:nvPr/>
-        </p:nvSpPr>
-        <p:spPr>
-          <a:xfrm>
-            <a:off x="2794955" y="2994660"/>
-            <a:ext cx="2109155" cy="731520"/>
-          </a:xfrm>
-          <a:prstGeom prst="rect">
-            <a:avLst/>
-          </a:prstGeom>
-          <a:noFill/>
-        </p:spPr>
-        <p:txBody>
-          <a:bodyPr wrap="square" anchor="t" lIns="0" rIns="0" tIns="0" bIns="0"/>
-          <a:lstStyle/>
-          <a:p>
-            <a:pPr algn="ctr"/>
-            <a:r>
-              <a:rPr sz="1700" b="1" i="0">
-                <a:solidFill>
-                  <a:srgbClr val="03306E"/>
-                </a:solidFill>
-                <a:latin typeface="Calibri"/>
-              </a:rPr>
-              <a:t>Configure</a:t>
-            </a:r>
-          </a:p>
-        </p:txBody>
-      </p:sp>
-      <p:sp>
-        <p:nvSpPr>
-          <p:cNvPr id="13" name="Rounded Rectangle 12"/>
-          <p:cNvSpPr/>
-          <p:nvPr/>
-        </p:nvSpPr>
-        <p:spPr>
-          <a:xfrm>
-            <a:off x="2794955" y="3771900"/>
-            <a:ext cx="2109155" cy="1783080"/>
-          </a:xfrm>
-          <a:prstGeom prst="roundRect">
-            <a:avLst>
-              <a:gd name="adj" fmla="val 6000"/>
-            </a:avLst>
-          </a:prstGeom>
-          <a:solidFill>
-            <a:srgbClr val="EAF3FF"/>
-          </a:solidFill>
-          <a:ln>
-            <a:noFill/>
-          </a:ln>
-          <a:effectLst/>
-        </p:spPr>
-        <p:style>
-          <a:lnRef idx="1">
-            <a:schemeClr val="accent1"/>
-          </a:lnRef>
-          <a:fillRef idx="3">
-            <a:schemeClr val="accent1"/>
-          </a:fillRef>
-          <a:effectRef idx="2">
-            <a:schemeClr val="accent1"/>
-          </a:effectRef>
-          <a:fontRef idx="minor">
-            <a:schemeClr val="lt1"/>
-          </a:fontRef>
-        </p:style>
-        <p:txBody>
-          <a:bodyPr rtlCol="0" anchor="ctr"/>
-          <a:lstStyle/>
-          <a:p/>
-        </p:txBody>
-      </p:sp>
-      <p:sp>
-        <p:nvSpPr>
-          <p:cNvPr id="14" name="TextBox 13"/>
-          <p:cNvSpPr txBox="1"/>
-          <p:nvPr/>
-        </p:nvSpPr>
-        <p:spPr>
-          <a:xfrm>
-            <a:off x="2932115" y="3909060"/>
-            <a:ext cx="1834835" cy="1508760"/>
-          </a:xfrm>
-          <a:prstGeom prst="rect">
-            <a:avLst/>
-          </a:prstGeom>
-          <a:noFill/>
-        </p:spPr>
-        <p:txBody>
-          <a:bodyPr wrap="square" anchor="t" lIns="0" rIns="0" tIns="0" bIns="0"/>
-          <a:lstStyle/>
-          <a:p>
-            <a:pPr algn="l"/>
-            <a:r>
-              <a:rPr sz="1800" b="0" i="0">
-                <a:solidFill>
-                  <a:srgbClr val="202122"/>
-                </a:solidFill>
-                <a:latin typeface="Calibri"/>
-              </a:rPr>
-              <a:t>Services like DNS and DHCP; correct ports and protocols; scripts.</a:t>
-            </a:r>
-          </a:p>
-        </p:txBody>
-      </p:sp>
-      <p:sp>
-        <p:nvSpPr>
-          <p:cNvPr id="15" name="Oval 14"/>
-          <p:cNvSpPr/>
-          <p:nvPr/>
-        </p:nvSpPr>
-        <p:spPr>
-          <a:xfrm>
-            <a:off x="5775807" y="2217420"/>
-            <a:ext cx="640080" cy="640080"/>
-          </a:xfrm>
-          <a:prstGeom prst="ellipse">
-            <a:avLst/>
-          </a:prstGeom>
-          <a:solidFill>
-            <a:srgbClr val="33C17A"/>
-          </a:solidFill>
-          <a:ln>
-            <a:noFill/>
-          </a:ln>
-          <a:effectLst/>
-        </p:spPr>
-        <p:style>
-          <a:lnRef idx="1">
-            <a:schemeClr val="accent1"/>
-          </a:lnRef>
-          <a:fillRef idx="3">
-            <a:schemeClr val="accent1"/>
-          </a:fillRef>
-          <a:effectRef idx="2">
-            <a:schemeClr val="accent1"/>
-          </a:effectRef>
-          <a:fontRef idx="minor">
-            <a:schemeClr val="lt1"/>
-          </a:fontRef>
-        </p:style>
-        <p:txBody>
-          <a:bodyPr rtlCol="0" anchor="ctr" lIns="0" rIns="0" tIns="0" bIns="0"/>
-          <a:lstStyle/>
-          <a:p>
-            <a:pPr algn="ctr"/>
-            <a:r>
-              <a:rPr sz="2000" b="1">
-                <a:solidFill>
-                  <a:srgbClr val="202122"/>
-                </a:solidFill>
-                <a:latin typeface="Calibri"/>
-              </a:rPr>
-              <a:t>3</a:t>
-            </a:r>
-          </a:p>
-        </p:txBody>
-      </p:sp>
-      <p:sp>
-        <p:nvSpPr>
-          <p:cNvPr id="16" name="TextBox 15"/>
-          <p:cNvSpPr txBox="1"/>
-          <p:nvPr/>
-        </p:nvSpPr>
-        <p:spPr>
-          <a:xfrm>
-            <a:off x="5041270" y="2994660"/>
-            <a:ext cx="2109155" cy="731520"/>
-          </a:xfrm>
-          <a:prstGeom prst="rect">
-            <a:avLst/>
-          </a:prstGeom>
-          <a:noFill/>
-        </p:spPr>
-        <p:txBody>
-          <a:bodyPr wrap="square" anchor="t" lIns="0" rIns="0" tIns="0" bIns="0"/>
-          <a:lstStyle/>
-          <a:p>
-            <a:pPr algn="ctr"/>
-            <a:r>
-              <a:rPr sz="1700" b="1" i="0">
-                <a:solidFill>
-                  <a:srgbClr val="03306E"/>
-                </a:solidFill>
-                <a:latin typeface="Calibri"/>
-              </a:rPr>
-              <a:t>Back up</a:t>
-            </a:r>
-          </a:p>
-        </p:txBody>
-      </p:sp>
-      <p:sp>
-        <p:nvSpPr>
-          <p:cNvPr id="17" name="Rounded Rectangle 16"/>
-          <p:cNvSpPr/>
-          <p:nvPr/>
-        </p:nvSpPr>
-        <p:spPr>
-          <a:xfrm>
-            <a:off x="5041270" y="3771900"/>
-            <a:ext cx="2109155" cy="1783080"/>
-          </a:xfrm>
-          <a:prstGeom prst="roundRect">
-            <a:avLst>
-              <a:gd name="adj" fmla="val 6000"/>
-            </a:avLst>
-          </a:prstGeom>
-          <a:solidFill>
-            <a:srgbClr val="EAF3FF"/>
-          </a:solidFill>
-          <a:ln>
-            <a:noFill/>
-          </a:ln>
-          <a:effectLst/>
-        </p:spPr>
-        <p:style>
-          <a:lnRef idx="1">
-            <a:schemeClr val="accent1"/>
-          </a:lnRef>
-          <a:fillRef idx="3">
-            <a:schemeClr val="accent1"/>
-          </a:fillRef>
-          <a:effectRef idx="2">
-            <a:schemeClr val="accent1"/>
-          </a:effectRef>
-          <a:fontRef idx="minor">
-            <a:schemeClr val="lt1"/>
-          </a:fontRef>
-        </p:style>
-        <p:txBody>
-          <a:bodyPr rtlCol="0" anchor="ctr"/>
-          <a:lstStyle/>
-          <a:p/>
-        </p:txBody>
-      </p:sp>
-      <p:sp>
-        <p:nvSpPr>
-          <p:cNvPr id="18" name="TextBox 17"/>
-          <p:cNvSpPr txBox="1"/>
-          <p:nvPr/>
-        </p:nvSpPr>
-        <p:spPr>
-          <a:xfrm>
-            <a:off x="5178430" y="3909060"/>
-            <a:ext cx="1834835" cy="1508760"/>
-          </a:xfrm>
-          <a:prstGeom prst="rect">
-            <a:avLst/>
-          </a:prstGeom>
-          <a:noFill/>
-        </p:spPr>
-        <p:txBody>
-          <a:bodyPr wrap="square" anchor="t" lIns="0" rIns="0" tIns="0" bIns="0"/>
-          <a:lstStyle/>
-          <a:p>
-            <a:pPr algn="l"/>
-            <a:r>
-              <a:rPr sz="1800" b="0" i="0">
-                <a:solidFill>
-                  <a:srgbClr val="202122"/>
-                </a:solidFill>
-                <a:latin typeface="Calibri"/>
-              </a:rPr>
-              <a:t>Apply the backup policy.</a:t>
-            </a:r>
-          </a:p>
-        </p:txBody>
-      </p:sp>
-      <p:sp>
-        <p:nvSpPr>
-          <p:cNvPr id="19" name="Oval 18"/>
-          <p:cNvSpPr/>
-          <p:nvPr/>
-        </p:nvSpPr>
-        <p:spPr>
-          <a:xfrm>
-            <a:off x="8022122" y="2217420"/>
-            <a:ext cx="640080" cy="640080"/>
-          </a:xfrm>
-          <a:prstGeom prst="ellipse">
-            <a:avLst/>
-          </a:prstGeom>
-          <a:solidFill>
-            <a:srgbClr val="33C17A"/>
-          </a:solidFill>
-          <a:ln>
-            <a:noFill/>
-          </a:ln>
-          <a:effectLst/>
-        </p:spPr>
-        <p:style>
-          <a:lnRef idx="1">
-            <a:schemeClr val="accent1"/>
-          </a:lnRef>
-          <a:fillRef idx="3">
-            <a:schemeClr val="accent1"/>
-          </a:fillRef>
-          <a:effectRef idx="2">
-            <a:schemeClr val="accent1"/>
-          </a:effectRef>
-          <a:fontRef idx="minor">
-            <a:schemeClr val="lt1"/>
-          </a:fontRef>
-        </p:style>
-        <p:txBody>
-          <a:bodyPr rtlCol="0" anchor="ctr" lIns="0" rIns="0" tIns="0" bIns="0"/>
-          <a:lstStyle/>
-          <a:p>
-            <a:pPr algn="ctr"/>
-            <a:r>
-              <a:rPr sz="2000" b="1">
-                <a:solidFill>
-                  <a:srgbClr val="202122"/>
-                </a:solidFill>
-                <a:latin typeface="Calibri"/>
-              </a:rPr>
-              <a:t>4</a:t>
-            </a:r>
-          </a:p>
-        </p:txBody>
-      </p:sp>
-      <p:sp>
-        <p:nvSpPr>
-          <p:cNvPr id="20" name="TextBox 19"/>
-          <p:cNvSpPr txBox="1"/>
-          <p:nvPr/>
-        </p:nvSpPr>
-        <p:spPr>
-          <a:xfrm>
-            <a:off x="7287585" y="2994660"/>
-            <a:ext cx="2109155" cy="731520"/>
-          </a:xfrm>
-          <a:prstGeom prst="rect">
-            <a:avLst/>
-          </a:prstGeom>
-          <a:noFill/>
-        </p:spPr>
-        <p:txBody>
-          <a:bodyPr wrap="square" anchor="t" lIns="0" rIns="0" tIns="0" bIns="0"/>
-          <a:lstStyle/>
-          <a:p>
-            <a:pPr algn="ctr"/>
-            <a:r>
-              <a:rPr sz="1700" b="1" i="0">
-                <a:solidFill>
-                  <a:srgbClr val="03306E"/>
-                </a:solidFill>
-                <a:latin typeface="Calibri"/>
-              </a:rPr>
-              <a:t>Test</a:t>
-            </a:r>
-          </a:p>
-        </p:txBody>
-      </p:sp>
-      <p:sp>
-        <p:nvSpPr>
-          <p:cNvPr id="21" name="Rounded Rectangle 20"/>
-          <p:cNvSpPr/>
-          <p:nvPr/>
-        </p:nvSpPr>
-        <p:spPr>
-          <a:xfrm>
-            <a:off x="7287585" y="3771900"/>
-            <a:ext cx="2109155" cy="1783080"/>
-          </a:xfrm>
-          <a:prstGeom prst="roundRect">
-            <a:avLst>
-              <a:gd name="adj" fmla="val 6000"/>
-            </a:avLst>
-          </a:prstGeom>
-          <a:solidFill>
-            <a:srgbClr val="EAF3FF"/>
-          </a:solidFill>
-          <a:ln>
-            <a:noFill/>
-          </a:ln>
-          <a:effectLst/>
-        </p:spPr>
-        <p:style>
-          <a:lnRef idx="1">
-            <a:schemeClr val="accent1"/>
-          </a:lnRef>
-          <a:fillRef idx="3">
-            <a:schemeClr val="accent1"/>
-          </a:fillRef>
-          <a:effectRef idx="2">
-            <a:schemeClr val="accent1"/>
-          </a:effectRef>
-          <a:fontRef idx="minor">
-            <a:schemeClr val="lt1"/>
-          </a:fontRef>
-        </p:style>
-        <p:txBody>
-          <a:bodyPr rtlCol="0" anchor="ctr"/>
-          <a:lstStyle/>
-          <a:p/>
-        </p:txBody>
-      </p:sp>
-      <p:sp>
-        <p:nvSpPr>
-          <p:cNvPr id="22" name="TextBox 21"/>
-          <p:cNvSpPr txBox="1"/>
-          <p:nvPr/>
-        </p:nvSpPr>
-        <p:spPr>
-          <a:xfrm>
-            <a:off x="7424745" y="3909060"/>
-            <a:ext cx="1834835" cy="1508760"/>
-          </a:xfrm>
-          <a:prstGeom prst="rect">
-            <a:avLst/>
-          </a:prstGeom>
-          <a:noFill/>
-        </p:spPr>
-        <p:txBody>
-          <a:bodyPr wrap="square" anchor="t" lIns="0" rIns="0" tIns="0" bIns="0"/>
-          <a:lstStyle/>
-          <a:p>
-            <a:pPr algn="l"/>
-            <a:r>
-              <a:rPr sz="1800" b="0" i="0">
-                <a:solidFill>
-                  <a:srgbClr val="202122"/>
-                </a:solidFill>
-                <a:latin typeface="Calibri"/>
-              </a:rPr>
-              <a:t>Functionality and performance; record results.</a:t>
-            </a:r>
-          </a:p>
-        </p:txBody>
-      </p:sp>
-      <p:sp>
-        <p:nvSpPr>
-          <p:cNvPr id="23" name="Oval 22"/>
-          <p:cNvSpPr/>
-          <p:nvPr/>
-        </p:nvSpPr>
-        <p:spPr>
-          <a:xfrm>
-            <a:off x="10268437" y="2217420"/>
-            <a:ext cx="640080" cy="640080"/>
-          </a:xfrm>
-          <a:prstGeom prst="ellipse">
-            <a:avLst/>
-          </a:prstGeom>
-          <a:solidFill>
-            <a:srgbClr val="33C17A"/>
-          </a:solidFill>
-          <a:ln>
-            <a:noFill/>
-          </a:ln>
-          <a:effectLst/>
-        </p:spPr>
-        <p:style>
-          <a:lnRef idx="1">
-            <a:schemeClr val="accent1"/>
-          </a:lnRef>
-          <a:fillRef idx="3">
-            <a:schemeClr val="accent1"/>
-          </a:fillRef>
-          <a:effectRef idx="2">
-            <a:schemeClr val="accent1"/>
-          </a:effectRef>
-          <a:fontRef idx="minor">
-            <a:schemeClr val="lt1"/>
-          </a:fontRef>
-        </p:style>
-        <p:txBody>
-          <a:bodyPr rtlCol="0" anchor="ctr" lIns="0" rIns="0" tIns="0" bIns="0"/>
-          <a:lstStyle/>
-          <a:p>
-            <a:pPr algn="ctr"/>
-            <a:r>
-              <a:rPr sz="2000" b="1">
-                <a:solidFill>
-                  <a:srgbClr val="202122"/>
-                </a:solidFill>
-                <a:latin typeface="Calibri"/>
-              </a:rPr>
-              <a:t>5</a:t>
-            </a:r>
-          </a:p>
-        </p:txBody>
-      </p:sp>
-      <p:sp>
-        <p:nvSpPr>
-          <p:cNvPr id="24" name="TextBox 23"/>
-          <p:cNvSpPr txBox="1"/>
-          <p:nvPr/>
-        </p:nvSpPr>
-        <p:spPr>
-          <a:xfrm>
-            <a:off x="9533900" y="2994660"/>
-            <a:ext cx="2109155" cy="731520"/>
-          </a:xfrm>
-          <a:prstGeom prst="rect">
-            <a:avLst/>
-          </a:prstGeom>
-          <a:noFill/>
-        </p:spPr>
-        <p:txBody>
-          <a:bodyPr wrap="square" anchor="t" lIns="0" rIns="0" tIns="0" bIns="0"/>
-          <a:lstStyle/>
-          <a:p>
-            <a:pPr algn="ctr"/>
-            <a:r>
-              <a:rPr sz="1700" b="1" i="0">
-                <a:solidFill>
-                  <a:srgbClr val="03306E"/>
-                </a:solidFill>
-                <a:latin typeface="Calibri"/>
-              </a:rPr>
-              <a:t>Maintain</a:t>
-            </a:r>
-          </a:p>
-        </p:txBody>
-      </p:sp>
-      <p:sp>
-        <p:nvSpPr>
-          <p:cNvPr id="25" name="Rounded Rectangle 24"/>
-          <p:cNvSpPr/>
-          <p:nvPr/>
-        </p:nvSpPr>
-        <p:spPr>
-          <a:xfrm>
-            <a:off x="9533900" y="3771900"/>
-            <a:ext cx="2109155" cy="1783080"/>
-          </a:xfrm>
-          <a:prstGeom prst="roundRect">
-            <a:avLst>
-              <a:gd name="adj" fmla="val 6000"/>
-            </a:avLst>
-          </a:prstGeom>
-          <a:solidFill>
-            <a:srgbClr val="EAF3FF"/>
-          </a:solidFill>
-          <a:ln>
-            <a:noFill/>
-          </a:ln>
-          <a:effectLst/>
-        </p:spPr>
-        <p:style>
-          <a:lnRef idx="1">
-            <a:schemeClr val="accent1"/>
-          </a:lnRef>
-          <a:fillRef idx="3">
-            <a:schemeClr val="accent1"/>
-          </a:fillRef>
-          <a:effectRef idx="2">
-            <a:schemeClr val="accent1"/>
-          </a:effectRef>
-          <a:fontRef idx="minor">
-            <a:schemeClr val="lt1"/>
-          </a:fontRef>
-        </p:style>
-        <p:txBody>
-          <a:bodyPr rtlCol="0" anchor="ctr"/>
-          <a:lstStyle/>
-          <a:p/>
-        </p:txBody>
-      </p:sp>
-      <p:sp>
-        <p:nvSpPr>
-          <p:cNvPr id="26" name="TextBox 25"/>
-          <p:cNvSpPr txBox="1"/>
-          <p:nvPr/>
-        </p:nvSpPr>
-        <p:spPr>
-          <a:xfrm>
-            <a:off x="9671060" y="3909060"/>
-            <a:ext cx="1834835" cy="1508760"/>
-          </a:xfrm>
-          <a:prstGeom prst="rect">
-            <a:avLst/>
-          </a:prstGeom>
-          <a:noFill/>
-        </p:spPr>
-        <p:txBody>
-          <a:bodyPr wrap="square" anchor="t" lIns="0" rIns="0" tIns="0" bIns="0"/>
-          <a:lstStyle/>
-          <a:p>
-            <a:pPr algn="l"/>
-            <a:r>
-              <a:rPr sz="1800" b="0" i="0">
-                <a:solidFill>
-                  <a:srgbClr val="202122"/>
-                </a:solidFill>
-                <a:latin typeface="Calibri"/>
-              </a:rPr>
-              <a:t>Monitor, log, manage capacity, automate with scripts.</a:t>
+              <a:rPr sz="1900" b="0" i="0">
+                <a:solidFill>
+                  <a:srgbClr val="FFFFFF"/>
+                </a:solidFill>
+                <a:latin typeface="Cambria"/>
+              </a:rPr>
+              <a:t>At 3am a server freezes. The admin uses LOM from home to power-cycle it, then SSH to check the logs.</a:t>
             </a:r>
           </a:p>
         </p:txBody>
@@ -8155,7 +11191,7 @@
                 </a:solidFill>
                 <a:latin typeface="Cambria"/>
               </a:rPr>
-              <a:t>Check your understanding</a:t>
+              <a:t>Remote access methods</a:t>
             </a:r>
           </a:p>
         </p:txBody>
@@ -8228,14 +11264,58 @@
       </p:sp>
       <p:sp>
         <p:nvSpPr>
-          <p:cNvPr id="6" name="Oval 5"/>
+          <p:cNvPr id="6" name="Rounded Rectangle 5"/>
           <p:cNvSpPr/>
           <p:nvPr/>
         </p:nvSpPr>
         <p:spPr>
           <a:xfrm>
-            <a:off x="548640" y="1618488"/>
-            <a:ext cx="411480" cy="411480"/>
+            <a:off x="548640" y="1600200"/>
+            <a:ext cx="5410047" cy="2148840"/>
+          </a:xfrm>
+          <a:prstGeom prst="roundRect">
+            <a:avLst>
+              <a:gd name="adj" fmla="val 6000"/>
+            </a:avLst>
+          </a:prstGeom>
+          <a:solidFill>
+            <a:srgbClr val="EAF3FF"/>
+          </a:solidFill>
+          <a:ln>
+            <a:noFill/>
+          </a:ln>
+          <a:effectLst/>
+        </p:spPr>
+        <p:style>
+          <a:lnRef idx="1">
+            <a:schemeClr val="accent1"/>
+          </a:lnRef>
+          <a:fillRef idx="3">
+            <a:schemeClr val="accent1"/>
+          </a:fillRef>
+          <a:effectRef idx="2">
+            <a:schemeClr val="accent1"/>
+          </a:effectRef>
+          <a:fontRef idx="minor">
+            <a:schemeClr val="lt1"/>
+          </a:fontRef>
+        </p:style>
+        <p:txBody>
+          <a:bodyPr rtlCol="0" anchor="ctr"/>
+          <a:lstStyle/>
+          <a:p/>
+        </p:txBody>
+      </p:sp>
+      <p:sp>
+        <p:nvSpPr>
+          <p:cNvPr id="7" name="Oval 6"/>
+          <p:cNvSpPr/>
+          <p:nvPr/>
+        </p:nvSpPr>
+        <p:spPr>
+          <a:xfrm>
+            <a:off x="777240" y="1828800"/>
+            <a:ext cx="457200" cy="457200"/>
           </a:xfrm>
           <a:prstGeom prst="ellipse">
             <a:avLst/>
@@ -8268,7 +11348,7 @@
           <a:p>
             <a:pPr algn="ctr"/>
             <a:r>
-              <a:rPr sz="1400" b="1">
+              <a:rPr sz="1500" b="1">
                 <a:solidFill>
                   <a:srgbClr val="202122"/>
                 </a:solidFill>
@@ -8281,14 +11361,47 @@
       </p:sp>
       <p:sp>
         <p:nvSpPr>
-          <p:cNvPr id="7" name="TextBox 6"/>
+          <p:cNvPr id="8" name="TextBox 7"/>
           <p:cNvSpPr txBox="1"/>
           <p:nvPr/>
         </p:nvSpPr>
         <p:spPr>
           <a:xfrm>
-            <a:off x="1234440" y="1600200"/>
-            <a:ext cx="10408615" cy="791870"/>
+            <a:off x="1371600" y="1801368"/>
+            <a:ext cx="4404207" cy="512064"/>
+          </a:xfrm>
+          <a:prstGeom prst="rect">
+            <a:avLst/>
+          </a:prstGeom>
+          <a:noFill/>
+        </p:spPr>
+        <p:txBody>
+          <a:bodyPr wrap="square" anchor="ctr" lIns="0" rIns="0" tIns="0" bIns="0"/>
+          <a:lstStyle/>
+          <a:p>
+            <a:pPr algn="l"/>
+            <a:r>
+              <a:rPr sz="1900" b="1" i="0">
+                <a:solidFill>
+                  <a:srgbClr val="03306E"/>
+                </a:solidFill>
+                <a:latin typeface="Calibri"/>
+              </a:rPr>
+              <a:t>VPN</a:t>
+            </a:r>
+          </a:p>
+        </p:txBody>
+      </p:sp>
+      <p:sp>
+        <p:nvSpPr>
+          <p:cNvPr id="9" name="TextBox 8"/>
+          <p:cNvSpPr txBox="1"/>
+          <p:nvPr/>
+        </p:nvSpPr>
+        <p:spPr>
+          <a:xfrm>
+            <a:off x="777240" y="2468880"/>
+            <a:ext cx="4952847" cy="1143000"/>
           </a:xfrm>
           <a:prstGeom prst="rect">
             <a:avLst/>
@@ -8301,27 +11414,71 @@
           <a:p>
             <a:pPr algn="l"/>
             <a:r>
-              <a:rPr sz="2200" b="0" i="0">
+              <a:rPr sz="2000" b="0" i="0">
                 <a:solidFill>
                   <a:srgbClr val="202122"/>
                 </a:solidFill>
                 <a:latin typeface="Calibri"/>
               </a:rPr>
-              <a:t>What is an OU?</a:t>
-            </a:r>
-          </a:p>
-        </p:txBody>
-      </p:sp>
-      <p:sp>
-        <p:nvSpPr>
-          <p:cNvPr id="8" name="Oval 7"/>
+              <a:t>A private, encrypted tunnel to the network.</a:t>
+            </a:r>
+          </a:p>
+        </p:txBody>
+      </p:sp>
+      <p:sp>
+        <p:nvSpPr>
+          <p:cNvPr id="10" name="Rounded Rectangle 9"/>
           <p:cNvSpPr/>
           <p:nvPr/>
         </p:nvSpPr>
         <p:spPr>
           <a:xfrm>
-            <a:off x="548640" y="2574950"/>
-            <a:ext cx="411480" cy="411480"/>
+            <a:off x="6233007" y="1600200"/>
+            <a:ext cx="5410047" cy="2148840"/>
+          </a:xfrm>
+          <a:prstGeom prst="roundRect">
+            <a:avLst>
+              <a:gd name="adj" fmla="val 6000"/>
+            </a:avLst>
+          </a:prstGeom>
+          <a:solidFill>
+            <a:srgbClr val="EAF3FF"/>
+          </a:solidFill>
+          <a:ln>
+            <a:noFill/>
+          </a:ln>
+          <a:effectLst/>
+        </p:spPr>
+        <p:style>
+          <a:lnRef idx="1">
+            <a:schemeClr val="accent1"/>
+          </a:lnRef>
+          <a:fillRef idx="3">
+            <a:schemeClr val="accent1"/>
+          </a:fillRef>
+          <a:effectRef idx="2">
+            <a:schemeClr val="accent1"/>
+          </a:effectRef>
+          <a:fontRef idx="minor">
+            <a:schemeClr val="lt1"/>
+          </a:fontRef>
+        </p:style>
+        <p:txBody>
+          <a:bodyPr rtlCol="0" anchor="ctr"/>
+          <a:lstStyle/>
+          <a:p/>
+        </p:txBody>
+      </p:sp>
+      <p:sp>
+        <p:nvSpPr>
+          <p:cNvPr id="11" name="Oval 10"/>
+          <p:cNvSpPr/>
+          <p:nvPr/>
+        </p:nvSpPr>
+        <p:spPr>
+          <a:xfrm>
+            <a:off x="6461607" y="1828800"/>
+            <a:ext cx="457200" cy="457200"/>
           </a:xfrm>
           <a:prstGeom prst="ellipse">
             <a:avLst/>
@@ -8354,7 +11511,7 @@
           <a:p>
             <a:pPr algn="ctr"/>
             <a:r>
-              <a:rPr sz="1400" b="1">
+              <a:rPr sz="1500" b="1">
                 <a:solidFill>
                   <a:srgbClr val="202122"/>
                 </a:solidFill>
@@ -8367,14 +11524,47 @@
       </p:sp>
       <p:sp>
         <p:nvSpPr>
-          <p:cNvPr id="9" name="TextBox 8"/>
+          <p:cNvPr id="12" name="TextBox 11"/>
           <p:cNvSpPr txBox="1"/>
           <p:nvPr/>
         </p:nvSpPr>
         <p:spPr>
           <a:xfrm>
-            <a:off x="1234440" y="2556662"/>
-            <a:ext cx="10408615" cy="791870"/>
+            <a:off x="7055967" y="1801368"/>
+            <a:ext cx="4404207" cy="512064"/>
+          </a:xfrm>
+          <a:prstGeom prst="rect">
+            <a:avLst/>
+          </a:prstGeom>
+          <a:noFill/>
+        </p:spPr>
+        <p:txBody>
+          <a:bodyPr wrap="square" anchor="ctr" lIns="0" rIns="0" tIns="0" bIns="0"/>
+          <a:lstStyle/>
+          <a:p>
+            <a:pPr algn="l"/>
+            <a:r>
+              <a:rPr sz="1900" b="1" i="0">
+                <a:solidFill>
+                  <a:srgbClr val="03306E"/>
+                </a:solidFill>
+                <a:latin typeface="Calibri"/>
+              </a:rPr>
+              <a:t>RDP</a:t>
+            </a:r>
+          </a:p>
+        </p:txBody>
+      </p:sp>
+      <p:sp>
+        <p:nvSpPr>
+          <p:cNvPr id="13" name="TextBox 12"/>
+          <p:cNvSpPr txBox="1"/>
+          <p:nvPr/>
+        </p:nvSpPr>
+        <p:spPr>
+          <a:xfrm>
+            <a:off x="6461607" y="2468880"/>
+            <a:ext cx="4952847" cy="1143000"/>
           </a:xfrm>
           <a:prstGeom prst="rect">
             <a:avLst/>
@@ -8387,27 +11577,71 @@
           <a:p>
             <a:pPr algn="l"/>
             <a:r>
-              <a:rPr sz="2200" b="0" i="0">
+              <a:rPr sz="2000" b="0" i="0">
                 <a:solidFill>
                   <a:srgbClr val="202122"/>
                 </a:solidFill>
                 <a:latin typeface="Calibri"/>
               </a:rPr>
-              <a:t>Which service gives a PC its IP address?</a:t>
-            </a:r>
-          </a:p>
-        </p:txBody>
-      </p:sp>
-      <p:sp>
-        <p:nvSpPr>
-          <p:cNvPr id="10" name="Oval 9"/>
+              <a:t>Remote desktop: processing stays on the host machine.</a:t>
+            </a:r>
+          </a:p>
+        </p:txBody>
+      </p:sp>
+      <p:sp>
+        <p:nvSpPr>
+          <p:cNvPr id="14" name="Rounded Rectangle 13"/>
           <p:cNvSpPr/>
           <p:nvPr/>
         </p:nvSpPr>
         <p:spPr>
           <a:xfrm>
-            <a:off x="548640" y="3531412"/>
-            <a:ext cx="411480" cy="411480"/>
+            <a:off x="548640" y="4023360"/>
+            <a:ext cx="5410047" cy="2148840"/>
+          </a:xfrm>
+          <a:prstGeom prst="roundRect">
+            <a:avLst>
+              <a:gd name="adj" fmla="val 6000"/>
+            </a:avLst>
+          </a:prstGeom>
+          <a:solidFill>
+            <a:srgbClr val="EAF3FF"/>
+          </a:solidFill>
+          <a:ln>
+            <a:noFill/>
+          </a:ln>
+          <a:effectLst/>
+        </p:spPr>
+        <p:style>
+          <a:lnRef idx="1">
+            <a:schemeClr val="accent1"/>
+          </a:lnRef>
+          <a:fillRef idx="3">
+            <a:schemeClr val="accent1"/>
+          </a:fillRef>
+          <a:effectRef idx="2">
+            <a:schemeClr val="accent1"/>
+          </a:effectRef>
+          <a:fontRef idx="minor">
+            <a:schemeClr val="lt1"/>
+          </a:fontRef>
+        </p:style>
+        <p:txBody>
+          <a:bodyPr rtlCol="0" anchor="ctr"/>
+          <a:lstStyle/>
+          <a:p/>
+        </p:txBody>
+      </p:sp>
+      <p:sp>
+        <p:nvSpPr>
+          <p:cNvPr id="15" name="Oval 14"/>
+          <p:cNvSpPr/>
+          <p:nvPr/>
+        </p:nvSpPr>
+        <p:spPr>
+          <a:xfrm>
+            <a:off x="777240" y="4251960"/>
+            <a:ext cx="457200" cy="457200"/>
           </a:xfrm>
           <a:prstGeom prst="ellipse">
             <a:avLst/>
@@ -8440,7 +11674,7 @@
           <a:p>
             <a:pPr algn="ctr"/>
             <a:r>
-              <a:rPr sz="1400" b="1">
+              <a:rPr sz="1500" b="1">
                 <a:solidFill>
                   <a:srgbClr val="202122"/>
                 </a:solidFill>
@@ -8453,14 +11687,47 @@
       </p:sp>
       <p:sp>
         <p:nvSpPr>
-          <p:cNvPr id="11" name="TextBox 10"/>
+          <p:cNvPr id="16" name="TextBox 15"/>
           <p:cNvSpPr txBox="1"/>
           <p:nvPr/>
         </p:nvSpPr>
         <p:spPr>
           <a:xfrm>
-            <a:off x="1234440" y="3513124"/>
-            <a:ext cx="10408615" cy="791870"/>
+            <a:off x="1371600" y="4224528"/>
+            <a:ext cx="4404207" cy="512064"/>
+          </a:xfrm>
+          <a:prstGeom prst="rect">
+            <a:avLst/>
+          </a:prstGeom>
+          <a:noFill/>
+        </p:spPr>
+        <p:txBody>
+          <a:bodyPr wrap="square" anchor="ctr" lIns="0" rIns="0" tIns="0" bIns="0"/>
+          <a:lstStyle/>
+          <a:p>
+            <a:pPr algn="l"/>
+            <a:r>
+              <a:rPr sz="1900" b="1" i="0">
+                <a:solidFill>
+                  <a:srgbClr val="03306E"/>
+                </a:solidFill>
+                <a:latin typeface="Calibri"/>
+              </a:rPr>
+              <a:t>LOM</a:t>
+            </a:r>
+          </a:p>
+        </p:txBody>
+      </p:sp>
+      <p:sp>
+        <p:nvSpPr>
+          <p:cNvPr id="17" name="TextBox 16"/>
+          <p:cNvSpPr txBox="1"/>
+          <p:nvPr/>
+        </p:nvSpPr>
+        <p:spPr>
+          <a:xfrm>
+            <a:off x="777240" y="4892040"/>
+            <a:ext cx="4952847" cy="1143000"/>
           </a:xfrm>
           <a:prstGeom prst="rect">
             <a:avLst/>
@@ -8473,27 +11740,71 @@
           <a:p>
             <a:pPr algn="l"/>
             <a:r>
-              <a:rPr sz="2200" b="0" i="0">
+              <a:rPr sz="2000" b="0" i="0">
                 <a:solidFill>
                   <a:srgbClr val="202122"/>
                 </a:solidFill>
                 <a:latin typeface="Calibri"/>
               </a:rPr>
-              <a:t>What does DNS do?</a:t>
-            </a:r>
-          </a:p>
-        </p:txBody>
-      </p:sp>
-      <p:sp>
-        <p:nvSpPr>
-          <p:cNvPr id="12" name="Oval 11"/>
+              <a:t>Lights-out management: administer a server even when it is off.</a:t>
+            </a:r>
+          </a:p>
+        </p:txBody>
+      </p:sp>
+      <p:sp>
+        <p:nvSpPr>
+          <p:cNvPr id="18" name="Rounded Rectangle 17"/>
           <p:cNvSpPr/>
           <p:nvPr/>
         </p:nvSpPr>
         <p:spPr>
           <a:xfrm>
-            <a:off x="548640" y="4487875"/>
-            <a:ext cx="411480" cy="411480"/>
+            <a:off x="6233007" y="4023360"/>
+            <a:ext cx="5410047" cy="2148840"/>
+          </a:xfrm>
+          <a:prstGeom prst="roundRect">
+            <a:avLst>
+              <a:gd name="adj" fmla="val 6000"/>
+            </a:avLst>
+          </a:prstGeom>
+          <a:solidFill>
+            <a:srgbClr val="EAF3FF"/>
+          </a:solidFill>
+          <a:ln>
+            <a:noFill/>
+          </a:ln>
+          <a:effectLst/>
+        </p:spPr>
+        <p:style>
+          <a:lnRef idx="1">
+            <a:schemeClr val="accent1"/>
+          </a:lnRef>
+          <a:fillRef idx="3">
+            <a:schemeClr val="accent1"/>
+          </a:fillRef>
+          <a:effectRef idx="2">
+            <a:schemeClr val="accent1"/>
+          </a:effectRef>
+          <a:fontRef idx="minor">
+            <a:schemeClr val="lt1"/>
+          </a:fontRef>
+        </p:style>
+        <p:txBody>
+          <a:bodyPr rtlCol="0" anchor="ctr"/>
+          <a:lstStyle/>
+          <a:p/>
+        </p:txBody>
+      </p:sp>
+      <p:sp>
+        <p:nvSpPr>
+          <p:cNvPr id="19" name="Oval 18"/>
+          <p:cNvSpPr/>
+          <p:nvPr/>
+        </p:nvSpPr>
+        <p:spPr>
+          <a:xfrm>
+            <a:off x="6461607" y="4251960"/>
+            <a:ext cx="457200" cy="457200"/>
           </a:xfrm>
           <a:prstGeom prst="ellipse">
             <a:avLst/>
@@ -8526,7 +11837,7 @@
           <a:p>
             <a:pPr algn="ctr"/>
             <a:r>
-              <a:rPr sz="1400" b="1">
+              <a:rPr sz="1500" b="1">
                 <a:solidFill>
                   <a:srgbClr val="202122"/>
                 </a:solidFill>
@@ -8539,14 +11850,47 @@
       </p:sp>
       <p:sp>
         <p:nvSpPr>
-          <p:cNvPr id="13" name="TextBox 12"/>
+          <p:cNvPr id="20" name="TextBox 19"/>
           <p:cNvSpPr txBox="1"/>
           <p:nvPr/>
         </p:nvSpPr>
         <p:spPr>
           <a:xfrm>
-            <a:off x="1234440" y="4469587"/>
-            <a:ext cx="10408615" cy="791870"/>
+            <a:off x="7055967" y="4224528"/>
+            <a:ext cx="4404207" cy="512064"/>
+          </a:xfrm>
+          <a:prstGeom prst="rect">
+            <a:avLst/>
+          </a:prstGeom>
+          <a:noFill/>
+        </p:spPr>
+        <p:txBody>
+          <a:bodyPr wrap="square" anchor="ctr" lIns="0" rIns="0" tIns="0" bIns="0"/>
+          <a:lstStyle/>
+          <a:p>
+            <a:pPr algn="l"/>
+            <a:r>
+              <a:rPr sz="1900" b="1" i="0">
+                <a:solidFill>
+                  <a:srgbClr val="03306E"/>
+                </a:solidFill>
+                <a:latin typeface="Calibri"/>
+              </a:rPr>
+              <a:t>SSH</a:t>
+            </a:r>
+          </a:p>
+        </p:txBody>
+      </p:sp>
+      <p:sp>
+        <p:nvSpPr>
+          <p:cNvPr id="21" name="TextBox 20"/>
+          <p:cNvSpPr txBox="1"/>
+          <p:nvPr/>
+        </p:nvSpPr>
+        <p:spPr>
+          <a:xfrm>
+            <a:off x="6461607" y="4892040"/>
+            <a:ext cx="4952847" cy="1143000"/>
           </a:xfrm>
           <a:prstGeom prst="rect">
             <a:avLst/>
@@ -8559,99 +11903,13 @@
           <a:p>
             <a:pPr algn="l"/>
             <a:r>
-              <a:rPr sz="2200" b="0" i="0">
+              <a:rPr sz="2000" b="0" i="0">
                 <a:solidFill>
                   <a:srgbClr val="202122"/>
                 </a:solidFill>
                 <a:latin typeface="Calibri"/>
               </a:rPr>
-              <a:t>Which remote access method works even when the server is powered off?</a:t>
-            </a:r>
-          </a:p>
-        </p:txBody>
-      </p:sp>
-      <p:sp>
-        <p:nvSpPr>
-          <p:cNvPr id="14" name="Oval 13"/>
-          <p:cNvSpPr/>
-          <p:nvPr/>
-        </p:nvSpPr>
-        <p:spPr>
-          <a:xfrm>
-            <a:off x="548640" y="5444337"/>
-            <a:ext cx="411480" cy="411480"/>
-          </a:xfrm>
-          <a:prstGeom prst="ellipse">
-            <a:avLst/>
-          </a:prstGeom>
-          <a:solidFill>
-            <a:srgbClr val="33C17A"/>
-          </a:solidFill>
-          <a:ln>
-            <a:noFill/>
-          </a:ln>
-          <a:effectLst/>
-        </p:spPr>
-        <p:style>
-          <a:lnRef idx="1">
-            <a:schemeClr val="accent1"/>
-          </a:lnRef>
-          <a:fillRef idx="3">
-            <a:schemeClr val="accent1"/>
-          </a:fillRef>
-          <a:effectRef idx="2">
-            <a:schemeClr val="accent1"/>
-          </a:effectRef>
-          <a:fontRef idx="minor">
-            <a:schemeClr val="lt1"/>
-          </a:fontRef>
-        </p:style>
-        <p:txBody>
-          <a:bodyPr rtlCol="0" anchor="ctr" lIns="0" rIns="0" tIns="0" bIns="0"/>
-          <a:lstStyle/>
-          <a:p>
-            <a:pPr algn="ctr"/>
-            <a:r>
-              <a:rPr sz="1400" b="1">
-                <a:solidFill>
-                  <a:srgbClr val="202122"/>
-                </a:solidFill>
-                <a:latin typeface="Calibri"/>
-              </a:rPr>
-              <a:t>5</a:t>
-            </a:r>
-          </a:p>
-        </p:txBody>
-      </p:sp>
-      <p:sp>
-        <p:nvSpPr>
-          <p:cNvPr id="15" name="TextBox 14"/>
-          <p:cNvSpPr txBox="1"/>
-          <p:nvPr/>
-        </p:nvSpPr>
-        <p:spPr>
-          <a:xfrm>
-            <a:off x="1234440" y="5426049"/>
-            <a:ext cx="10408615" cy="791870"/>
-          </a:xfrm>
-          <a:prstGeom prst="rect">
-            <a:avLst/>
-          </a:prstGeom>
-          <a:noFill/>
-        </p:spPr>
-        <p:txBody>
-          <a:bodyPr wrap="square" anchor="t" lIns="0" rIns="0" tIns="0" bIns="0"/>
-          <a:lstStyle/>
-          <a:p>
-            <a:pPr algn="l"/>
-            <a:r>
-              <a:rPr sz="2200" b="0" i="0">
-                <a:solidFill>
-                  <a:srgbClr val="202122"/>
-                </a:solidFill>
-                <a:latin typeface="Calibri"/>
-              </a:rPr>
-              <a:t>What must be set on the client side of a VPN?</a:t>
+              <a:t>A secure encrypted connection between two hosts, usually command line.</a:t>
             </a:r>
           </a:p>
         </p:txBody>
@@ -8743,7 +12001,7 @@
                 </a:solidFill>
                 <a:latin typeface="Cambria"/>
               </a:rPr>
-              <a:t>Answers</a:t>
+              <a:t>Quick check: Remote access methods</a:t>
             </a:r>
           </a:p>
         </p:txBody>
@@ -8822,8 +12080,8 @@
         </p:nvSpPr>
         <p:spPr>
           <a:xfrm>
-            <a:off x="548640" y="1618488"/>
-            <a:ext cx="411480" cy="411480"/>
+            <a:off x="548640" y="1691640"/>
+            <a:ext cx="502920" cy="502920"/>
           </a:xfrm>
           <a:prstGeom prst="ellipse">
             <a:avLst/>
@@ -8856,7 +12114,7 @@
           <a:p>
             <a:pPr algn="ctr"/>
             <a:r>
-              <a:rPr sz="1400" b="1">
+              <a:rPr sz="1600" b="1">
                 <a:solidFill>
                   <a:srgbClr val="202122"/>
                 </a:solidFill>
@@ -8875,8 +12133,8 @@
         </p:nvSpPr>
         <p:spPr>
           <a:xfrm>
-            <a:off x="1234440" y="1600200"/>
-            <a:ext cx="10408615" cy="791870"/>
+            <a:off x="1371600" y="1645920"/>
+            <a:ext cx="10271455" cy="1188720"/>
           </a:xfrm>
           <a:prstGeom prst="rect">
             <a:avLst/>
@@ -8889,24 +12147,13 @@
           <a:p>
             <a:pPr algn="l"/>
             <a:r>
-              <a:rPr sz="1800" b="0" i="0">
-                <a:solidFill>
-                  <a:srgbClr val="54595D"/>
-                </a:solidFill>
-                <a:latin typeface="Calibri"/>
-              </a:rPr>
-              <a:t>What is an OU?</a:t>
-            </a:r>
-          </a:p>
-          <a:p>
-            <a:r>
-              <a:rPr sz="1800" b="1">
-                <a:solidFill>
-                  <a:srgbClr val="03306E"/>
-                </a:solidFill>
-                <a:latin typeface="Calibri"/>
-              </a:rPr>
-              <a:t>An organisational unit: a container in Active Directory for users, groups and devices.</a:t>
+              <a:rPr sz="2400" b="0" i="0">
+                <a:solidFill>
+                  <a:srgbClr val="202122"/>
+                </a:solidFill>
+                <a:latin typeface="Calibri"/>
+              </a:rPr>
+              <a:t>What does a VPN create?</a:t>
             </a:r>
           </a:p>
         </p:txBody>
@@ -8919,8 +12166,8 @@
         </p:nvSpPr>
         <p:spPr>
           <a:xfrm>
-            <a:off x="548640" y="2574950"/>
-            <a:ext cx="411480" cy="411480"/>
+            <a:off x="548640" y="3108960"/>
+            <a:ext cx="502920" cy="502920"/>
           </a:xfrm>
           <a:prstGeom prst="ellipse">
             <a:avLst/>
@@ -8953,7 +12200,7 @@
           <a:p>
             <a:pPr algn="ctr"/>
             <a:r>
-              <a:rPr sz="1400" b="1">
+              <a:rPr sz="1600" b="1">
                 <a:solidFill>
                   <a:srgbClr val="202122"/>
                 </a:solidFill>
@@ -8972,8 +12219,8 @@
         </p:nvSpPr>
         <p:spPr>
           <a:xfrm>
-            <a:off x="1234440" y="2556662"/>
-            <a:ext cx="10408615" cy="791870"/>
+            <a:off x="1371600" y="3063240"/>
+            <a:ext cx="10271455" cy="1188720"/>
           </a:xfrm>
           <a:prstGeom prst="rect">
             <a:avLst/>
@@ -8986,24 +12233,13 @@
           <a:p>
             <a:pPr algn="l"/>
             <a:r>
-              <a:rPr sz="1800" b="0" i="0">
-                <a:solidFill>
-                  <a:srgbClr val="54595D"/>
-                </a:solidFill>
-                <a:latin typeface="Calibri"/>
-              </a:rPr>
-              <a:t>Which service gives a PC its IP address?</a:t>
-            </a:r>
-          </a:p>
-          <a:p>
-            <a:r>
-              <a:rPr sz="1800" b="1">
-                <a:solidFill>
-                  <a:srgbClr val="03306E"/>
-                </a:solidFill>
-                <a:latin typeface="Calibri"/>
-              </a:rPr>
-              <a:t>DHCP.</a:t>
+              <a:rPr sz="2400" b="0" i="0">
+                <a:solidFill>
+                  <a:srgbClr val="202122"/>
+                </a:solidFill>
+                <a:latin typeface="Calibri"/>
+              </a:rPr>
+              <a:t>Which method works even when a server is switched off?</a:t>
             </a:r>
           </a:p>
         </p:txBody>
@@ -9016,8 +12252,8 @@
         </p:nvSpPr>
         <p:spPr>
           <a:xfrm>
-            <a:off x="548640" y="3531412"/>
-            <a:ext cx="411480" cy="411480"/>
+            <a:off x="548640" y="4526280"/>
+            <a:ext cx="502920" cy="502920"/>
           </a:xfrm>
           <a:prstGeom prst="ellipse">
             <a:avLst/>
@@ -9050,7 +12286,7 @@
           <a:p>
             <a:pPr algn="ctr"/>
             <a:r>
-              <a:rPr sz="1400" b="1">
+              <a:rPr sz="1600" b="1">
                 <a:solidFill>
                   <a:srgbClr val="202122"/>
                 </a:solidFill>
@@ -9069,8 +12305,8 @@
         </p:nvSpPr>
         <p:spPr>
           <a:xfrm>
-            <a:off x="1234440" y="3513124"/>
-            <a:ext cx="10408615" cy="791870"/>
+            <a:off x="1371600" y="4480560"/>
+            <a:ext cx="10271455" cy="1188720"/>
           </a:xfrm>
           <a:prstGeom prst="rect">
             <a:avLst/>
@@ -9083,218 +12319,46 @@
           <a:p>
             <a:pPr algn="l"/>
             <a:r>
-              <a:rPr sz="1800" b="0" i="0">
+              <a:rPr sz="2400" b="0" i="0">
+                <a:solidFill>
+                  <a:srgbClr val="202122"/>
+                </a:solidFill>
+                <a:latin typeface="Calibri"/>
+              </a:rPr>
+              <a:t>What is SSH typically used for?</a:t>
+            </a:r>
+          </a:p>
+        </p:txBody>
+      </p:sp>
+      <p:sp>
+        <p:nvSpPr>
+          <p:cNvPr id="12" name="TextBox 11"/>
+          <p:cNvSpPr txBox="1"/>
+          <p:nvPr/>
+        </p:nvSpPr>
+        <p:spPr>
+          <a:xfrm>
+            <a:off x="548640" y="5852160"/>
+            <a:ext cx="11094415" cy="365760"/>
+          </a:xfrm>
+          <a:prstGeom prst="rect">
+            <a:avLst/>
+          </a:prstGeom>
+          <a:noFill/>
+        </p:spPr>
+        <p:txBody>
+          <a:bodyPr wrap="square" anchor="t" lIns="0" rIns="0" tIns="0" bIns="0"/>
+          <a:lstStyle/>
+          <a:p>
+            <a:pPr algn="l"/>
+            <a:r>
+              <a:rPr sz="1300" b="0" i="1">
                 <a:solidFill>
                   <a:srgbClr val="54595D"/>
                 </a:solidFill>
                 <a:latin typeface="Calibri"/>
               </a:rPr>
-              <a:t>What does DNS do?</a:t>
-            </a:r>
-          </a:p>
-          <a:p>
-            <a:r>
-              <a:rPr sz="1800" b="1">
-                <a:solidFill>
-                  <a:srgbClr val="03306E"/>
-                </a:solidFill>
-                <a:latin typeface="Calibri"/>
-              </a:rPr>
-              <a:t>Translates hostnames into IP addresses.</a:t>
-            </a:r>
-          </a:p>
-        </p:txBody>
-      </p:sp>
-      <p:sp>
-        <p:nvSpPr>
-          <p:cNvPr id="12" name="Oval 11"/>
-          <p:cNvSpPr/>
-          <p:nvPr/>
-        </p:nvSpPr>
-        <p:spPr>
-          <a:xfrm>
-            <a:off x="548640" y="4487875"/>
-            <a:ext cx="411480" cy="411480"/>
-          </a:xfrm>
-          <a:prstGeom prst="ellipse">
-            <a:avLst/>
-          </a:prstGeom>
-          <a:solidFill>
-            <a:srgbClr val="33C17A"/>
-          </a:solidFill>
-          <a:ln>
-            <a:noFill/>
-          </a:ln>
-          <a:effectLst/>
-        </p:spPr>
-        <p:style>
-          <a:lnRef idx="1">
-            <a:schemeClr val="accent1"/>
-          </a:lnRef>
-          <a:fillRef idx="3">
-            <a:schemeClr val="accent1"/>
-          </a:fillRef>
-          <a:effectRef idx="2">
-            <a:schemeClr val="accent1"/>
-          </a:effectRef>
-          <a:fontRef idx="minor">
-            <a:schemeClr val="lt1"/>
-          </a:fontRef>
-        </p:style>
-        <p:txBody>
-          <a:bodyPr rtlCol="0" anchor="ctr" lIns="0" rIns="0" tIns="0" bIns="0"/>
-          <a:lstStyle/>
-          <a:p>
-            <a:pPr algn="ctr"/>
-            <a:r>
-              <a:rPr sz="1400" b="1">
-                <a:solidFill>
-                  <a:srgbClr val="202122"/>
-                </a:solidFill>
-                <a:latin typeface="Calibri"/>
-              </a:rPr>
-              <a:t>4</a:t>
-            </a:r>
-          </a:p>
-        </p:txBody>
-      </p:sp>
-      <p:sp>
-        <p:nvSpPr>
-          <p:cNvPr id="13" name="TextBox 12"/>
-          <p:cNvSpPr txBox="1"/>
-          <p:nvPr/>
-        </p:nvSpPr>
-        <p:spPr>
-          <a:xfrm>
-            <a:off x="1234440" y="4469587"/>
-            <a:ext cx="10408615" cy="791870"/>
-          </a:xfrm>
-          <a:prstGeom prst="rect">
-            <a:avLst/>
-          </a:prstGeom>
-          <a:noFill/>
-        </p:spPr>
-        <p:txBody>
-          <a:bodyPr wrap="square" anchor="t" lIns="0" rIns="0" tIns="0" bIns="0"/>
-          <a:lstStyle/>
-          <a:p>
-            <a:pPr algn="l"/>
-            <a:r>
-              <a:rPr sz="1800" b="0" i="0">
-                <a:solidFill>
-                  <a:srgbClr val="54595D"/>
-                </a:solidFill>
-                <a:latin typeface="Calibri"/>
-              </a:rPr>
-              <a:t>Which remote access method works even when the server is powered off?</a:t>
-            </a:r>
-          </a:p>
-          <a:p>
-            <a:r>
-              <a:rPr sz="1800" b="1">
-                <a:solidFill>
-                  <a:srgbClr val="03306E"/>
-                </a:solidFill>
-                <a:latin typeface="Calibri"/>
-              </a:rPr>
-              <a:t>Lights-out management (LOM).</a:t>
-            </a:r>
-          </a:p>
-        </p:txBody>
-      </p:sp>
-      <p:sp>
-        <p:nvSpPr>
-          <p:cNvPr id="14" name="Oval 13"/>
-          <p:cNvSpPr/>
-          <p:nvPr/>
-        </p:nvSpPr>
-        <p:spPr>
-          <a:xfrm>
-            <a:off x="548640" y="5444337"/>
-            <a:ext cx="411480" cy="411480"/>
-          </a:xfrm>
-          <a:prstGeom prst="ellipse">
-            <a:avLst/>
-          </a:prstGeom>
-          <a:solidFill>
-            <a:srgbClr val="33C17A"/>
-          </a:solidFill>
-          <a:ln>
-            <a:noFill/>
-          </a:ln>
-          <a:effectLst/>
-        </p:spPr>
-        <p:style>
-          <a:lnRef idx="1">
-            <a:schemeClr val="accent1"/>
-          </a:lnRef>
-          <a:fillRef idx="3">
-            <a:schemeClr val="accent1"/>
-          </a:fillRef>
-          <a:effectRef idx="2">
-            <a:schemeClr val="accent1"/>
-          </a:effectRef>
-          <a:fontRef idx="minor">
-            <a:schemeClr val="lt1"/>
-          </a:fontRef>
-        </p:style>
-        <p:txBody>
-          <a:bodyPr rtlCol="0" anchor="ctr" lIns="0" rIns="0" tIns="0" bIns="0"/>
-          <a:lstStyle/>
-          <a:p>
-            <a:pPr algn="ctr"/>
-            <a:r>
-              <a:rPr sz="1400" b="1">
-                <a:solidFill>
-                  <a:srgbClr val="202122"/>
-                </a:solidFill>
-                <a:latin typeface="Calibri"/>
-              </a:rPr>
-              <a:t>5</a:t>
-            </a:r>
-          </a:p>
-        </p:txBody>
-      </p:sp>
-      <p:sp>
-        <p:nvSpPr>
-          <p:cNvPr id="15" name="TextBox 14"/>
-          <p:cNvSpPr txBox="1"/>
-          <p:nvPr/>
-        </p:nvSpPr>
-        <p:spPr>
-          <a:xfrm>
-            <a:off x="1234440" y="5426049"/>
-            <a:ext cx="10408615" cy="791870"/>
-          </a:xfrm>
-          <a:prstGeom prst="rect">
-            <a:avLst/>
-          </a:prstGeom>
-          <a:noFill/>
-        </p:spPr>
-        <p:txBody>
-          <a:bodyPr wrap="square" anchor="t" lIns="0" rIns="0" tIns="0" bIns="0"/>
-          <a:lstStyle/>
-          <a:p>
-            <a:pPr algn="l"/>
-            <a:r>
-              <a:rPr sz="1800" b="0" i="0">
-                <a:solidFill>
-                  <a:srgbClr val="54595D"/>
-                </a:solidFill>
-                <a:latin typeface="Calibri"/>
-              </a:rPr>
-              <a:t>What must be set on the client side of a VPN?</a:t>
-            </a:r>
-          </a:p>
-          <a:p>
-            <a:r>
-              <a:rPr sz="1800" b="1">
-                <a:solidFill>
-                  <a:srgbClr val="03306E"/>
-                </a:solidFill>
-                <a:latin typeface="Calibri"/>
-              </a:rPr>
-              <a:t>The connection, destination IP or FQDN, and permissions.</a:t>
+              <a:t>Answer on mini whiteboards or in your book. Answers are in the speaker notes.</a:t>
             </a:r>
           </a:p>
         </p:txBody>
@@ -9386,7 +12450,7 @@
                 </a:solidFill>
                 <a:latin typeface="Cambria"/>
               </a:rPr>
-              <a:t>Activity: Build a mini domain</a:t>
+              <a:t>Setting up a simple VPN</a:t>
             </a:r>
           </a:p>
         </p:txBody>
@@ -9465,16 +12529,16 @@
         </p:nvSpPr>
         <p:spPr>
           <a:xfrm>
-            <a:off x="548640" y="1508760"/>
-            <a:ext cx="2011680" cy="457200"/>
+            <a:off x="548640" y="1600200"/>
+            <a:ext cx="5364327" cy="640080"/>
           </a:xfrm>
           <a:prstGeom prst="roundRect">
             <a:avLst>
-              <a:gd name="adj" fmla="val 50000"/>
+              <a:gd name="adj" fmla="val 15000"/>
             </a:avLst>
           </a:prstGeom>
           <a:solidFill>
-            <a:srgbClr val="33C17A"/>
+            <a:srgbClr val="03306E"/>
           </a:solidFill>
           <a:ln>
             <a:noFill/>
@@ -9509,8 +12573,8 @@
         </p:nvSpPr>
         <p:spPr>
           <a:xfrm>
-            <a:off x="548640" y="1508760"/>
-            <a:ext cx="2011680" cy="457200"/>
+            <a:off x="777240" y="1600200"/>
+            <a:ext cx="4907127" cy="640080"/>
           </a:xfrm>
           <a:prstGeom prst="rect">
             <a:avLst/>
@@ -9521,65 +12585,185 @@
           <a:bodyPr wrap="square" anchor="ctr" lIns="0" rIns="0" tIns="0" bIns="0"/>
           <a:lstStyle/>
           <a:p>
-            <a:pPr algn="ctr"/>
-            <a:r>
-              <a:rPr sz="1400" b="1" i="0">
+            <a:pPr algn="l"/>
+            <a:r>
+              <a:rPr sz="2000" b="1" i="0">
+                <a:solidFill>
+                  <a:srgbClr val="FFFFFF"/>
+                </a:solidFill>
+                <a:latin typeface="Calibri"/>
+              </a:rPr>
+              <a:t>Server side</a:t>
+            </a:r>
+          </a:p>
+        </p:txBody>
+      </p:sp>
+      <p:sp>
+        <p:nvSpPr>
+          <p:cNvPr id="8" name="Rounded Rectangle 7"/>
+          <p:cNvSpPr/>
+          <p:nvPr/>
+        </p:nvSpPr>
+        <p:spPr>
+          <a:xfrm>
+            <a:off x="548640" y="2377440"/>
+            <a:ext cx="5364327" cy="3794760"/>
+          </a:xfrm>
+          <a:prstGeom prst="roundRect">
+            <a:avLst>
+              <a:gd name="adj" fmla="val 4000"/>
+            </a:avLst>
+          </a:prstGeom>
+          <a:solidFill>
+            <a:srgbClr val="EAF3FF"/>
+          </a:solidFill>
+          <a:ln>
+            <a:noFill/>
+          </a:ln>
+          <a:effectLst/>
+        </p:spPr>
+        <p:style>
+          <a:lnRef idx="1">
+            <a:schemeClr val="accent1"/>
+          </a:lnRef>
+          <a:fillRef idx="3">
+            <a:schemeClr val="accent1"/>
+          </a:fillRef>
+          <a:effectRef idx="2">
+            <a:schemeClr val="accent1"/>
+          </a:effectRef>
+          <a:fontRef idx="minor">
+            <a:schemeClr val="lt1"/>
+          </a:fontRef>
+        </p:style>
+        <p:txBody>
+          <a:bodyPr rtlCol="0" anchor="ctr"/>
+          <a:lstStyle/>
+          <a:p/>
+        </p:txBody>
+      </p:sp>
+      <p:sp>
+        <p:nvSpPr>
+          <p:cNvPr id="9" name="TextBox 8"/>
+          <p:cNvSpPr txBox="1"/>
+          <p:nvPr/>
+        </p:nvSpPr>
+        <p:spPr>
+          <a:xfrm>
+            <a:off x="822959" y="2606040"/>
+            <a:ext cx="4815687" cy="3337560"/>
+          </a:xfrm>
+          <a:prstGeom prst="rect">
+            <a:avLst/>
+          </a:prstGeom>
+          <a:noFill/>
+        </p:spPr>
+        <p:txBody>
+          <a:bodyPr wrap="square" lIns="0" rIns="0" tIns="0" bIns="0">
+            <a:spAutoFit/>
+          </a:bodyPr>
+          <a:lstStyle/>
+          <a:p>
+            <a:pPr marL="274320" indent="-274320">
+              <a:spcAft>
+                <a:spcPts val="990"/>
+              </a:spcAft>
+              <a:buClr>
+                <a:srgbClr val="0645AD"/>
+              </a:buClr>
+              <a:buFont typeface="Arial"/>
+              <a:buChar char="•"/>
+            </a:pPr>
+            <a:r>
+              <a:rPr sz="2200" b="0">
                 <a:solidFill>
                   <a:srgbClr val="202122"/>
                 </a:solidFill>
                 <a:latin typeface="Calibri"/>
               </a:rPr>
-              <a:t>50 minutes</a:t>
-            </a:r>
-          </a:p>
-        </p:txBody>
-      </p:sp>
-      <p:sp>
-        <p:nvSpPr>
-          <p:cNvPr id="8" name="TextBox 7"/>
-          <p:cNvSpPr txBox="1"/>
-          <p:nvPr/>
-        </p:nvSpPr>
-        <p:spPr>
-          <a:xfrm>
-            <a:off x="2743200" y="1508760"/>
-            <a:ext cx="4754880" cy="457200"/>
-          </a:xfrm>
-          <a:prstGeom prst="rect">
-            <a:avLst/>
-          </a:prstGeom>
-          <a:noFill/>
-        </p:spPr>
-        <p:txBody>
-          <a:bodyPr wrap="square" anchor="ctr" lIns="0" rIns="0" tIns="0" bIns="0"/>
-          <a:lstStyle/>
-          <a:p>
-            <a:pPr algn="l"/>
-            <a:r>
-              <a:rPr sz="1400" b="0" i="1">
-                <a:solidFill>
-                  <a:srgbClr val="54595D"/>
-                </a:solidFill>
-                <a:latin typeface="Calibri"/>
-              </a:rPr>
-              <a:t>Pairs, on VMs</a:t>
-            </a:r>
-          </a:p>
-        </p:txBody>
-      </p:sp>
-      <p:sp>
-        <p:nvSpPr>
-          <p:cNvPr id="9" name="Oval 8"/>
+              <a:t>Enable the VPN service</a:t>
+            </a:r>
+          </a:p>
+          <a:p>
+            <a:pPr marL="274320" indent="-274320">
+              <a:spcAft>
+                <a:spcPts val="990"/>
+              </a:spcAft>
+              <a:buClr>
+                <a:srgbClr val="0645AD"/>
+              </a:buClr>
+              <a:buFont typeface="Arial"/>
+              <a:buChar char="•"/>
+            </a:pPr>
+            <a:r>
+              <a:rPr sz="2200" b="0">
+                <a:solidFill>
+                  <a:srgbClr val="202122"/>
+                </a:solidFill>
+                <a:latin typeface="Calibri"/>
+              </a:rPr>
+              <a:t>Set IP addressing and DNS</a:t>
+            </a:r>
+          </a:p>
+          <a:p>
+            <a:pPr marL="274320" indent="-274320">
+              <a:spcAft>
+                <a:spcPts val="990"/>
+              </a:spcAft>
+              <a:buClr>
+                <a:srgbClr val="0645AD"/>
+              </a:buClr>
+              <a:buFont typeface="Arial"/>
+              <a:buChar char="•"/>
+            </a:pPr>
+            <a:r>
+              <a:rPr sz="2200" b="0">
+                <a:solidFill>
+                  <a:srgbClr val="202122"/>
+                </a:solidFill>
+                <a:latin typeface="Calibri"/>
+              </a:rPr>
+              <a:t>Manage authentication</a:t>
+            </a:r>
+          </a:p>
+          <a:p>
+            <a:pPr marL="274320" indent="-274320">
+              <a:spcAft>
+                <a:spcPts val="990"/>
+              </a:spcAft>
+              <a:buClr>
+                <a:srgbClr val="0645AD"/>
+              </a:buClr>
+              <a:buFont typeface="Arial"/>
+              <a:buChar char="•"/>
+            </a:pPr>
+            <a:r>
+              <a:rPr sz="2200" b="0">
+                <a:solidFill>
+                  <a:srgbClr val="202122"/>
+                </a:solidFill>
+                <a:latin typeface="Calibri"/>
+              </a:rPr>
+              <a:t>Set user permissions</a:t>
+            </a:r>
+          </a:p>
+        </p:txBody>
+      </p:sp>
+      <p:sp>
+        <p:nvSpPr>
+          <p:cNvPr id="10" name="Rounded Rectangle 9"/>
           <p:cNvSpPr/>
           <p:nvPr/>
         </p:nvSpPr>
         <p:spPr>
           <a:xfrm>
-            <a:off x="548640" y="2482596"/>
-            <a:ext cx="384048" cy="384048"/>
-          </a:xfrm>
-          <a:prstGeom prst="ellipse">
-            <a:avLst/>
+            <a:off x="6278727" y="1600200"/>
+            <a:ext cx="5364327" cy="640080"/>
+          </a:xfrm>
+          <a:prstGeom prst="roundRect">
+            <a:avLst>
+              <a:gd name="adj" fmla="val 15000"/>
+            </a:avLst>
           </a:prstGeom>
           <a:solidFill>
             <a:srgbClr val="0645AD"/>
@@ -9604,327 +12788,58 @@
           </a:fontRef>
         </p:style>
         <p:txBody>
-          <a:bodyPr rtlCol="0" anchor="ctr" lIns="0" rIns="0" tIns="0" bIns="0"/>
-          <a:lstStyle/>
-          <a:p>
-            <a:pPr algn="ctr"/>
-            <a:r>
-              <a:rPr sz="1300" b="1">
+          <a:bodyPr rtlCol="0" anchor="ctr"/>
+          <a:lstStyle/>
+          <a:p/>
+        </p:txBody>
+      </p:sp>
+      <p:sp>
+        <p:nvSpPr>
+          <p:cNvPr id="11" name="TextBox 10"/>
+          <p:cNvSpPr txBox="1"/>
+          <p:nvPr/>
+        </p:nvSpPr>
+        <p:spPr>
+          <a:xfrm>
+            <a:off x="6507327" y="1600200"/>
+            <a:ext cx="4907127" cy="640080"/>
+          </a:xfrm>
+          <a:prstGeom prst="rect">
+            <a:avLst/>
+          </a:prstGeom>
+          <a:noFill/>
+        </p:spPr>
+        <p:txBody>
+          <a:bodyPr wrap="square" anchor="ctr" lIns="0" rIns="0" tIns="0" bIns="0"/>
+          <a:lstStyle/>
+          <a:p>
+            <a:pPr algn="l"/>
+            <a:r>
+              <a:rPr sz="2000" b="1" i="0">
                 <a:solidFill>
                   <a:srgbClr val="FFFFFF"/>
                 </a:solidFill>
                 <a:latin typeface="Calibri"/>
               </a:rPr>
-              <a:t>1</a:t>
-            </a:r>
-          </a:p>
-        </p:txBody>
-      </p:sp>
-      <p:sp>
-        <p:nvSpPr>
-          <p:cNvPr id="10" name="TextBox 9"/>
-          <p:cNvSpPr txBox="1"/>
-          <p:nvPr/>
-        </p:nvSpPr>
-        <p:spPr>
-          <a:xfrm>
-            <a:off x="1143000" y="2240280"/>
-            <a:ext cx="5943600" cy="868680"/>
-          </a:xfrm>
-          <a:prstGeom prst="rect">
-            <a:avLst/>
-          </a:prstGeom>
-          <a:noFill/>
-        </p:spPr>
-        <p:txBody>
-          <a:bodyPr wrap="square" anchor="ctr" lIns="0" rIns="0" tIns="0" bIns="0"/>
-          <a:lstStyle/>
-          <a:p>
-            <a:pPr algn="l"/>
-            <a:r>
-              <a:rPr sz="1700" b="0" i="0">
-                <a:solidFill>
-                  <a:srgbClr val="202122"/>
-                </a:solidFill>
-                <a:latin typeface="Calibri"/>
-              </a:rPr>
-              <a:t>Promote a Windows Server VM to a domain controller with DNS.</a:t>
-            </a:r>
-          </a:p>
-        </p:txBody>
-      </p:sp>
-      <p:sp>
-        <p:nvSpPr>
-          <p:cNvPr id="11" name="Oval 10"/>
+              <a:t>Client side</a:t>
+            </a:r>
+          </a:p>
+        </p:txBody>
+      </p:sp>
+      <p:sp>
+        <p:nvSpPr>
+          <p:cNvPr id="12" name="Rounded Rectangle 11"/>
           <p:cNvSpPr/>
           <p:nvPr/>
         </p:nvSpPr>
         <p:spPr>
           <a:xfrm>
-            <a:off x="548640" y="3461004"/>
-            <a:ext cx="384048" cy="384048"/>
-          </a:xfrm>
-          <a:prstGeom prst="ellipse">
-            <a:avLst/>
-          </a:prstGeom>
-          <a:solidFill>
-            <a:srgbClr val="0645AD"/>
-          </a:solidFill>
-          <a:ln>
-            <a:noFill/>
-          </a:ln>
-          <a:effectLst/>
-        </p:spPr>
-        <p:style>
-          <a:lnRef idx="1">
-            <a:schemeClr val="accent1"/>
-          </a:lnRef>
-          <a:fillRef idx="3">
-            <a:schemeClr val="accent1"/>
-          </a:fillRef>
-          <a:effectRef idx="2">
-            <a:schemeClr val="accent1"/>
-          </a:effectRef>
-          <a:fontRef idx="minor">
-            <a:schemeClr val="lt1"/>
-          </a:fontRef>
-        </p:style>
-        <p:txBody>
-          <a:bodyPr rtlCol="0" anchor="ctr" lIns="0" rIns="0" tIns="0" bIns="0"/>
-          <a:lstStyle/>
-          <a:p>
-            <a:pPr algn="ctr"/>
-            <a:r>
-              <a:rPr sz="1300" b="1">
-                <a:solidFill>
-                  <a:srgbClr val="FFFFFF"/>
-                </a:solidFill>
-                <a:latin typeface="Calibri"/>
-              </a:rPr>
-              <a:t>2</a:t>
-            </a:r>
-          </a:p>
-        </p:txBody>
-      </p:sp>
-      <p:sp>
-        <p:nvSpPr>
-          <p:cNvPr id="12" name="TextBox 11"/>
-          <p:cNvSpPr txBox="1"/>
-          <p:nvPr/>
-        </p:nvSpPr>
-        <p:spPr>
-          <a:xfrm>
-            <a:off x="1143000" y="3218688"/>
-            <a:ext cx="5943600" cy="868680"/>
-          </a:xfrm>
-          <a:prstGeom prst="rect">
-            <a:avLst/>
-          </a:prstGeom>
-          <a:noFill/>
-        </p:spPr>
-        <p:txBody>
-          <a:bodyPr wrap="square" anchor="ctr" lIns="0" rIns="0" tIns="0" bIns="0"/>
-          <a:lstStyle/>
-          <a:p>
-            <a:pPr algn="l"/>
-            <a:r>
-              <a:rPr sz="1700" b="0" i="0">
-                <a:solidFill>
-                  <a:srgbClr val="202122"/>
-                </a:solidFill>
-                <a:latin typeface="Calibri"/>
-              </a:rPr>
-              <a:t>Add DHCP with a small scope.</a:t>
-            </a:r>
-          </a:p>
-        </p:txBody>
-      </p:sp>
-      <p:sp>
-        <p:nvSpPr>
-          <p:cNvPr id="13" name="Oval 12"/>
-          <p:cNvSpPr/>
-          <p:nvPr/>
-        </p:nvSpPr>
-        <p:spPr>
-          <a:xfrm>
-            <a:off x="548640" y="4439412"/>
-            <a:ext cx="384048" cy="384048"/>
-          </a:xfrm>
-          <a:prstGeom prst="ellipse">
-            <a:avLst/>
-          </a:prstGeom>
-          <a:solidFill>
-            <a:srgbClr val="0645AD"/>
-          </a:solidFill>
-          <a:ln>
-            <a:noFill/>
-          </a:ln>
-          <a:effectLst/>
-        </p:spPr>
-        <p:style>
-          <a:lnRef idx="1">
-            <a:schemeClr val="accent1"/>
-          </a:lnRef>
-          <a:fillRef idx="3">
-            <a:schemeClr val="accent1"/>
-          </a:fillRef>
-          <a:effectRef idx="2">
-            <a:schemeClr val="accent1"/>
-          </a:effectRef>
-          <a:fontRef idx="minor">
-            <a:schemeClr val="lt1"/>
-          </a:fontRef>
-        </p:style>
-        <p:txBody>
-          <a:bodyPr rtlCol="0" anchor="ctr" lIns="0" rIns="0" tIns="0" bIns="0"/>
-          <a:lstStyle/>
-          <a:p>
-            <a:pPr algn="ctr"/>
-            <a:r>
-              <a:rPr sz="1300" b="1">
-                <a:solidFill>
-                  <a:srgbClr val="FFFFFF"/>
-                </a:solidFill>
-                <a:latin typeface="Calibri"/>
-              </a:rPr>
-              <a:t>3</a:t>
-            </a:r>
-          </a:p>
-        </p:txBody>
-      </p:sp>
-      <p:sp>
-        <p:nvSpPr>
-          <p:cNvPr id="14" name="TextBox 13"/>
-          <p:cNvSpPr txBox="1"/>
-          <p:nvPr/>
-        </p:nvSpPr>
-        <p:spPr>
-          <a:xfrm>
-            <a:off x="1143000" y="4197096"/>
-            <a:ext cx="5943600" cy="868680"/>
-          </a:xfrm>
-          <a:prstGeom prst="rect">
-            <a:avLst/>
-          </a:prstGeom>
-          <a:noFill/>
-        </p:spPr>
-        <p:txBody>
-          <a:bodyPr wrap="square" anchor="ctr" lIns="0" rIns="0" tIns="0" bIns="0"/>
-          <a:lstStyle/>
-          <a:p>
-            <a:pPr algn="l"/>
-            <a:r>
-              <a:rPr sz="1700" b="0" i="0">
-                <a:solidFill>
-                  <a:srgbClr val="202122"/>
-                </a:solidFill>
-                <a:latin typeface="Calibri"/>
-              </a:rPr>
-              <a:t>Create two OUs with a user in each, and a GPO that sets a desktop wallpaper for one OU.</a:t>
-            </a:r>
-          </a:p>
-        </p:txBody>
-      </p:sp>
-      <p:sp>
-        <p:nvSpPr>
-          <p:cNvPr id="15" name="Oval 14"/>
-          <p:cNvSpPr/>
-          <p:nvPr/>
-        </p:nvSpPr>
-        <p:spPr>
-          <a:xfrm>
-            <a:off x="548640" y="5417820"/>
-            <a:ext cx="384048" cy="384048"/>
-          </a:xfrm>
-          <a:prstGeom prst="ellipse">
-            <a:avLst/>
-          </a:prstGeom>
-          <a:solidFill>
-            <a:srgbClr val="0645AD"/>
-          </a:solidFill>
-          <a:ln>
-            <a:noFill/>
-          </a:ln>
-          <a:effectLst/>
-        </p:spPr>
-        <p:style>
-          <a:lnRef idx="1">
-            <a:schemeClr val="accent1"/>
-          </a:lnRef>
-          <a:fillRef idx="3">
-            <a:schemeClr val="accent1"/>
-          </a:fillRef>
-          <a:effectRef idx="2">
-            <a:schemeClr val="accent1"/>
-          </a:effectRef>
-          <a:fontRef idx="minor">
-            <a:schemeClr val="lt1"/>
-          </a:fontRef>
-        </p:style>
-        <p:txBody>
-          <a:bodyPr rtlCol="0" anchor="ctr" lIns="0" rIns="0" tIns="0" bIns="0"/>
-          <a:lstStyle/>
-          <a:p>
-            <a:pPr algn="ctr"/>
-            <a:r>
-              <a:rPr sz="1300" b="1">
-                <a:solidFill>
-                  <a:srgbClr val="FFFFFF"/>
-                </a:solidFill>
-                <a:latin typeface="Calibri"/>
-              </a:rPr>
-              <a:t>4</a:t>
-            </a:r>
-          </a:p>
-        </p:txBody>
-      </p:sp>
-      <p:sp>
-        <p:nvSpPr>
-          <p:cNvPr id="16" name="TextBox 15"/>
-          <p:cNvSpPr txBox="1"/>
-          <p:nvPr/>
-        </p:nvSpPr>
-        <p:spPr>
-          <a:xfrm>
-            <a:off x="1143000" y="5175504"/>
-            <a:ext cx="5943600" cy="868680"/>
-          </a:xfrm>
-          <a:prstGeom prst="rect">
-            <a:avLst/>
-          </a:prstGeom>
-          <a:noFill/>
-        </p:spPr>
-        <p:txBody>
-          <a:bodyPr wrap="square" anchor="ctr" lIns="0" rIns="0" tIns="0" bIns="0"/>
-          <a:lstStyle/>
-          <a:p>
-            <a:pPr algn="l"/>
-            <a:r>
-              <a:rPr sz="1700" b="0" i="0">
-                <a:solidFill>
-                  <a:srgbClr val="202122"/>
-                </a:solidFill>
-                <a:latin typeface="Calibri"/>
-              </a:rPr>
-              <a:t>Join a client VM to the domain and test both users.</a:t>
-            </a:r>
-          </a:p>
-        </p:txBody>
-      </p:sp>
-      <p:sp>
-        <p:nvSpPr>
-          <p:cNvPr id="17" name="Rounded Rectangle 16"/>
-          <p:cNvSpPr/>
-          <p:nvPr/>
-        </p:nvSpPr>
-        <p:spPr>
-          <a:xfrm>
-            <a:off x="7772400" y="1508760"/>
-            <a:ext cx="3867912" cy="4572000"/>
+            <a:off x="6278727" y="2377440"/>
+            <a:ext cx="5364327" cy="3794760"/>
           </a:xfrm>
           <a:prstGeom prst="roundRect">
             <a:avLst>
-              <a:gd name="adj" fmla="val 8000"/>
+              <a:gd name="adj" fmla="val 4000"/>
             </a:avLst>
           </a:prstGeom>
           <a:solidFill>
@@ -9957,47 +12872,14 @@
       </p:sp>
       <p:sp>
         <p:nvSpPr>
-          <p:cNvPr id="18" name="TextBox 17"/>
+          <p:cNvPr id="13" name="TextBox 12"/>
           <p:cNvSpPr txBox="1"/>
           <p:nvPr/>
         </p:nvSpPr>
         <p:spPr>
           <a:xfrm>
-            <a:off x="8046720" y="1737360"/>
-            <a:ext cx="3291840" cy="365760"/>
-          </a:xfrm>
-          <a:prstGeom prst="rect">
-            <a:avLst/>
-          </a:prstGeom>
-          <a:noFill/>
-        </p:spPr>
-        <p:txBody>
-          <a:bodyPr wrap="square" anchor="t" lIns="0" rIns="0" tIns="0" bIns="0"/>
-          <a:lstStyle/>
-          <a:p>
-            <a:pPr algn="l"/>
-            <a:r>
-              <a:rPr sz="1300" b="1" i="0">
-                <a:solidFill>
-                  <a:srgbClr val="0645AD"/>
-                </a:solidFill>
-                <a:latin typeface="Calibri"/>
-              </a:rPr>
-              <a:t>SUCCESS CRITERIA</a:t>
-            </a:r>
-          </a:p>
-        </p:txBody>
-      </p:sp>
-      <p:sp>
-        <p:nvSpPr>
-          <p:cNvPr id="19" name="TextBox 18"/>
-          <p:cNvSpPr txBox="1"/>
-          <p:nvPr/>
-        </p:nvSpPr>
-        <p:spPr>
-          <a:xfrm>
-            <a:off x="8046720" y="2240280"/>
-            <a:ext cx="3337560" cy="3657600"/>
+            <a:off x="6553047" y="2606040"/>
+            <a:ext cx="4815687" cy="3337560"/>
           </a:xfrm>
           <a:prstGeom prst="rect">
             <a:avLst/>
@@ -10012,7 +12894,7 @@
           <a:p>
             <a:pPr marL="274320" indent="-274320">
               <a:spcAft>
-                <a:spcPts val="810"/>
+                <a:spcPts val="990"/>
               </a:spcAft>
               <a:buClr>
                 <a:srgbClr val="0645AD"/>
@@ -10021,19 +12903,19 @@
               <a:buChar char="•"/>
             </a:pPr>
             <a:r>
-              <a:rPr sz="1800" b="0">
+              <a:rPr sz="2200" b="0">
                 <a:solidFill>
                   <a:srgbClr val="202122"/>
                 </a:solidFill>
                 <a:latin typeface="Calibri"/>
               </a:rPr>
-              <a:t>Client receives an address from DHCP</a:t>
+              <a:t>Create the connection</a:t>
             </a:r>
           </a:p>
           <a:p>
             <a:pPr marL="274320" indent="-274320">
               <a:spcAft>
-                <a:spcPts val="810"/>
+                <a:spcPts val="990"/>
               </a:spcAft>
               <a:buClr>
                 <a:srgbClr val="0645AD"/>
@@ -10042,19 +12924,19 @@
               <a:buChar char="•"/>
             </a:pPr>
             <a:r>
-              <a:rPr sz="1800" b="0">
+              <a:rPr sz="2200" b="0">
                 <a:solidFill>
                   <a:srgbClr val="202122"/>
                 </a:solidFill>
                 <a:latin typeface="Calibri"/>
               </a:rPr>
-              <a:t>Both users log on</a:t>
+              <a:t>Set the destination IP or FQDN</a:t>
             </a:r>
           </a:p>
           <a:p>
             <a:pPr marL="274320" indent="-274320">
               <a:spcAft>
-                <a:spcPts val="810"/>
+                <a:spcPts val="990"/>
               </a:spcAft>
               <a:buClr>
                 <a:srgbClr val="0645AD"/>
@@ -10063,19 +12945,19 @@
               <a:buChar char="•"/>
             </a:pPr>
             <a:r>
-              <a:rPr sz="1800" b="0">
+              <a:rPr sz="2200" b="0">
                 <a:solidFill>
                   <a:srgbClr val="202122"/>
                 </a:solidFill>
                 <a:latin typeface="Calibri"/>
               </a:rPr>
-              <a:t>GPO applies to the right OU only</a:t>
+              <a:t>Set permissions and conditions</a:t>
             </a:r>
           </a:p>
           <a:p>
             <a:pPr marL="274320" indent="-274320">
               <a:spcAft>
-                <a:spcPts val="810"/>
+                <a:spcPts val="990"/>
               </a:spcAft>
               <a:buClr>
                 <a:srgbClr val="0645AD"/>
@@ -10084,13 +12966,13 @@
               <a:buChar char="•"/>
             </a:pPr>
             <a:r>
-              <a:rPr sz="1800" b="0">
+              <a:rPr sz="2200" b="0">
                 <a:solidFill>
                   <a:srgbClr val="202122"/>
                 </a:solidFill>
                 <a:latin typeface="Calibri"/>
               </a:rPr>
-              <a:t>Each step tested and recorded</a:t>
+              <a:t>Test the connection</a:t>
             </a:r>
           </a:p>
         </p:txBody>
